--- a/report/epigen1.pptx
+++ b/report/epigen1.pptx
@@ -5,11 +5,17 @@
     <p:sldMasterId id="2147483648" r:id="rId1"/>
   </p:sldMasterIdLst>
   <p:notesMasterIdLst>
-    <p:notesMasterId r:id="rId4"/>
+    <p:notesMasterId r:id="rId10"/>
   </p:notesMasterIdLst>
   <p:sldIdLst>
     <p:sldId id="256" r:id="rId2"/>
     <p:sldId id="257" r:id="rId3"/>
+    <p:sldId id="264" r:id="rId4"/>
+    <p:sldId id="259" r:id="rId5"/>
+    <p:sldId id="260" r:id="rId6"/>
+    <p:sldId id="261" r:id="rId7"/>
+    <p:sldId id="263" r:id="rId8"/>
+    <p:sldId id="262" r:id="rId9"/>
   </p:sldIdLst>
   <p:sldSz cx="12192000" cy="6858000"/>
   <p:notesSz cx="6858000" cy="9144000"/>
@@ -535,6 +541,654 @@
     <p:extLst>
       <p:ext uri="{BB962C8B-B14F-4D97-AF65-F5344CB8AC3E}">
         <p14:creationId xmlns:p14="http://schemas.microsoft.com/office/powerpoint/2010/main" val="1290943566"/>
+      </p:ext>
+    </p:extLst>
+  </p:cSld>
+  <p:clrMapOvr>
+    <a:masterClrMapping/>
+  </p:clrMapOvr>
+</p:notes>
+</file>
+
+<file path=ppt/notesSlides/notesSlide2.xml><?xml version="1.0" encoding="utf-8"?>
+<p:notes xmlns:a="http://schemas.openxmlformats.org/drawingml/2006/main" xmlns:r="http://schemas.openxmlformats.org/officeDocument/2006/relationships" xmlns:p="http://schemas.openxmlformats.org/presentationml/2006/main">
+  <p:cSld>
+    <p:spTree>
+      <p:nvGrpSpPr>
+        <p:cNvPr id="1" name="">
+          <a:extLst>
+            <a:ext uri="{FF2B5EF4-FFF2-40B4-BE49-F238E27FC236}">
+              <a16:creationId xmlns:a16="http://schemas.microsoft.com/office/drawing/2014/main" id="{DFF5835C-355A-AC5A-D6E5-B4B2E03D77F3}"/>
+            </a:ext>
+          </a:extLst>
+        </p:cNvPr>
+        <p:cNvGrpSpPr/>
+        <p:nvPr/>
+      </p:nvGrpSpPr>
+      <p:grpSpPr>
+        <a:xfrm>
+          <a:off x="0" y="0"/>
+          <a:ext cx="0" cy="0"/>
+          <a:chOff x="0" y="0"/>
+          <a:chExt cx="0" cy="0"/>
+        </a:xfrm>
+      </p:grpSpPr>
+      <p:sp>
+        <p:nvSpPr>
+          <p:cNvPr id="2" name="Slide Image Placeholder 1">
+            <a:extLst>
+              <a:ext uri="{FF2B5EF4-FFF2-40B4-BE49-F238E27FC236}">
+                <a16:creationId xmlns:a16="http://schemas.microsoft.com/office/drawing/2014/main" id="{DFB6A923-E546-F73B-DF26-2736217DC7D1}"/>
+              </a:ext>
+            </a:extLst>
+          </p:cNvPr>
+          <p:cNvSpPr>
+            <a:spLocks noGrp="1" noRot="1" noChangeAspect="1"/>
+          </p:cNvSpPr>
+          <p:nvPr>
+            <p:ph type="sldImg"/>
+          </p:nvPr>
+        </p:nvSpPr>
+        <p:spPr/>
+      </p:sp>
+      <p:sp>
+        <p:nvSpPr>
+          <p:cNvPr id="3" name="Notes Placeholder 2">
+            <a:extLst>
+              <a:ext uri="{FF2B5EF4-FFF2-40B4-BE49-F238E27FC236}">
+                <a16:creationId xmlns:a16="http://schemas.microsoft.com/office/drawing/2014/main" id="{BB463720-CC17-3C17-C075-31A51A1542E1}"/>
+              </a:ext>
+            </a:extLst>
+          </p:cNvPr>
+          <p:cNvSpPr>
+            <a:spLocks noGrp="1"/>
+          </p:cNvSpPr>
+          <p:nvPr>
+            <p:ph type="body" idx="1"/>
+          </p:nvPr>
+        </p:nvSpPr>
+        <p:spPr/>
+        <p:txBody>
+          <a:bodyPr/>
+          <a:lstStyle/>
+          <a:p>
+            <a:endParaRPr lang="en-US" dirty="0"/>
+          </a:p>
+        </p:txBody>
+      </p:sp>
+      <p:sp>
+        <p:nvSpPr>
+          <p:cNvPr id="4" name="Slide Number Placeholder 3">
+            <a:extLst>
+              <a:ext uri="{FF2B5EF4-FFF2-40B4-BE49-F238E27FC236}">
+                <a16:creationId xmlns:a16="http://schemas.microsoft.com/office/drawing/2014/main" id="{6F794F5C-8FB5-921B-58EC-B522DA24444A}"/>
+              </a:ext>
+            </a:extLst>
+          </p:cNvPr>
+          <p:cNvSpPr>
+            <a:spLocks noGrp="1"/>
+          </p:cNvSpPr>
+          <p:nvPr>
+            <p:ph type="sldNum" sz="quarter" idx="5"/>
+          </p:nvPr>
+        </p:nvSpPr>
+        <p:spPr/>
+        <p:txBody>
+          <a:bodyPr/>
+          <a:lstStyle/>
+          <a:p>
+            <a:fld id="{D2E744F7-269E-5C4B-85B0-2F0F8F48427D}" type="slidenum">
+              <a:rPr lang="en-US" smtClean="0"/>
+              <a:t>3</a:t>
+            </a:fld>
+            <a:endParaRPr lang="en-US"/>
+          </a:p>
+        </p:txBody>
+      </p:sp>
+    </p:spTree>
+    <p:extLst>
+      <p:ext uri="{BB962C8B-B14F-4D97-AF65-F5344CB8AC3E}">
+        <p14:creationId xmlns:p14="http://schemas.microsoft.com/office/powerpoint/2010/main" val="1740863837"/>
+      </p:ext>
+    </p:extLst>
+  </p:cSld>
+  <p:clrMapOvr>
+    <a:masterClrMapping/>
+  </p:clrMapOvr>
+</p:notes>
+</file>
+
+<file path=ppt/notesSlides/notesSlide3.xml><?xml version="1.0" encoding="utf-8"?>
+<p:notes xmlns:a="http://schemas.openxmlformats.org/drawingml/2006/main" xmlns:r="http://schemas.openxmlformats.org/officeDocument/2006/relationships" xmlns:p="http://schemas.openxmlformats.org/presentationml/2006/main">
+  <p:cSld>
+    <p:spTree>
+      <p:nvGrpSpPr>
+        <p:cNvPr id="1" name="">
+          <a:extLst>
+            <a:ext uri="{FF2B5EF4-FFF2-40B4-BE49-F238E27FC236}">
+              <a16:creationId xmlns:a16="http://schemas.microsoft.com/office/drawing/2014/main" id="{F9ABF1D0-34BB-72CA-2DAF-95581E6796AF}"/>
+            </a:ext>
+          </a:extLst>
+        </p:cNvPr>
+        <p:cNvGrpSpPr/>
+        <p:nvPr/>
+      </p:nvGrpSpPr>
+      <p:grpSpPr>
+        <a:xfrm>
+          <a:off x="0" y="0"/>
+          <a:ext cx="0" cy="0"/>
+          <a:chOff x="0" y="0"/>
+          <a:chExt cx="0" cy="0"/>
+        </a:xfrm>
+      </p:grpSpPr>
+      <p:sp>
+        <p:nvSpPr>
+          <p:cNvPr id="2" name="Slide Image Placeholder 1">
+            <a:extLst>
+              <a:ext uri="{FF2B5EF4-FFF2-40B4-BE49-F238E27FC236}">
+                <a16:creationId xmlns:a16="http://schemas.microsoft.com/office/drawing/2014/main" id="{B733B979-CE59-DAC5-0738-C16278DD1771}"/>
+              </a:ext>
+            </a:extLst>
+          </p:cNvPr>
+          <p:cNvSpPr>
+            <a:spLocks noGrp="1" noRot="1" noChangeAspect="1"/>
+          </p:cNvSpPr>
+          <p:nvPr>
+            <p:ph type="sldImg"/>
+          </p:nvPr>
+        </p:nvSpPr>
+        <p:spPr/>
+      </p:sp>
+      <p:sp>
+        <p:nvSpPr>
+          <p:cNvPr id="3" name="Notes Placeholder 2">
+            <a:extLst>
+              <a:ext uri="{FF2B5EF4-FFF2-40B4-BE49-F238E27FC236}">
+                <a16:creationId xmlns:a16="http://schemas.microsoft.com/office/drawing/2014/main" id="{862C8364-2B2A-8AF9-B7A1-0D6C16F1A697}"/>
+              </a:ext>
+            </a:extLst>
+          </p:cNvPr>
+          <p:cNvSpPr>
+            <a:spLocks noGrp="1"/>
+          </p:cNvSpPr>
+          <p:nvPr>
+            <p:ph type="body" idx="1"/>
+          </p:nvPr>
+        </p:nvSpPr>
+        <p:spPr/>
+        <p:txBody>
+          <a:bodyPr/>
+          <a:lstStyle/>
+          <a:p>
+            <a:endParaRPr lang="en-US" dirty="0"/>
+          </a:p>
+        </p:txBody>
+      </p:sp>
+      <p:sp>
+        <p:nvSpPr>
+          <p:cNvPr id="4" name="Slide Number Placeholder 3">
+            <a:extLst>
+              <a:ext uri="{FF2B5EF4-FFF2-40B4-BE49-F238E27FC236}">
+                <a16:creationId xmlns:a16="http://schemas.microsoft.com/office/drawing/2014/main" id="{1C3E8199-54D1-F086-71BE-1896CBA7DB1D}"/>
+              </a:ext>
+            </a:extLst>
+          </p:cNvPr>
+          <p:cNvSpPr>
+            <a:spLocks noGrp="1"/>
+          </p:cNvSpPr>
+          <p:nvPr>
+            <p:ph type="sldNum" sz="quarter" idx="5"/>
+          </p:nvPr>
+        </p:nvSpPr>
+        <p:spPr/>
+        <p:txBody>
+          <a:bodyPr/>
+          <a:lstStyle/>
+          <a:p>
+            <a:fld id="{D2E744F7-269E-5C4B-85B0-2F0F8F48427D}" type="slidenum">
+              <a:rPr lang="en-US" smtClean="0"/>
+              <a:t>4</a:t>
+            </a:fld>
+            <a:endParaRPr lang="en-US"/>
+          </a:p>
+        </p:txBody>
+      </p:sp>
+    </p:spTree>
+    <p:extLst>
+      <p:ext uri="{BB962C8B-B14F-4D97-AF65-F5344CB8AC3E}">
+        <p14:creationId xmlns:p14="http://schemas.microsoft.com/office/powerpoint/2010/main" val="4098074501"/>
+      </p:ext>
+    </p:extLst>
+  </p:cSld>
+  <p:clrMapOvr>
+    <a:masterClrMapping/>
+  </p:clrMapOvr>
+</p:notes>
+</file>
+
+<file path=ppt/notesSlides/notesSlide4.xml><?xml version="1.0" encoding="utf-8"?>
+<p:notes xmlns:a="http://schemas.openxmlformats.org/drawingml/2006/main" xmlns:r="http://schemas.openxmlformats.org/officeDocument/2006/relationships" xmlns:p="http://schemas.openxmlformats.org/presentationml/2006/main">
+  <p:cSld>
+    <p:spTree>
+      <p:nvGrpSpPr>
+        <p:cNvPr id="1" name="">
+          <a:extLst>
+            <a:ext uri="{FF2B5EF4-FFF2-40B4-BE49-F238E27FC236}">
+              <a16:creationId xmlns:a16="http://schemas.microsoft.com/office/drawing/2014/main" id="{5ED138E9-B416-30E3-6A4C-36EDA7A9302F}"/>
+            </a:ext>
+          </a:extLst>
+        </p:cNvPr>
+        <p:cNvGrpSpPr/>
+        <p:nvPr/>
+      </p:nvGrpSpPr>
+      <p:grpSpPr>
+        <a:xfrm>
+          <a:off x="0" y="0"/>
+          <a:ext cx="0" cy="0"/>
+          <a:chOff x="0" y="0"/>
+          <a:chExt cx="0" cy="0"/>
+        </a:xfrm>
+      </p:grpSpPr>
+      <p:sp>
+        <p:nvSpPr>
+          <p:cNvPr id="2" name="Slide Image Placeholder 1">
+            <a:extLst>
+              <a:ext uri="{FF2B5EF4-FFF2-40B4-BE49-F238E27FC236}">
+                <a16:creationId xmlns:a16="http://schemas.microsoft.com/office/drawing/2014/main" id="{914959B7-CDA3-1057-77B1-DF55C74D6C21}"/>
+              </a:ext>
+            </a:extLst>
+          </p:cNvPr>
+          <p:cNvSpPr>
+            <a:spLocks noGrp="1" noRot="1" noChangeAspect="1"/>
+          </p:cNvSpPr>
+          <p:nvPr>
+            <p:ph type="sldImg"/>
+          </p:nvPr>
+        </p:nvSpPr>
+        <p:spPr/>
+      </p:sp>
+      <p:sp>
+        <p:nvSpPr>
+          <p:cNvPr id="3" name="Notes Placeholder 2">
+            <a:extLst>
+              <a:ext uri="{FF2B5EF4-FFF2-40B4-BE49-F238E27FC236}">
+                <a16:creationId xmlns:a16="http://schemas.microsoft.com/office/drawing/2014/main" id="{4C8000D9-91B0-C8A5-2DDD-A243B17E42FC}"/>
+              </a:ext>
+            </a:extLst>
+          </p:cNvPr>
+          <p:cNvSpPr>
+            <a:spLocks noGrp="1"/>
+          </p:cNvSpPr>
+          <p:nvPr>
+            <p:ph type="body" idx="1"/>
+          </p:nvPr>
+        </p:nvSpPr>
+        <p:spPr/>
+        <p:txBody>
+          <a:bodyPr/>
+          <a:lstStyle/>
+          <a:p>
+            <a:endParaRPr lang="en-US" dirty="0"/>
+          </a:p>
+        </p:txBody>
+      </p:sp>
+      <p:sp>
+        <p:nvSpPr>
+          <p:cNvPr id="4" name="Slide Number Placeholder 3">
+            <a:extLst>
+              <a:ext uri="{FF2B5EF4-FFF2-40B4-BE49-F238E27FC236}">
+                <a16:creationId xmlns:a16="http://schemas.microsoft.com/office/drawing/2014/main" id="{739487BF-2736-97F3-C5E0-FD4A9ACB18D6}"/>
+              </a:ext>
+            </a:extLst>
+          </p:cNvPr>
+          <p:cNvSpPr>
+            <a:spLocks noGrp="1"/>
+          </p:cNvSpPr>
+          <p:nvPr>
+            <p:ph type="sldNum" sz="quarter" idx="5"/>
+          </p:nvPr>
+        </p:nvSpPr>
+        <p:spPr/>
+        <p:txBody>
+          <a:bodyPr/>
+          <a:lstStyle/>
+          <a:p>
+            <a:fld id="{D2E744F7-269E-5C4B-85B0-2F0F8F48427D}" type="slidenum">
+              <a:rPr lang="en-US" smtClean="0"/>
+              <a:t>5</a:t>
+            </a:fld>
+            <a:endParaRPr lang="en-US"/>
+          </a:p>
+        </p:txBody>
+      </p:sp>
+    </p:spTree>
+    <p:extLst>
+      <p:ext uri="{BB962C8B-B14F-4D97-AF65-F5344CB8AC3E}">
+        <p14:creationId xmlns:p14="http://schemas.microsoft.com/office/powerpoint/2010/main" val="1162328816"/>
+      </p:ext>
+    </p:extLst>
+  </p:cSld>
+  <p:clrMapOvr>
+    <a:masterClrMapping/>
+  </p:clrMapOvr>
+</p:notes>
+</file>
+
+<file path=ppt/notesSlides/notesSlide5.xml><?xml version="1.0" encoding="utf-8"?>
+<p:notes xmlns:a="http://schemas.openxmlformats.org/drawingml/2006/main" xmlns:r="http://schemas.openxmlformats.org/officeDocument/2006/relationships" xmlns:p="http://schemas.openxmlformats.org/presentationml/2006/main">
+  <p:cSld>
+    <p:spTree>
+      <p:nvGrpSpPr>
+        <p:cNvPr id="1" name="">
+          <a:extLst>
+            <a:ext uri="{FF2B5EF4-FFF2-40B4-BE49-F238E27FC236}">
+              <a16:creationId xmlns:a16="http://schemas.microsoft.com/office/drawing/2014/main" id="{47A52304-788C-6401-23B1-99EB9B77105F}"/>
+            </a:ext>
+          </a:extLst>
+        </p:cNvPr>
+        <p:cNvGrpSpPr/>
+        <p:nvPr/>
+      </p:nvGrpSpPr>
+      <p:grpSpPr>
+        <a:xfrm>
+          <a:off x="0" y="0"/>
+          <a:ext cx="0" cy="0"/>
+          <a:chOff x="0" y="0"/>
+          <a:chExt cx="0" cy="0"/>
+        </a:xfrm>
+      </p:grpSpPr>
+      <p:sp>
+        <p:nvSpPr>
+          <p:cNvPr id="2" name="Slide Image Placeholder 1">
+            <a:extLst>
+              <a:ext uri="{FF2B5EF4-FFF2-40B4-BE49-F238E27FC236}">
+                <a16:creationId xmlns:a16="http://schemas.microsoft.com/office/drawing/2014/main" id="{03371DEC-607A-B005-ABF0-3A8F23C3F920}"/>
+              </a:ext>
+            </a:extLst>
+          </p:cNvPr>
+          <p:cNvSpPr>
+            <a:spLocks noGrp="1" noRot="1" noChangeAspect="1"/>
+          </p:cNvSpPr>
+          <p:nvPr>
+            <p:ph type="sldImg"/>
+          </p:nvPr>
+        </p:nvSpPr>
+        <p:spPr/>
+      </p:sp>
+      <p:sp>
+        <p:nvSpPr>
+          <p:cNvPr id="3" name="Notes Placeholder 2">
+            <a:extLst>
+              <a:ext uri="{FF2B5EF4-FFF2-40B4-BE49-F238E27FC236}">
+                <a16:creationId xmlns:a16="http://schemas.microsoft.com/office/drawing/2014/main" id="{026EE523-7752-A9CD-BE2C-10EE52191536}"/>
+              </a:ext>
+            </a:extLst>
+          </p:cNvPr>
+          <p:cNvSpPr>
+            <a:spLocks noGrp="1"/>
+          </p:cNvSpPr>
+          <p:nvPr>
+            <p:ph type="body" idx="1"/>
+          </p:nvPr>
+        </p:nvSpPr>
+        <p:spPr/>
+        <p:txBody>
+          <a:bodyPr/>
+          <a:lstStyle/>
+          <a:p>
+            <a:endParaRPr lang="en-US" dirty="0"/>
+          </a:p>
+        </p:txBody>
+      </p:sp>
+      <p:sp>
+        <p:nvSpPr>
+          <p:cNvPr id="4" name="Slide Number Placeholder 3">
+            <a:extLst>
+              <a:ext uri="{FF2B5EF4-FFF2-40B4-BE49-F238E27FC236}">
+                <a16:creationId xmlns:a16="http://schemas.microsoft.com/office/drawing/2014/main" id="{16BF3303-F099-6DE2-E57C-FBA7BEA31617}"/>
+              </a:ext>
+            </a:extLst>
+          </p:cNvPr>
+          <p:cNvSpPr>
+            <a:spLocks noGrp="1"/>
+          </p:cNvSpPr>
+          <p:nvPr>
+            <p:ph type="sldNum" sz="quarter" idx="5"/>
+          </p:nvPr>
+        </p:nvSpPr>
+        <p:spPr/>
+        <p:txBody>
+          <a:bodyPr/>
+          <a:lstStyle/>
+          <a:p>
+            <a:fld id="{D2E744F7-269E-5C4B-85B0-2F0F8F48427D}" type="slidenum">
+              <a:rPr lang="en-US" smtClean="0"/>
+              <a:t>6</a:t>
+            </a:fld>
+            <a:endParaRPr lang="en-US"/>
+          </a:p>
+        </p:txBody>
+      </p:sp>
+    </p:spTree>
+    <p:extLst>
+      <p:ext uri="{BB962C8B-B14F-4D97-AF65-F5344CB8AC3E}">
+        <p14:creationId xmlns:p14="http://schemas.microsoft.com/office/powerpoint/2010/main" val="1888273881"/>
+      </p:ext>
+    </p:extLst>
+  </p:cSld>
+  <p:clrMapOvr>
+    <a:masterClrMapping/>
+  </p:clrMapOvr>
+</p:notes>
+</file>
+
+<file path=ppt/notesSlides/notesSlide6.xml><?xml version="1.0" encoding="utf-8"?>
+<p:notes xmlns:a="http://schemas.openxmlformats.org/drawingml/2006/main" xmlns:r="http://schemas.openxmlformats.org/officeDocument/2006/relationships" xmlns:p="http://schemas.openxmlformats.org/presentationml/2006/main">
+  <p:cSld>
+    <p:spTree>
+      <p:nvGrpSpPr>
+        <p:cNvPr id="1" name="">
+          <a:extLst>
+            <a:ext uri="{FF2B5EF4-FFF2-40B4-BE49-F238E27FC236}">
+              <a16:creationId xmlns:a16="http://schemas.microsoft.com/office/drawing/2014/main" id="{1AB29BA5-BFE7-C61C-F011-6A818D5A3C65}"/>
+            </a:ext>
+          </a:extLst>
+        </p:cNvPr>
+        <p:cNvGrpSpPr/>
+        <p:nvPr/>
+      </p:nvGrpSpPr>
+      <p:grpSpPr>
+        <a:xfrm>
+          <a:off x="0" y="0"/>
+          <a:ext cx="0" cy="0"/>
+          <a:chOff x="0" y="0"/>
+          <a:chExt cx="0" cy="0"/>
+        </a:xfrm>
+      </p:grpSpPr>
+      <p:sp>
+        <p:nvSpPr>
+          <p:cNvPr id="2" name="Slide Image Placeholder 1">
+            <a:extLst>
+              <a:ext uri="{FF2B5EF4-FFF2-40B4-BE49-F238E27FC236}">
+                <a16:creationId xmlns:a16="http://schemas.microsoft.com/office/drawing/2014/main" id="{74485C7A-8F5C-8DDC-990F-B25A9F2D1B5A}"/>
+              </a:ext>
+            </a:extLst>
+          </p:cNvPr>
+          <p:cNvSpPr>
+            <a:spLocks noGrp="1" noRot="1" noChangeAspect="1"/>
+          </p:cNvSpPr>
+          <p:nvPr>
+            <p:ph type="sldImg"/>
+          </p:nvPr>
+        </p:nvSpPr>
+        <p:spPr/>
+      </p:sp>
+      <p:sp>
+        <p:nvSpPr>
+          <p:cNvPr id="3" name="Notes Placeholder 2">
+            <a:extLst>
+              <a:ext uri="{FF2B5EF4-FFF2-40B4-BE49-F238E27FC236}">
+                <a16:creationId xmlns:a16="http://schemas.microsoft.com/office/drawing/2014/main" id="{6B1100CA-CA34-79D5-BD8C-4729DB72F3DF}"/>
+              </a:ext>
+            </a:extLst>
+          </p:cNvPr>
+          <p:cNvSpPr>
+            <a:spLocks noGrp="1"/>
+          </p:cNvSpPr>
+          <p:nvPr>
+            <p:ph type="body" idx="1"/>
+          </p:nvPr>
+        </p:nvSpPr>
+        <p:spPr/>
+        <p:txBody>
+          <a:bodyPr/>
+          <a:lstStyle/>
+          <a:p>
+            <a:endParaRPr lang="en-US" dirty="0"/>
+          </a:p>
+        </p:txBody>
+      </p:sp>
+      <p:sp>
+        <p:nvSpPr>
+          <p:cNvPr id="4" name="Slide Number Placeholder 3">
+            <a:extLst>
+              <a:ext uri="{FF2B5EF4-FFF2-40B4-BE49-F238E27FC236}">
+                <a16:creationId xmlns:a16="http://schemas.microsoft.com/office/drawing/2014/main" id="{CD79244C-BD75-8B8E-9326-1EF90B8C6847}"/>
+              </a:ext>
+            </a:extLst>
+          </p:cNvPr>
+          <p:cNvSpPr>
+            <a:spLocks noGrp="1"/>
+          </p:cNvSpPr>
+          <p:nvPr>
+            <p:ph type="sldNum" sz="quarter" idx="5"/>
+          </p:nvPr>
+        </p:nvSpPr>
+        <p:spPr/>
+        <p:txBody>
+          <a:bodyPr/>
+          <a:lstStyle/>
+          <a:p>
+            <a:fld id="{D2E744F7-269E-5C4B-85B0-2F0F8F48427D}" type="slidenum">
+              <a:rPr lang="en-US" smtClean="0"/>
+              <a:t>7</a:t>
+            </a:fld>
+            <a:endParaRPr lang="en-US"/>
+          </a:p>
+        </p:txBody>
+      </p:sp>
+    </p:spTree>
+    <p:extLst>
+      <p:ext uri="{BB962C8B-B14F-4D97-AF65-F5344CB8AC3E}">
+        <p14:creationId xmlns:p14="http://schemas.microsoft.com/office/powerpoint/2010/main" val="957353646"/>
+      </p:ext>
+    </p:extLst>
+  </p:cSld>
+  <p:clrMapOvr>
+    <a:masterClrMapping/>
+  </p:clrMapOvr>
+</p:notes>
+</file>
+
+<file path=ppt/notesSlides/notesSlide7.xml><?xml version="1.0" encoding="utf-8"?>
+<p:notes xmlns:a="http://schemas.openxmlformats.org/drawingml/2006/main" xmlns:r="http://schemas.openxmlformats.org/officeDocument/2006/relationships" xmlns:p="http://schemas.openxmlformats.org/presentationml/2006/main">
+  <p:cSld>
+    <p:spTree>
+      <p:nvGrpSpPr>
+        <p:cNvPr id="1" name="">
+          <a:extLst>
+            <a:ext uri="{FF2B5EF4-FFF2-40B4-BE49-F238E27FC236}">
+              <a16:creationId xmlns:a16="http://schemas.microsoft.com/office/drawing/2014/main" id="{57E4D6F3-C8DD-F90B-AAB6-24B76A050E1B}"/>
+            </a:ext>
+          </a:extLst>
+        </p:cNvPr>
+        <p:cNvGrpSpPr/>
+        <p:nvPr/>
+      </p:nvGrpSpPr>
+      <p:grpSpPr>
+        <a:xfrm>
+          <a:off x="0" y="0"/>
+          <a:ext cx="0" cy="0"/>
+          <a:chOff x="0" y="0"/>
+          <a:chExt cx="0" cy="0"/>
+        </a:xfrm>
+      </p:grpSpPr>
+      <p:sp>
+        <p:nvSpPr>
+          <p:cNvPr id="2" name="Slide Image Placeholder 1">
+            <a:extLst>
+              <a:ext uri="{FF2B5EF4-FFF2-40B4-BE49-F238E27FC236}">
+                <a16:creationId xmlns:a16="http://schemas.microsoft.com/office/drawing/2014/main" id="{626AED40-37F2-77EE-3B7B-A268C03D20FA}"/>
+              </a:ext>
+            </a:extLst>
+          </p:cNvPr>
+          <p:cNvSpPr>
+            <a:spLocks noGrp="1" noRot="1" noChangeAspect="1"/>
+          </p:cNvSpPr>
+          <p:nvPr>
+            <p:ph type="sldImg"/>
+          </p:nvPr>
+        </p:nvSpPr>
+        <p:spPr/>
+      </p:sp>
+      <p:sp>
+        <p:nvSpPr>
+          <p:cNvPr id="3" name="Notes Placeholder 2">
+            <a:extLst>
+              <a:ext uri="{FF2B5EF4-FFF2-40B4-BE49-F238E27FC236}">
+                <a16:creationId xmlns:a16="http://schemas.microsoft.com/office/drawing/2014/main" id="{2F43C21B-CC86-4067-96FA-6FB06CE57E4C}"/>
+              </a:ext>
+            </a:extLst>
+          </p:cNvPr>
+          <p:cNvSpPr>
+            <a:spLocks noGrp="1"/>
+          </p:cNvSpPr>
+          <p:nvPr>
+            <p:ph type="body" idx="1"/>
+          </p:nvPr>
+        </p:nvSpPr>
+        <p:spPr/>
+        <p:txBody>
+          <a:bodyPr/>
+          <a:lstStyle/>
+          <a:p>
+            <a:endParaRPr lang="en-US" dirty="0"/>
+          </a:p>
+        </p:txBody>
+      </p:sp>
+      <p:sp>
+        <p:nvSpPr>
+          <p:cNvPr id="4" name="Slide Number Placeholder 3">
+            <a:extLst>
+              <a:ext uri="{FF2B5EF4-FFF2-40B4-BE49-F238E27FC236}">
+                <a16:creationId xmlns:a16="http://schemas.microsoft.com/office/drawing/2014/main" id="{F64CFA01-F731-E970-085C-CB5EBC2BF90F}"/>
+              </a:ext>
+            </a:extLst>
+          </p:cNvPr>
+          <p:cNvSpPr>
+            <a:spLocks noGrp="1"/>
+          </p:cNvSpPr>
+          <p:nvPr>
+            <p:ph type="sldNum" sz="quarter" idx="5"/>
+          </p:nvPr>
+        </p:nvSpPr>
+        <p:spPr/>
+        <p:txBody>
+          <a:bodyPr/>
+          <a:lstStyle/>
+          <a:p>
+            <a:fld id="{D2E744F7-269E-5C4B-85B0-2F0F8F48427D}" type="slidenum">
+              <a:rPr lang="en-US" smtClean="0"/>
+              <a:t>8</a:t>
+            </a:fld>
+            <a:endParaRPr lang="en-US"/>
+          </a:p>
+        </p:txBody>
+      </p:sp>
+    </p:spTree>
+    <p:extLst>
+      <p:ext uri="{BB962C8B-B14F-4D97-AF65-F5344CB8AC3E}">
+        <p14:creationId xmlns:p14="http://schemas.microsoft.com/office/powerpoint/2010/main" val="2103366902"/>
       </p:ext>
     </p:extLst>
   </p:cSld>
@@ -3758,6 +4412,187 @@
           <a:chExt cx="0" cy="0"/>
         </a:xfrm>
       </p:grpSpPr>
+      <p:pic>
+        <p:nvPicPr>
+          <p:cNvPr id="5" name="Content Placeholder 4">
+            <a:extLst>
+              <a:ext uri="{FF2B5EF4-FFF2-40B4-BE49-F238E27FC236}">
+                <a16:creationId xmlns:a16="http://schemas.microsoft.com/office/drawing/2014/main" id="{E9BAB9A5-9565-1FE2-0949-6E2925F8E2F6}"/>
+              </a:ext>
+            </a:extLst>
+          </p:cNvPr>
+          <p:cNvPicPr>
+            <a:picLocks noChangeAspect="1"/>
+          </p:cNvPicPr>
+          <p:nvPr/>
+        </p:nvPicPr>
+        <p:blipFill>
+          <a:blip r:embed="rId2"/>
+          <a:srcRect l="24525" r="29074"/>
+          <a:stretch>
+            <a:fillRect/>
+          </a:stretch>
+        </p:blipFill>
+        <p:spPr>
+          <a:xfrm>
+            <a:off x="6511777" y="16559"/>
+            <a:ext cx="5680223" cy="6824882"/>
+          </a:xfrm>
+          <a:custGeom>
+            <a:avLst/>
+            <a:gdLst/>
+            <a:ahLst/>
+            <a:cxnLst/>
+            <a:rect l="l" t="t" r="r" b="b"/>
+            <a:pathLst>
+              <a:path w="4047645" h="2495811">
+                <a:moveTo>
+                  <a:pt x="2441891" y="4"/>
+                </a:moveTo>
+                <a:cubicBezTo>
+                  <a:pt x="2489381" y="-78"/>
+                  <a:pt x="2536882" y="1163"/>
+                  <a:pt x="2584383" y="4428"/>
+                </a:cubicBezTo>
+                <a:cubicBezTo>
+                  <a:pt x="2744314" y="17813"/>
+                  <a:pt x="2904989" y="21079"/>
+                  <a:pt x="3065367" y="14222"/>
+                </a:cubicBezTo>
+                <a:cubicBezTo>
+                  <a:pt x="3194244" y="5694"/>
+                  <a:pt x="3323514" y="4206"/>
+                  <a:pt x="3452568" y="9782"/>
+                </a:cubicBezTo>
+                <a:cubicBezTo>
+                  <a:pt x="3572813" y="16442"/>
+                  <a:pt x="3693059" y="23233"/>
+                  <a:pt x="3813712" y="19315"/>
+                </a:cubicBezTo>
+                <a:cubicBezTo>
+                  <a:pt x="3861755" y="17748"/>
+                  <a:pt x="3909121" y="15789"/>
+                  <a:pt x="3956758" y="13177"/>
+                </a:cubicBezTo>
+                <a:lnTo>
+                  <a:pt x="4047645" y="9696"/>
+                </a:lnTo>
+                <a:lnTo>
+                  <a:pt x="4047645" y="2495811"/>
+                </a:lnTo>
+                <a:lnTo>
+                  <a:pt x="28177" y="2495811"/>
+                </a:lnTo>
+                <a:lnTo>
+                  <a:pt x="28782" y="2485852"/>
+                </a:lnTo>
+                <a:cubicBezTo>
+                  <a:pt x="31911" y="2365446"/>
+                  <a:pt x="35027" y="2245002"/>
+                  <a:pt x="38157" y="2124521"/>
+                </a:cubicBezTo>
+                <a:cubicBezTo>
+                  <a:pt x="38284" y="2119444"/>
+                  <a:pt x="39171" y="2114494"/>
+                  <a:pt x="39171" y="2109417"/>
+                </a:cubicBezTo>
+                <a:cubicBezTo>
+                  <a:pt x="48166" y="1995573"/>
+                  <a:pt x="53107" y="1881729"/>
+                  <a:pt x="18899" y="1770550"/>
+                </a:cubicBezTo>
+                <a:cubicBezTo>
+                  <a:pt x="15871" y="1760104"/>
+                  <a:pt x="14262" y="1749304"/>
+                  <a:pt x="14084" y="1738440"/>
+                </a:cubicBezTo>
+                <a:cubicBezTo>
+                  <a:pt x="12413" y="1641514"/>
+                  <a:pt x="16644" y="1544587"/>
+                  <a:pt x="26754" y="1448181"/>
+                </a:cubicBezTo>
+                <a:cubicBezTo>
+                  <a:pt x="31949" y="1389038"/>
+                  <a:pt x="26754" y="1329006"/>
+                  <a:pt x="43478" y="1270498"/>
+                </a:cubicBezTo>
+                <a:cubicBezTo>
+                  <a:pt x="50864" y="1241421"/>
+                  <a:pt x="55109" y="1211634"/>
+                  <a:pt x="56147" y="1181656"/>
+                </a:cubicBezTo>
+                <a:cubicBezTo>
+                  <a:pt x="59948" y="1109060"/>
+                  <a:pt x="38537" y="1040779"/>
+                  <a:pt x="18139" y="972244"/>
+                </a:cubicBezTo>
+                <a:cubicBezTo>
+                  <a:pt x="7370" y="935945"/>
+                  <a:pt x="-5426" y="898886"/>
+                  <a:pt x="2429" y="860811"/>
+                </a:cubicBezTo>
+                <a:cubicBezTo>
+                  <a:pt x="16707" y="802251"/>
+                  <a:pt x="24854" y="742359"/>
+                  <a:pt x="26754" y="682112"/>
+                </a:cubicBezTo>
+                <a:cubicBezTo>
+                  <a:pt x="26754" y="639468"/>
+                  <a:pt x="16365" y="597712"/>
+                  <a:pt x="20039" y="555195"/>
+                </a:cubicBezTo>
+                <a:cubicBezTo>
+                  <a:pt x="28211" y="472712"/>
+                  <a:pt x="30238" y="389734"/>
+                  <a:pt x="26121" y="306946"/>
+                </a:cubicBezTo>
+                <a:cubicBezTo>
+                  <a:pt x="26095" y="273846"/>
+                  <a:pt x="29846" y="240848"/>
+                  <a:pt x="37270" y="208585"/>
+                </a:cubicBezTo>
+                <a:cubicBezTo>
+                  <a:pt x="46506" y="151651"/>
+                  <a:pt x="48419" y="93777"/>
+                  <a:pt x="42971" y="36360"/>
+                </a:cubicBezTo>
+                <a:lnTo>
+                  <a:pt x="38853" y="8429"/>
+                </a:lnTo>
+                <a:lnTo>
+                  <a:pt x="56649" y="7824"/>
+                </a:lnTo>
+                <a:cubicBezTo>
+                  <a:pt x="210497" y="-156"/>
+                  <a:pt x="364754" y="3162"/>
+                  <a:pt x="518087" y="17748"/>
+                </a:cubicBezTo>
+                <a:cubicBezTo>
+                  <a:pt x="626567" y="25440"/>
+                  <a:pt x="735534" y="24213"/>
+                  <a:pt x="843809" y="14092"/>
+                </a:cubicBezTo>
+                <a:cubicBezTo>
+                  <a:pt x="1042499" y="-1711"/>
+                  <a:pt x="1240782" y="10958"/>
+                  <a:pt x="1439065" y="21666"/>
+                </a:cubicBezTo>
+                <a:cubicBezTo>
+                  <a:pt x="1631105" y="32113"/>
+                  <a:pt x="1823010" y="24408"/>
+                  <a:pt x="2015050" y="17487"/>
+                </a:cubicBezTo>
+                <a:cubicBezTo>
+                  <a:pt x="2157045" y="12394"/>
+                  <a:pt x="2299420" y="249"/>
+                  <a:pt x="2441891" y="4"/>
+                </a:cubicBezTo>
+                <a:close/>
+              </a:path>
+            </a:pathLst>
+          </a:custGeom>
+        </p:spPr>
+      </p:pic>
       <p:sp>
         <p:nvSpPr>
           <p:cNvPr id="2" name="Title 1">
@@ -3774,12 +4609,23 @@
             <p:ph type="ctrTitle"/>
           </p:nvPr>
         </p:nvSpPr>
-        <p:spPr/>
-        <p:txBody>
-          <a:bodyPr/>
+        <p:spPr>
+          <a:xfrm>
+            <a:off x="688490" y="441064"/>
+            <a:ext cx="4023360" cy="1344705"/>
+          </a:xfrm>
+        </p:spPr>
+        <p:txBody>
+          <a:bodyPr>
+            <a:normAutofit/>
+          </a:bodyPr>
           <a:lstStyle/>
           <a:p>
-            <a:endParaRPr lang="en-US"/>
+            <a:r>
+              <a:rPr lang="en-US" dirty="0" err="1"/>
+              <a:t>EpiGen</a:t>
+            </a:r>
+            <a:endParaRPr lang="en-US" dirty="0"/>
           </a:p>
         </p:txBody>
       </p:sp>
@@ -3799,12 +4645,49 @@
             <p:ph type="subTitle" idx="1"/>
           </p:nvPr>
         </p:nvSpPr>
-        <p:spPr/>
-        <p:txBody>
-          <a:bodyPr/>
+        <p:spPr>
+          <a:xfrm>
+            <a:off x="139850" y="3224605"/>
+            <a:ext cx="5776856" cy="1847627"/>
+          </a:xfrm>
+        </p:spPr>
+        <p:txBody>
+          <a:bodyPr>
+            <a:normAutofit/>
+          </a:bodyPr>
           <a:lstStyle/>
           <a:p>
-            <a:endParaRPr lang="en-US"/>
+            <a:r>
+              <a:rPr lang="en-US" dirty="0"/>
+              <a:t>Denny Trimcev, </a:t>
+            </a:r>
+            <a:r>
+              <a:rPr lang="en-US" dirty="0" err="1"/>
+              <a:t>PostDoc</a:t>
+            </a:r>
+            <a:r>
+              <a:rPr lang="en-US" dirty="0"/>
+              <a:t> @ </a:t>
+            </a:r>
+            <a:r>
+              <a:rPr lang="en-US" dirty="0" err="1"/>
+              <a:t>AndinoLab</a:t>
+            </a:r>
+            <a:r>
+              <a:rPr lang="en-US" dirty="0"/>
+              <a:t>, UCSF</a:t>
+            </a:r>
+          </a:p>
+          <a:p>
+            <a:r>
+              <a:rPr lang="en-US" dirty="0"/>
+              <a:t>Aru Singh @</a:t>
+            </a:r>
+            <a:r>
+              <a:rPr lang="en-US" dirty="0" err="1"/>
+              <a:t>arubikscube</a:t>
+            </a:r>
+            <a:endParaRPr lang="en-US" dirty="0"/>
           </a:p>
         </p:txBody>
       </p:sp>
@@ -3846,6 +4729,409 @@
           <a:chExt cx="0" cy="0"/>
         </a:xfrm>
       </p:grpSpPr>
+      <p:sp useBgFill="1">
+        <p:nvSpPr>
+          <p:cNvPr id="21" name="Rectangle 20">
+            <a:extLst>
+              <a:ext uri="{FF2B5EF4-FFF2-40B4-BE49-F238E27FC236}">
+                <a16:creationId xmlns:a16="http://schemas.microsoft.com/office/drawing/2014/main" id="{394842B0-684D-44CC-B4BC-D13331CFD290}"/>
+              </a:ext>
+              <a:ext uri="{C183D7F6-B498-43B3-948B-1728B52AA6E4}">
+                <adec:decorative xmlns:adec="http://schemas.microsoft.com/office/drawing/2017/decorative" val="1"/>
+              </a:ext>
+            </a:extLst>
+          </p:cNvPr>
+          <p:cNvSpPr>
+            <a:spLocks noGrp="1" noRot="1" noChangeAspect="1" noMove="1" noResize="1" noEditPoints="1" noAdjustHandles="1" noChangeArrowheads="1" noChangeShapeType="1" noTextEdit="1"/>
+          </p:cNvSpPr>
+          <p:nvPr>
+            <p:extLst>
+              <p:ext uri="{386F3935-93C4-4BCD-93E2-E3B085C9AB24}">
+                <p16:designElem xmlns:p16="http://schemas.microsoft.com/office/powerpoint/2015/main" val="1"/>
+              </p:ext>
+            </p:extLst>
+          </p:nvPr>
+        </p:nvSpPr>
+        <p:spPr>
+          <a:xfrm>
+            <a:off x="0" y="0"/>
+            <a:ext cx="12188952" cy="6858000"/>
+          </a:xfrm>
+          <a:prstGeom prst="rect">
+            <a:avLst/>
+          </a:prstGeom>
+          <a:ln>
+            <a:noFill/>
+          </a:ln>
+        </p:spPr>
+        <p:style>
+          <a:lnRef idx="2">
+            <a:schemeClr val="accent1">
+              <a:shade val="50000"/>
+            </a:schemeClr>
+          </a:lnRef>
+          <a:fillRef idx="1">
+            <a:schemeClr val="accent1"/>
+          </a:fillRef>
+          <a:effectRef idx="0">
+            <a:schemeClr val="accent1"/>
+          </a:effectRef>
+          <a:fontRef idx="minor">
+            <a:schemeClr val="lt1"/>
+          </a:fontRef>
+        </p:style>
+        <p:txBody>
+          <a:bodyPr rtlCol="0" anchor="ctr"/>
+          <a:lstStyle/>
+          <a:p>
+            <a:pPr algn="ctr"/>
+            <a:endParaRPr lang="en-US"/>
+          </a:p>
+        </p:txBody>
+      </p:sp>
+      <p:sp>
+        <p:nvSpPr>
+          <p:cNvPr id="22" name="sketch line">
+            <a:extLst>
+              <a:ext uri="{FF2B5EF4-FFF2-40B4-BE49-F238E27FC236}">
+                <a16:creationId xmlns:a16="http://schemas.microsoft.com/office/drawing/2014/main" id="{4C2A3DC3-F495-4B99-9FF3-3FB30D63235E}"/>
+              </a:ext>
+              <a:ext uri="{C183D7F6-B498-43B3-948B-1728B52AA6E4}">
+                <adec:decorative xmlns:adec="http://schemas.microsoft.com/office/drawing/2017/decorative" val="1"/>
+              </a:ext>
+            </a:extLst>
+          </p:cNvPr>
+          <p:cNvSpPr>
+            <a:spLocks noGrp="1" noRot="1" noChangeAspect="1" noMove="1" noResize="1" noEditPoints="1" noAdjustHandles="1" noChangeArrowheads="1" noChangeShapeType="1" noTextEdit="1"/>
+          </p:cNvSpPr>
+          <p:nvPr>
+            <p:extLst>
+              <p:ext uri="{386F3935-93C4-4BCD-93E2-E3B085C9AB24}">
+                <p16:designElem xmlns:p16="http://schemas.microsoft.com/office/powerpoint/2015/main" val="1"/>
+              </p:ext>
+            </p:extLst>
+          </p:nvPr>
+        </p:nvSpPr>
+        <p:spPr>
+          <a:xfrm>
+            <a:off x="758952" y="2395728"/>
+            <a:ext cx="4243589" cy="18288"/>
+          </a:xfrm>
+          <a:custGeom>
+            <a:avLst/>
+            <a:gdLst>
+              <a:gd name="csX0" fmla="*/ 0 w 4243589"/>
+              <a:gd name="csY0" fmla="*/ 0 h 18288"/>
+              <a:gd name="csX1" fmla="*/ 478919 w 4243589"/>
+              <a:gd name="csY1" fmla="*/ 0 h 18288"/>
+              <a:gd name="csX2" fmla="*/ 957839 w 4243589"/>
+              <a:gd name="csY2" fmla="*/ 0 h 18288"/>
+              <a:gd name="csX3" fmla="*/ 1521630 w 4243589"/>
+              <a:gd name="csY3" fmla="*/ 0 h 18288"/>
+              <a:gd name="csX4" fmla="*/ 2212729 w 4243589"/>
+              <a:gd name="csY4" fmla="*/ 0 h 18288"/>
+              <a:gd name="csX5" fmla="*/ 2734084 w 4243589"/>
+              <a:gd name="csY5" fmla="*/ 0 h 18288"/>
+              <a:gd name="csX6" fmla="*/ 3255439 w 4243589"/>
+              <a:gd name="csY6" fmla="*/ 0 h 18288"/>
+              <a:gd name="csX7" fmla="*/ 4243589 w 4243589"/>
+              <a:gd name="csY7" fmla="*/ 0 h 18288"/>
+              <a:gd name="csX8" fmla="*/ 4243589 w 4243589"/>
+              <a:gd name="csY8" fmla="*/ 18288 h 18288"/>
+              <a:gd name="csX9" fmla="*/ 3594926 w 4243589"/>
+              <a:gd name="csY9" fmla="*/ 18288 h 18288"/>
+              <a:gd name="csX10" fmla="*/ 3073571 w 4243589"/>
+              <a:gd name="csY10" fmla="*/ 18288 h 18288"/>
+              <a:gd name="csX11" fmla="*/ 2552216 w 4243589"/>
+              <a:gd name="csY11" fmla="*/ 18288 h 18288"/>
+              <a:gd name="csX12" fmla="*/ 1903553 w 4243589"/>
+              <a:gd name="csY12" fmla="*/ 18288 h 18288"/>
+              <a:gd name="csX13" fmla="*/ 1212454 w 4243589"/>
+              <a:gd name="csY13" fmla="*/ 18288 h 18288"/>
+              <a:gd name="csX14" fmla="*/ 733535 w 4243589"/>
+              <a:gd name="csY14" fmla="*/ 18288 h 18288"/>
+              <a:gd name="csX15" fmla="*/ 0 w 4243589"/>
+              <a:gd name="csY15" fmla="*/ 18288 h 18288"/>
+              <a:gd name="csX16" fmla="*/ 0 w 4243589"/>
+              <a:gd name="csY16" fmla="*/ 0 h 18288"/>
+            </a:gdLst>
+            <a:ahLst/>
+            <a:cxnLst>
+              <a:cxn ang="0">
+                <a:pos x="csX0" y="csY0"/>
+              </a:cxn>
+              <a:cxn ang="0">
+                <a:pos x="csX1" y="csY1"/>
+              </a:cxn>
+              <a:cxn ang="0">
+                <a:pos x="csX2" y="csY2"/>
+              </a:cxn>
+              <a:cxn ang="0">
+                <a:pos x="csX3" y="csY3"/>
+              </a:cxn>
+              <a:cxn ang="0">
+                <a:pos x="csX4" y="csY4"/>
+              </a:cxn>
+              <a:cxn ang="0">
+                <a:pos x="csX5" y="csY5"/>
+              </a:cxn>
+              <a:cxn ang="0">
+                <a:pos x="csX6" y="csY6"/>
+              </a:cxn>
+              <a:cxn ang="0">
+                <a:pos x="csX7" y="csY7"/>
+              </a:cxn>
+              <a:cxn ang="0">
+                <a:pos x="csX8" y="csY8"/>
+              </a:cxn>
+              <a:cxn ang="0">
+                <a:pos x="csX9" y="csY9"/>
+              </a:cxn>
+              <a:cxn ang="0">
+                <a:pos x="csX10" y="csY10"/>
+              </a:cxn>
+              <a:cxn ang="0">
+                <a:pos x="csX11" y="csY11"/>
+              </a:cxn>
+              <a:cxn ang="0">
+                <a:pos x="csX12" y="csY12"/>
+              </a:cxn>
+              <a:cxn ang="0">
+                <a:pos x="csX13" y="csY13"/>
+              </a:cxn>
+              <a:cxn ang="0">
+                <a:pos x="csX14" y="csY14"/>
+              </a:cxn>
+              <a:cxn ang="0">
+                <a:pos x="csX15" y="csY15"/>
+              </a:cxn>
+              <a:cxn ang="0">
+                <a:pos x="csX16" y="csY16"/>
+              </a:cxn>
+            </a:cxnLst>
+            <a:rect l="l" t="t" r="r" b="b"/>
+            <a:pathLst>
+              <a:path w="4243589" h="18288" fill="none" extrusionOk="0">
+                <a:moveTo>
+                  <a:pt x="0" y="0"/>
+                </a:moveTo>
+                <a:cubicBezTo>
+                  <a:pt x="213395" y="-21006"/>
+                  <a:pt x="307421" y="-18116"/>
+                  <a:pt x="478919" y="0"/>
+                </a:cubicBezTo>
+                <a:cubicBezTo>
+                  <a:pt x="650417" y="18116"/>
+                  <a:pt x="831092" y="-21237"/>
+                  <a:pt x="957839" y="0"/>
+                </a:cubicBezTo>
+                <a:cubicBezTo>
+                  <a:pt x="1084586" y="21237"/>
+                  <a:pt x="1301682" y="25124"/>
+                  <a:pt x="1521630" y="0"/>
+                </a:cubicBezTo>
+                <a:cubicBezTo>
+                  <a:pt x="1741578" y="-25124"/>
+                  <a:pt x="1970269" y="-29139"/>
+                  <a:pt x="2212729" y="0"/>
+                </a:cubicBezTo>
+                <a:cubicBezTo>
+                  <a:pt x="2455189" y="29139"/>
+                  <a:pt x="2558847" y="-4796"/>
+                  <a:pt x="2734084" y="0"/>
+                </a:cubicBezTo>
+                <a:cubicBezTo>
+                  <a:pt x="2909321" y="4796"/>
+                  <a:pt x="3097217" y="-13409"/>
+                  <a:pt x="3255439" y="0"/>
+                </a:cubicBezTo>
+                <a:cubicBezTo>
+                  <a:pt x="3413662" y="13409"/>
+                  <a:pt x="3979999" y="-10121"/>
+                  <a:pt x="4243589" y="0"/>
+                </a:cubicBezTo>
+                <a:cubicBezTo>
+                  <a:pt x="4244484" y="8974"/>
+                  <a:pt x="4243043" y="9359"/>
+                  <a:pt x="4243589" y="18288"/>
+                </a:cubicBezTo>
+                <a:cubicBezTo>
+                  <a:pt x="4058777" y="31246"/>
+                  <a:pt x="3910348" y="3158"/>
+                  <a:pt x="3594926" y="18288"/>
+                </a:cubicBezTo>
+                <a:cubicBezTo>
+                  <a:pt x="3279504" y="33418"/>
+                  <a:pt x="3319955" y="-3977"/>
+                  <a:pt x="3073571" y="18288"/>
+                </a:cubicBezTo>
+                <a:cubicBezTo>
+                  <a:pt x="2827187" y="40553"/>
+                  <a:pt x="2767387" y="1863"/>
+                  <a:pt x="2552216" y="18288"/>
+                </a:cubicBezTo>
+                <a:cubicBezTo>
+                  <a:pt x="2337046" y="34713"/>
+                  <a:pt x="2181871" y="19527"/>
+                  <a:pt x="1903553" y="18288"/>
+                </a:cubicBezTo>
+                <a:cubicBezTo>
+                  <a:pt x="1625235" y="17049"/>
+                  <a:pt x="1557672" y="24174"/>
+                  <a:pt x="1212454" y="18288"/>
+                </a:cubicBezTo>
+                <a:cubicBezTo>
+                  <a:pt x="867236" y="12402"/>
+                  <a:pt x="874382" y="15627"/>
+                  <a:pt x="733535" y="18288"/>
+                </a:cubicBezTo>
+                <a:cubicBezTo>
+                  <a:pt x="592688" y="20949"/>
+                  <a:pt x="183477" y="14753"/>
+                  <a:pt x="0" y="18288"/>
+                </a:cubicBezTo>
+                <a:cubicBezTo>
+                  <a:pt x="-229" y="14222"/>
+                  <a:pt x="509" y="5816"/>
+                  <a:pt x="0" y="0"/>
+                </a:cubicBezTo>
+                <a:close/>
+              </a:path>
+              <a:path w="4243589" h="18288" stroke="0" extrusionOk="0">
+                <a:moveTo>
+                  <a:pt x="0" y="0"/>
+                </a:moveTo>
+                <a:cubicBezTo>
+                  <a:pt x="143690" y="16630"/>
+                  <a:pt x="266667" y="14847"/>
+                  <a:pt x="521355" y="0"/>
+                </a:cubicBezTo>
+                <a:cubicBezTo>
+                  <a:pt x="776043" y="-14847"/>
+                  <a:pt x="814491" y="-17363"/>
+                  <a:pt x="1000275" y="0"/>
+                </a:cubicBezTo>
+                <a:cubicBezTo>
+                  <a:pt x="1186059" y="17363"/>
+                  <a:pt x="1352504" y="-23507"/>
+                  <a:pt x="1521630" y="0"/>
+                </a:cubicBezTo>
+                <a:cubicBezTo>
+                  <a:pt x="1690756" y="23507"/>
+                  <a:pt x="1889525" y="5871"/>
+                  <a:pt x="2127857" y="0"/>
+                </a:cubicBezTo>
+                <a:cubicBezTo>
+                  <a:pt x="2366189" y="-5871"/>
+                  <a:pt x="2620628" y="-27997"/>
+                  <a:pt x="2776520" y="0"/>
+                </a:cubicBezTo>
+                <a:cubicBezTo>
+                  <a:pt x="2932412" y="27997"/>
+                  <a:pt x="3131683" y="-25073"/>
+                  <a:pt x="3467618" y="0"/>
+                </a:cubicBezTo>
+                <a:cubicBezTo>
+                  <a:pt x="3803553" y="25073"/>
+                  <a:pt x="4017371" y="3071"/>
+                  <a:pt x="4243589" y="0"/>
+                </a:cubicBezTo>
+                <a:cubicBezTo>
+                  <a:pt x="4243134" y="6162"/>
+                  <a:pt x="4243492" y="11775"/>
+                  <a:pt x="4243589" y="18288"/>
+                </a:cubicBezTo>
+                <a:cubicBezTo>
+                  <a:pt x="4017834" y="-5779"/>
+                  <a:pt x="3834586" y="13376"/>
+                  <a:pt x="3594926" y="18288"/>
+                </a:cubicBezTo>
+                <a:cubicBezTo>
+                  <a:pt x="3355266" y="23200"/>
+                  <a:pt x="3204179" y="2869"/>
+                  <a:pt x="2903827" y="18288"/>
+                </a:cubicBezTo>
+                <a:cubicBezTo>
+                  <a:pt x="2603475" y="33707"/>
+                  <a:pt x="2526187" y="46187"/>
+                  <a:pt x="2212729" y="18288"/>
+                </a:cubicBezTo>
+                <a:cubicBezTo>
+                  <a:pt x="1899271" y="-9611"/>
+                  <a:pt x="1966289" y="29692"/>
+                  <a:pt x="1733809" y="18288"/>
+                </a:cubicBezTo>
+                <a:cubicBezTo>
+                  <a:pt x="1501329" y="6884"/>
+                  <a:pt x="1343612" y="12492"/>
+                  <a:pt x="1085146" y="18288"/>
+                </a:cubicBezTo>
+                <a:cubicBezTo>
+                  <a:pt x="826680" y="24084"/>
+                  <a:pt x="778184" y="35607"/>
+                  <a:pt x="521355" y="18288"/>
+                </a:cubicBezTo>
+                <a:cubicBezTo>
+                  <a:pt x="264526" y="969"/>
+                  <a:pt x="120277" y="4268"/>
+                  <a:pt x="0" y="18288"/>
+                </a:cubicBezTo>
+                <a:cubicBezTo>
+                  <a:pt x="766" y="10800"/>
+                  <a:pt x="-457" y="8180"/>
+                  <a:pt x="0" y="0"/>
+                </a:cubicBezTo>
+                <a:close/>
+              </a:path>
+            </a:pathLst>
+          </a:custGeom>
+          <a:solidFill>
+            <a:schemeClr val="accent2"/>
+          </a:solidFill>
+          <a:ln w="41275" cap="rnd">
+            <a:solidFill>
+              <a:schemeClr val="accent2"/>
+            </a:solidFill>
+            <a:round/>
+            <a:extLst>
+              <a:ext uri="{C807C97D-BFC1-408E-A445-0C87EB9F89A2}">
+                <ask:lineSketchStyleProps xmlns:ask="http://schemas.microsoft.com/office/drawing/2018/sketchyshapes" sd="2727557108">
+                  <a:prstGeom prst="rect">
+                    <a:avLst/>
+                  </a:prstGeom>
+                  <ask:type>
+                    <ask:lineSketchFreehand/>
+                  </ask:type>
+                </ask:lineSketchStyleProps>
+              </a:ext>
+            </a:extLst>
+          </a:ln>
+        </p:spPr>
+        <p:style>
+          <a:lnRef idx="2">
+            <a:schemeClr val="accent1">
+              <a:shade val="50000"/>
+            </a:schemeClr>
+          </a:lnRef>
+          <a:fillRef idx="1">
+            <a:schemeClr val="accent1"/>
+          </a:fillRef>
+          <a:effectRef idx="0">
+            <a:schemeClr val="accent1"/>
+          </a:effectRef>
+          <a:fontRef idx="minor">
+            <a:schemeClr val="lt1"/>
+          </a:fontRef>
+        </p:style>
+        <p:txBody>
+          <a:bodyPr rtlCol="0" anchor="ctr"/>
+          <a:lstStyle/>
+          <a:p>
+            <a:pPr algn="ctr"/>
+            <a:endParaRPr lang="en-US"/>
+          </a:p>
+        </p:txBody>
+      </p:sp>
       <p:pic>
         <p:nvPicPr>
           <p:cNvPr id="8" name="Content Placeholder 4">
@@ -3862,168 +5148,171 @@
         </p:nvPicPr>
         <p:blipFill>
           <a:blip r:embed="rId3"/>
-          <a:srcRect l="23319" r="24178"/>
+          <a:srcRect l="24525" r="29074"/>
           <a:stretch>
             <a:fillRect/>
           </a:stretch>
         </p:blipFill>
         <p:spPr>
           <a:xfrm>
-            <a:off x="5552139" y="182562"/>
-            <a:ext cx="6096000" cy="6492875"/>
+            <a:off x="6278880" y="36038"/>
+            <a:ext cx="5680223" cy="6824882"/>
           </a:xfrm>
-          <a:prstGeom prst="rect">
+          <a:custGeom>
             <a:avLst/>
-          </a:prstGeom>
+            <a:gdLst/>
+            <a:ahLst/>
+            <a:cxnLst/>
+            <a:rect l="l" t="t" r="r" b="b"/>
+            <a:pathLst>
+              <a:path w="4047645" h="2495811">
+                <a:moveTo>
+                  <a:pt x="2441891" y="4"/>
+                </a:moveTo>
+                <a:cubicBezTo>
+                  <a:pt x="2489381" y="-78"/>
+                  <a:pt x="2536882" y="1163"/>
+                  <a:pt x="2584383" y="4428"/>
+                </a:cubicBezTo>
+                <a:cubicBezTo>
+                  <a:pt x="2744314" y="17813"/>
+                  <a:pt x="2904989" y="21079"/>
+                  <a:pt x="3065367" y="14222"/>
+                </a:cubicBezTo>
+                <a:cubicBezTo>
+                  <a:pt x="3194244" y="5694"/>
+                  <a:pt x="3323514" y="4206"/>
+                  <a:pt x="3452568" y="9782"/>
+                </a:cubicBezTo>
+                <a:cubicBezTo>
+                  <a:pt x="3572813" y="16442"/>
+                  <a:pt x="3693059" y="23233"/>
+                  <a:pt x="3813712" y="19315"/>
+                </a:cubicBezTo>
+                <a:cubicBezTo>
+                  <a:pt x="3861755" y="17748"/>
+                  <a:pt x="3909121" y="15789"/>
+                  <a:pt x="3956758" y="13177"/>
+                </a:cubicBezTo>
+                <a:lnTo>
+                  <a:pt x="4047645" y="9696"/>
+                </a:lnTo>
+                <a:lnTo>
+                  <a:pt x="4047645" y="2495811"/>
+                </a:lnTo>
+                <a:lnTo>
+                  <a:pt x="28177" y="2495811"/>
+                </a:lnTo>
+                <a:lnTo>
+                  <a:pt x="28782" y="2485852"/>
+                </a:lnTo>
+                <a:cubicBezTo>
+                  <a:pt x="31911" y="2365446"/>
+                  <a:pt x="35027" y="2245002"/>
+                  <a:pt x="38157" y="2124521"/>
+                </a:cubicBezTo>
+                <a:cubicBezTo>
+                  <a:pt x="38284" y="2119444"/>
+                  <a:pt x="39171" y="2114494"/>
+                  <a:pt x="39171" y="2109417"/>
+                </a:cubicBezTo>
+                <a:cubicBezTo>
+                  <a:pt x="48166" y="1995573"/>
+                  <a:pt x="53107" y="1881729"/>
+                  <a:pt x="18899" y="1770550"/>
+                </a:cubicBezTo>
+                <a:cubicBezTo>
+                  <a:pt x="15871" y="1760104"/>
+                  <a:pt x="14262" y="1749304"/>
+                  <a:pt x="14084" y="1738440"/>
+                </a:cubicBezTo>
+                <a:cubicBezTo>
+                  <a:pt x="12413" y="1641514"/>
+                  <a:pt x="16644" y="1544587"/>
+                  <a:pt x="26754" y="1448181"/>
+                </a:cubicBezTo>
+                <a:cubicBezTo>
+                  <a:pt x="31949" y="1389038"/>
+                  <a:pt x="26754" y="1329006"/>
+                  <a:pt x="43478" y="1270498"/>
+                </a:cubicBezTo>
+                <a:cubicBezTo>
+                  <a:pt x="50864" y="1241421"/>
+                  <a:pt x="55109" y="1211634"/>
+                  <a:pt x="56147" y="1181656"/>
+                </a:cubicBezTo>
+                <a:cubicBezTo>
+                  <a:pt x="59948" y="1109060"/>
+                  <a:pt x="38537" y="1040779"/>
+                  <a:pt x="18139" y="972244"/>
+                </a:cubicBezTo>
+                <a:cubicBezTo>
+                  <a:pt x="7370" y="935945"/>
+                  <a:pt x="-5426" y="898886"/>
+                  <a:pt x="2429" y="860811"/>
+                </a:cubicBezTo>
+                <a:cubicBezTo>
+                  <a:pt x="16707" y="802251"/>
+                  <a:pt x="24854" y="742359"/>
+                  <a:pt x="26754" y="682112"/>
+                </a:cubicBezTo>
+                <a:cubicBezTo>
+                  <a:pt x="26754" y="639468"/>
+                  <a:pt x="16365" y="597712"/>
+                  <a:pt x="20039" y="555195"/>
+                </a:cubicBezTo>
+                <a:cubicBezTo>
+                  <a:pt x="28211" y="472712"/>
+                  <a:pt x="30238" y="389734"/>
+                  <a:pt x="26121" y="306946"/>
+                </a:cubicBezTo>
+                <a:cubicBezTo>
+                  <a:pt x="26095" y="273846"/>
+                  <a:pt x="29846" y="240848"/>
+                  <a:pt x="37270" y="208585"/>
+                </a:cubicBezTo>
+                <a:cubicBezTo>
+                  <a:pt x="46506" y="151651"/>
+                  <a:pt x="48419" y="93777"/>
+                  <a:pt x="42971" y="36360"/>
+                </a:cubicBezTo>
+                <a:lnTo>
+                  <a:pt x="38853" y="8429"/>
+                </a:lnTo>
+                <a:lnTo>
+                  <a:pt x="56649" y="7824"/>
+                </a:lnTo>
+                <a:cubicBezTo>
+                  <a:pt x="210497" y="-156"/>
+                  <a:pt x="364754" y="3162"/>
+                  <a:pt x="518087" y="17748"/>
+                </a:cubicBezTo>
+                <a:cubicBezTo>
+                  <a:pt x="626567" y="25440"/>
+                  <a:pt x="735534" y="24213"/>
+                  <a:pt x="843809" y="14092"/>
+                </a:cubicBezTo>
+                <a:cubicBezTo>
+                  <a:pt x="1042499" y="-1711"/>
+                  <a:pt x="1240782" y="10958"/>
+                  <a:pt x="1439065" y="21666"/>
+                </a:cubicBezTo>
+                <a:cubicBezTo>
+                  <a:pt x="1631105" y="32113"/>
+                  <a:pt x="1823010" y="24408"/>
+                  <a:pt x="2015050" y="17487"/>
+                </a:cubicBezTo>
+                <a:cubicBezTo>
+                  <a:pt x="2157045" y="12394"/>
+                  <a:pt x="2299420" y="249"/>
+                  <a:pt x="2441891" y="4"/>
+                </a:cubicBezTo>
+                <a:close/>
+              </a:path>
+            </a:pathLst>
+          </a:custGeom>
         </p:spPr>
       </p:pic>
-      <p:sp>
-        <p:nvSpPr>
-          <p:cNvPr id="2" name="Title 1">
-            <a:extLst>
-              <a:ext uri="{FF2B5EF4-FFF2-40B4-BE49-F238E27FC236}">
-                <a16:creationId xmlns:a16="http://schemas.microsoft.com/office/drawing/2014/main" id="{DC270D12-02AB-CCA5-6B16-ED943D175D07}"/>
-              </a:ext>
-            </a:extLst>
-          </p:cNvPr>
-          <p:cNvSpPr>
-            <a:spLocks noGrp="1"/>
-          </p:cNvSpPr>
-          <p:nvPr>
-            <p:ph type="title"/>
-          </p:nvPr>
-        </p:nvSpPr>
-        <p:spPr>
-          <a:xfrm>
-            <a:off x="294339" y="324784"/>
-            <a:ext cx="10515600" cy="1325563"/>
-          </a:xfrm>
-        </p:spPr>
-        <p:txBody>
-          <a:bodyPr/>
-          <a:lstStyle/>
-          <a:p>
-            <a:r>
-              <a:rPr lang="en-US" dirty="0" err="1"/>
-              <a:t>EpiGen</a:t>
-            </a:r>
-            <a:r>
-              <a:rPr lang="en-US" dirty="0"/>
-              <a:t>: the Goal</a:t>
-            </a:r>
-          </a:p>
-        </p:txBody>
-      </p:sp>
-      <p:sp>
-        <p:nvSpPr>
-          <p:cNvPr id="7" name="Content Placeholder 6">
-            <a:extLst>
-              <a:ext uri="{FF2B5EF4-FFF2-40B4-BE49-F238E27FC236}">
-                <a16:creationId xmlns:a16="http://schemas.microsoft.com/office/drawing/2014/main" id="{1B386125-9143-11BC-1602-FBA4A4FBB524}"/>
-              </a:ext>
-            </a:extLst>
-          </p:cNvPr>
-          <p:cNvSpPr>
-            <a:spLocks noGrp="1"/>
-          </p:cNvSpPr>
-          <p:nvPr>
-            <p:ph idx="1"/>
-          </p:nvPr>
-        </p:nvSpPr>
-        <p:spPr>
-          <a:xfrm>
-            <a:off x="294339" y="1987223"/>
-            <a:ext cx="5257800" cy="4351338"/>
-          </a:xfrm>
-        </p:spPr>
-        <p:txBody>
-          <a:bodyPr>
-            <a:normAutofit/>
-          </a:bodyPr>
-          <a:lstStyle/>
-          <a:p>
-            <a:r>
-              <a:rPr lang="en-US" sz="2400" dirty="0"/>
-              <a:t>Given </a:t>
-            </a:r>
-          </a:p>
-          <a:p>
-            <a:pPr lvl="1"/>
-            <a:r>
-              <a:rPr lang="en-US" dirty="0"/>
-              <a:t>A protein</a:t>
-            </a:r>
-          </a:p>
-          <a:p>
-            <a:pPr lvl="1"/>
-            <a:r>
-              <a:rPr lang="en-US" dirty="0"/>
-              <a:t>An edit (</a:t>
-            </a:r>
-            <a:r>
-              <a:rPr lang="en-US" dirty="0" err="1"/>
-              <a:t>ie</a:t>
-            </a:r>
-            <a:r>
-              <a:rPr lang="en-US" dirty="0"/>
-              <a:t> subs XXX-&gt;WHS)</a:t>
-            </a:r>
-          </a:p>
-          <a:p>
-            <a:r>
-              <a:rPr lang="en-US" sz="2400" dirty="0"/>
-              <a:t>Most mutations are deleterious!</a:t>
-            </a:r>
-          </a:p>
-          <a:p>
-            <a:r>
-              <a:rPr lang="en-US" sz="2400" dirty="0"/>
-              <a:t>Find compensatory mutations to</a:t>
-            </a:r>
-            <a:br>
-              <a:rPr lang="en-US" sz="2400" dirty="0"/>
-            </a:br>
-            <a:r>
-              <a:rPr lang="en-US" sz="2400" dirty="0"/>
-              <a:t>lock the edit in!</a:t>
-            </a:r>
-          </a:p>
-          <a:p>
-            <a:r>
-              <a:rPr lang="en-US" sz="2400" dirty="0"/>
-              <a:t>Why?</a:t>
-            </a:r>
-          </a:p>
-          <a:p>
-            <a:r>
-              <a:rPr lang="en-US" sz="2400" dirty="0"/>
-              <a:t>@</a:t>
-            </a:r>
-            <a:r>
-              <a:rPr lang="en-US" sz="2400" dirty="0" err="1"/>
-              <a:t>AndinoLab</a:t>
-            </a:r>
-            <a:r>
-              <a:rPr lang="en-US" sz="2400" dirty="0"/>
-              <a:t>: engineer loss</a:t>
-            </a:r>
-            <a:br>
-              <a:rPr lang="en-US" sz="2400" dirty="0"/>
-            </a:br>
-            <a:r>
-              <a:rPr lang="en-US" sz="2400" dirty="0"/>
-              <a:t>of function in viruses to create new vaccines. </a:t>
-            </a:r>
-            <a:br>
-              <a:rPr lang="en-US" sz="2400" dirty="0"/>
-            </a:br>
-            <a:r>
-              <a:rPr lang="en-US" sz="2400" dirty="0"/>
-              <a:t>Talk to me if you’re interested!</a:t>
-            </a:r>
-          </a:p>
-        </p:txBody>
-      </p:sp>
       <p:pic>
         <p:nvPicPr>
           <p:cNvPr id="10" name="Picture 9">
@@ -4040,20 +5329,256 @@
         </p:nvPicPr>
         <p:blipFill>
           <a:blip r:embed="rId4"/>
+          <a:srcRect l="3428"/>
           <a:stretch>
             <a:fillRect/>
           </a:stretch>
         </p:blipFill>
         <p:spPr>
           <a:xfrm>
-            <a:off x="8799604" y="2837329"/>
-            <a:ext cx="4020671" cy="4020671"/>
+            <a:off x="9355305" y="3185289"/>
+            <a:ext cx="3222891" cy="3337303"/>
           </a:xfrm>
-          <a:prstGeom prst="rect">
+          <a:custGeom>
             <a:avLst/>
-          </a:prstGeom>
+            <a:gdLst/>
+            <a:ahLst/>
+            <a:cxnLst/>
+            <a:rect l="l" t="t" r="r" b="b"/>
+            <a:pathLst>
+              <a:path w="4035547" h="4178808">
+                <a:moveTo>
+                  <a:pt x="14988" y="0"/>
+                </a:moveTo>
+                <a:lnTo>
+                  <a:pt x="4035547" y="0"/>
+                </a:lnTo>
+                <a:lnTo>
+                  <a:pt x="4035547" y="4161794"/>
+                </a:lnTo>
+                <a:lnTo>
+                  <a:pt x="3918602" y="4164199"/>
+                </a:lnTo>
+                <a:cubicBezTo>
+                  <a:pt x="3673497" y="4178956"/>
+                  <a:pt x="3428120" y="4172295"/>
+                  <a:pt x="3183014" y="4175560"/>
+                </a:cubicBezTo>
+                <a:cubicBezTo>
+                  <a:pt x="2855121" y="4180001"/>
+                  <a:pt x="2527499" y="4168639"/>
+                  <a:pt x="2199742" y="4167595"/>
+                </a:cubicBezTo>
+                <a:cubicBezTo>
+                  <a:pt x="2132562" y="4167334"/>
+                  <a:pt x="2065110" y="4170729"/>
+                  <a:pt x="1998202" y="4175952"/>
+                </a:cubicBezTo>
+                <a:cubicBezTo>
+                  <a:pt x="1905507" y="4183005"/>
+                  <a:pt x="1814033" y="4174124"/>
+                  <a:pt x="1722153" y="4165766"/>
+                </a:cubicBezTo>
+                <a:cubicBezTo>
+                  <a:pt x="1611407" y="4155711"/>
+                  <a:pt x="1500933" y="4164591"/>
+                  <a:pt x="1390867" y="4176214"/>
+                </a:cubicBezTo>
+                <a:lnTo>
+                  <a:pt x="1348076" y="4178808"/>
+                </a:lnTo>
+                <a:lnTo>
+                  <a:pt x="597587" y="4178808"/>
+                </a:lnTo>
+                <a:lnTo>
+                  <a:pt x="507890" y="4175773"/>
+                </a:lnTo>
+                <a:cubicBezTo>
+                  <a:pt x="403218" y="4174810"/>
+                  <a:pt x="298546" y="4175691"/>
+                  <a:pt x="193840" y="4176214"/>
+                </a:cubicBezTo>
+                <a:lnTo>
+                  <a:pt x="2757" y="4175742"/>
+                </a:lnTo>
+                <a:lnTo>
+                  <a:pt x="2810" y="4034870"/>
+                </a:lnTo>
+                <a:cubicBezTo>
+                  <a:pt x="5629" y="3979851"/>
+                  <a:pt x="10539" y="3924896"/>
+                  <a:pt x="15416" y="3870068"/>
+                </a:cubicBezTo>
+                <a:cubicBezTo>
+                  <a:pt x="23018" y="3799731"/>
+                  <a:pt x="25045" y="3728899"/>
+                  <a:pt x="21498" y="3658244"/>
+                </a:cubicBezTo>
+                <a:cubicBezTo>
+                  <a:pt x="17063" y="3602147"/>
+                  <a:pt x="10095" y="3546050"/>
+                  <a:pt x="8828" y="3489953"/>
+                </a:cubicBezTo>
+                <a:cubicBezTo>
+                  <a:pt x="6548" y="3389688"/>
+                  <a:pt x="7434" y="3289424"/>
+                  <a:pt x="13262" y="3189160"/>
+                </a:cubicBezTo>
+                <a:cubicBezTo>
+                  <a:pt x="16176" y="3138901"/>
+                  <a:pt x="20864" y="3089150"/>
+                  <a:pt x="22891" y="3038510"/>
+                </a:cubicBezTo>
+                <a:cubicBezTo>
+                  <a:pt x="24918" y="2987870"/>
+                  <a:pt x="28973" y="2936723"/>
+                  <a:pt x="17444" y="2887098"/>
+                </a:cubicBezTo>
+                <a:cubicBezTo>
+                  <a:pt x="-2068" y="2802699"/>
+                  <a:pt x="12249" y="2718680"/>
+                  <a:pt x="16430" y="2634534"/>
+                </a:cubicBezTo>
+                <a:cubicBezTo>
+                  <a:pt x="18964" y="2582244"/>
+                  <a:pt x="34168" y="2528685"/>
+                  <a:pt x="20738" y="2477919"/>
+                </a:cubicBezTo>
+                <a:cubicBezTo>
+                  <a:pt x="-421" y="2398342"/>
+                  <a:pt x="13389" y="2320415"/>
+                  <a:pt x="20738" y="2242107"/>
+                </a:cubicBezTo>
+                <a:cubicBezTo>
+                  <a:pt x="29213" y="2168001"/>
+                  <a:pt x="27718" y="2093082"/>
+                  <a:pt x="16303" y="2019369"/>
+                </a:cubicBezTo>
+                <a:cubicBezTo>
+                  <a:pt x="1986" y="1946239"/>
+                  <a:pt x="1986" y="1871028"/>
+                  <a:pt x="16303" y="1797899"/>
+                </a:cubicBezTo>
+                <a:cubicBezTo>
+                  <a:pt x="28162" y="1737537"/>
+                  <a:pt x="29530" y="1675589"/>
+                  <a:pt x="20357" y="1614758"/>
+                </a:cubicBezTo>
+                <a:cubicBezTo>
+                  <a:pt x="14149" y="1571226"/>
+                  <a:pt x="3000" y="1527947"/>
+                  <a:pt x="1480" y="1484415"/>
+                </a:cubicBezTo>
+                <a:cubicBezTo>
+                  <a:pt x="-1662" y="1393377"/>
+                  <a:pt x="200" y="1302238"/>
+                  <a:pt x="7055" y="1211417"/>
+                </a:cubicBezTo>
+                <a:cubicBezTo>
+                  <a:pt x="15036" y="1107980"/>
+                  <a:pt x="30366" y="1004923"/>
+                  <a:pt x="19724" y="900725"/>
+                </a:cubicBezTo>
+                <a:cubicBezTo>
+                  <a:pt x="16050" y="864934"/>
+                  <a:pt x="8575" y="829270"/>
+                  <a:pt x="7815" y="793353"/>
+                </a:cubicBezTo>
+                <a:cubicBezTo>
+                  <a:pt x="6168" y="726087"/>
+                  <a:pt x="5407" y="659710"/>
+                  <a:pt x="9208" y="590286"/>
+                </a:cubicBezTo>
+                <a:cubicBezTo>
+                  <a:pt x="13009" y="520863"/>
+                  <a:pt x="27452" y="450424"/>
+                  <a:pt x="17697" y="382270"/>
+                </a:cubicBezTo>
+                <a:cubicBezTo>
+                  <a:pt x="7941" y="314115"/>
+                  <a:pt x="14276" y="247103"/>
+                  <a:pt x="20611" y="180218"/>
+                </a:cubicBezTo>
+                <a:cubicBezTo>
+                  <a:pt x="23652" y="148426"/>
+                  <a:pt x="25711" y="116982"/>
+                  <a:pt x="25156" y="85665"/>
+                </a:cubicBezTo>
+                <a:close/>
+              </a:path>
+            </a:pathLst>
+          </a:custGeom>
         </p:spPr>
       </p:pic>
+      <p:sp>
+        <p:nvSpPr>
+          <p:cNvPr id="20" name="Content Placeholder 19">
+            <a:extLst>
+              <a:ext uri="{FF2B5EF4-FFF2-40B4-BE49-F238E27FC236}">
+                <a16:creationId xmlns:a16="http://schemas.microsoft.com/office/drawing/2014/main" id="{F6140F77-527B-023D-6DA1-3F58C9E678E1}"/>
+              </a:ext>
+            </a:extLst>
+          </p:cNvPr>
+          <p:cNvSpPr>
+            <a:spLocks noGrp="1"/>
+          </p:cNvSpPr>
+          <p:nvPr>
+            <p:ph idx="1"/>
+          </p:nvPr>
+        </p:nvSpPr>
+        <p:spPr>
+          <a:xfrm>
+            <a:off x="7744609" y="5719893"/>
+            <a:ext cx="10515600" cy="4351338"/>
+          </a:xfrm>
+        </p:spPr>
+        <p:txBody>
+          <a:bodyPr/>
+          <a:lstStyle/>
+          <a:p>
+            <a:endParaRPr lang="en-US" dirty="0"/>
+          </a:p>
+        </p:txBody>
+      </p:sp>
+      <p:sp>
+        <p:nvSpPr>
+          <p:cNvPr id="2" name="Title 1">
+            <a:extLst>
+              <a:ext uri="{FF2B5EF4-FFF2-40B4-BE49-F238E27FC236}">
+                <a16:creationId xmlns:a16="http://schemas.microsoft.com/office/drawing/2014/main" id="{DC270D12-02AB-CCA5-6B16-ED943D175D07}"/>
+              </a:ext>
+            </a:extLst>
+          </p:cNvPr>
+          <p:cNvSpPr>
+            <a:spLocks noGrp="1"/>
+          </p:cNvSpPr>
+          <p:nvPr>
+            <p:ph type="title"/>
+          </p:nvPr>
+        </p:nvSpPr>
+        <p:spPr>
+          <a:xfrm>
+            <a:off x="640080" y="329184"/>
+            <a:ext cx="6894576" cy="1783080"/>
+          </a:xfrm>
+        </p:spPr>
+        <p:txBody>
+          <a:bodyPr anchor="b">
+            <a:normAutofit/>
+          </a:bodyPr>
+          <a:lstStyle/>
+          <a:p>
+            <a:r>
+              <a:rPr lang="en-US" sz="6600" dirty="0" err="1"/>
+              <a:t>EpiGen</a:t>
+            </a:r>
+            <a:r>
+              <a:rPr lang="en-US" sz="6600" dirty="0"/>
+              <a:t>: the Goal</a:t>
+            </a:r>
+          </a:p>
+        </p:txBody>
+      </p:sp>
     </p:spTree>
     <p:extLst>
       <p:ext uri="{BB962C8B-B14F-4D97-AF65-F5344CB8AC3E}">
@@ -4064,6 +5589,4192 @@
   <p:clrMapOvr>
     <a:masterClrMapping/>
   </p:clrMapOvr>
+</p:sld>
+</file>
+
+<file path=ppt/slides/slide3.xml><?xml version="1.0" encoding="utf-8"?>
+<p:sld xmlns:a="http://schemas.openxmlformats.org/drawingml/2006/main" xmlns:r="http://schemas.openxmlformats.org/officeDocument/2006/relationships" xmlns:p="http://schemas.openxmlformats.org/presentationml/2006/main">
+  <p:cSld>
+    <p:bg>
+      <p:bgPr>
+        <a:solidFill>
+          <a:schemeClr val="bg1"/>
+        </a:solidFill>
+        <a:effectLst/>
+      </p:bgPr>
+    </p:bg>
+    <p:spTree>
+      <p:nvGrpSpPr>
+        <p:cNvPr id="1" name="">
+          <a:extLst>
+            <a:ext uri="{FF2B5EF4-FFF2-40B4-BE49-F238E27FC236}">
+              <a16:creationId xmlns:a16="http://schemas.microsoft.com/office/drawing/2014/main" id="{DC539753-1D87-51E5-0D5A-2708F8453FA6}"/>
+            </a:ext>
+          </a:extLst>
+        </p:cNvPr>
+        <p:cNvGrpSpPr/>
+        <p:nvPr/>
+      </p:nvGrpSpPr>
+      <p:grpSpPr>
+        <a:xfrm>
+          <a:off x="0" y="0"/>
+          <a:ext cx="0" cy="0"/>
+          <a:chOff x="0" y="0"/>
+          <a:chExt cx="0" cy="0"/>
+        </a:xfrm>
+      </p:grpSpPr>
+      <p:sp useBgFill="1">
+        <p:nvSpPr>
+          <p:cNvPr id="21" name="Rectangle 20">
+            <a:extLst>
+              <a:ext uri="{FF2B5EF4-FFF2-40B4-BE49-F238E27FC236}">
+                <a16:creationId xmlns:a16="http://schemas.microsoft.com/office/drawing/2014/main" id="{01E3F494-F473-F700-C73D-0BD569356524}"/>
+              </a:ext>
+              <a:ext uri="{C183D7F6-B498-43B3-948B-1728B52AA6E4}">
+                <adec:decorative xmlns:adec="http://schemas.microsoft.com/office/drawing/2017/decorative" val="1"/>
+              </a:ext>
+            </a:extLst>
+          </p:cNvPr>
+          <p:cNvSpPr>
+            <a:spLocks noGrp="1" noRot="1" noChangeAspect="1" noMove="1" noResize="1" noEditPoints="1" noAdjustHandles="1" noChangeArrowheads="1" noChangeShapeType="1" noTextEdit="1"/>
+          </p:cNvSpPr>
+          <p:nvPr>
+            <p:extLst>
+              <p:ext uri="{386F3935-93C4-4BCD-93E2-E3B085C9AB24}">
+                <p16:designElem xmlns:p16="http://schemas.microsoft.com/office/powerpoint/2015/main" val="1"/>
+              </p:ext>
+            </p:extLst>
+          </p:nvPr>
+        </p:nvSpPr>
+        <p:spPr>
+          <a:xfrm>
+            <a:off x="0" y="0"/>
+            <a:ext cx="12188952" cy="6858000"/>
+          </a:xfrm>
+          <a:prstGeom prst="rect">
+            <a:avLst/>
+          </a:prstGeom>
+          <a:ln>
+            <a:noFill/>
+          </a:ln>
+        </p:spPr>
+        <p:style>
+          <a:lnRef idx="2">
+            <a:schemeClr val="accent1">
+              <a:shade val="50000"/>
+            </a:schemeClr>
+          </a:lnRef>
+          <a:fillRef idx="1">
+            <a:schemeClr val="accent1"/>
+          </a:fillRef>
+          <a:effectRef idx="0">
+            <a:schemeClr val="accent1"/>
+          </a:effectRef>
+          <a:fontRef idx="minor">
+            <a:schemeClr val="lt1"/>
+          </a:fontRef>
+        </p:style>
+        <p:txBody>
+          <a:bodyPr rtlCol="0" anchor="ctr"/>
+          <a:lstStyle/>
+          <a:p>
+            <a:pPr algn="ctr"/>
+            <a:endParaRPr lang="en-US"/>
+          </a:p>
+        </p:txBody>
+      </p:sp>
+      <p:sp>
+        <p:nvSpPr>
+          <p:cNvPr id="2" name="Title 1">
+            <a:extLst>
+              <a:ext uri="{FF2B5EF4-FFF2-40B4-BE49-F238E27FC236}">
+                <a16:creationId xmlns:a16="http://schemas.microsoft.com/office/drawing/2014/main" id="{C37AD54A-8C54-7674-10C6-0ECCD58D4072}"/>
+              </a:ext>
+            </a:extLst>
+          </p:cNvPr>
+          <p:cNvSpPr>
+            <a:spLocks noGrp="1"/>
+          </p:cNvSpPr>
+          <p:nvPr>
+            <p:ph type="title"/>
+          </p:nvPr>
+        </p:nvSpPr>
+        <p:spPr>
+          <a:xfrm>
+            <a:off x="640080" y="329184"/>
+            <a:ext cx="6894576" cy="1783080"/>
+          </a:xfrm>
+        </p:spPr>
+        <p:txBody>
+          <a:bodyPr anchor="b">
+            <a:normAutofit/>
+          </a:bodyPr>
+          <a:lstStyle/>
+          <a:p>
+            <a:r>
+              <a:rPr lang="en-US" sz="6600"/>
+              <a:t>EpiGen: the Goal</a:t>
+            </a:r>
+          </a:p>
+        </p:txBody>
+      </p:sp>
+      <p:sp>
+        <p:nvSpPr>
+          <p:cNvPr id="22" name="sketch line">
+            <a:extLst>
+              <a:ext uri="{FF2B5EF4-FFF2-40B4-BE49-F238E27FC236}">
+                <a16:creationId xmlns:a16="http://schemas.microsoft.com/office/drawing/2014/main" id="{F27364FA-811F-56E9-2199-20EB80A46DF0}"/>
+              </a:ext>
+              <a:ext uri="{C183D7F6-B498-43B3-948B-1728B52AA6E4}">
+                <adec:decorative xmlns:adec="http://schemas.microsoft.com/office/drawing/2017/decorative" val="1"/>
+              </a:ext>
+            </a:extLst>
+          </p:cNvPr>
+          <p:cNvSpPr>
+            <a:spLocks noGrp="1" noRot="1" noChangeAspect="1" noMove="1" noResize="1" noEditPoints="1" noAdjustHandles="1" noChangeArrowheads="1" noChangeShapeType="1" noTextEdit="1"/>
+          </p:cNvSpPr>
+          <p:nvPr>
+            <p:extLst>
+              <p:ext uri="{386F3935-93C4-4BCD-93E2-E3B085C9AB24}">
+                <p16:designElem xmlns:p16="http://schemas.microsoft.com/office/powerpoint/2015/main" val="1"/>
+              </p:ext>
+            </p:extLst>
+          </p:nvPr>
+        </p:nvSpPr>
+        <p:spPr>
+          <a:xfrm>
+            <a:off x="758952" y="2395728"/>
+            <a:ext cx="4243589" cy="18288"/>
+          </a:xfrm>
+          <a:custGeom>
+            <a:avLst/>
+            <a:gdLst>
+              <a:gd name="csX0" fmla="*/ 0 w 4243589"/>
+              <a:gd name="csY0" fmla="*/ 0 h 18288"/>
+              <a:gd name="csX1" fmla="*/ 478919 w 4243589"/>
+              <a:gd name="csY1" fmla="*/ 0 h 18288"/>
+              <a:gd name="csX2" fmla="*/ 957839 w 4243589"/>
+              <a:gd name="csY2" fmla="*/ 0 h 18288"/>
+              <a:gd name="csX3" fmla="*/ 1521630 w 4243589"/>
+              <a:gd name="csY3" fmla="*/ 0 h 18288"/>
+              <a:gd name="csX4" fmla="*/ 2212729 w 4243589"/>
+              <a:gd name="csY4" fmla="*/ 0 h 18288"/>
+              <a:gd name="csX5" fmla="*/ 2734084 w 4243589"/>
+              <a:gd name="csY5" fmla="*/ 0 h 18288"/>
+              <a:gd name="csX6" fmla="*/ 3255439 w 4243589"/>
+              <a:gd name="csY6" fmla="*/ 0 h 18288"/>
+              <a:gd name="csX7" fmla="*/ 4243589 w 4243589"/>
+              <a:gd name="csY7" fmla="*/ 0 h 18288"/>
+              <a:gd name="csX8" fmla="*/ 4243589 w 4243589"/>
+              <a:gd name="csY8" fmla="*/ 18288 h 18288"/>
+              <a:gd name="csX9" fmla="*/ 3594926 w 4243589"/>
+              <a:gd name="csY9" fmla="*/ 18288 h 18288"/>
+              <a:gd name="csX10" fmla="*/ 3073571 w 4243589"/>
+              <a:gd name="csY10" fmla="*/ 18288 h 18288"/>
+              <a:gd name="csX11" fmla="*/ 2552216 w 4243589"/>
+              <a:gd name="csY11" fmla="*/ 18288 h 18288"/>
+              <a:gd name="csX12" fmla="*/ 1903553 w 4243589"/>
+              <a:gd name="csY12" fmla="*/ 18288 h 18288"/>
+              <a:gd name="csX13" fmla="*/ 1212454 w 4243589"/>
+              <a:gd name="csY13" fmla="*/ 18288 h 18288"/>
+              <a:gd name="csX14" fmla="*/ 733535 w 4243589"/>
+              <a:gd name="csY14" fmla="*/ 18288 h 18288"/>
+              <a:gd name="csX15" fmla="*/ 0 w 4243589"/>
+              <a:gd name="csY15" fmla="*/ 18288 h 18288"/>
+              <a:gd name="csX16" fmla="*/ 0 w 4243589"/>
+              <a:gd name="csY16" fmla="*/ 0 h 18288"/>
+            </a:gdLst>
+            <a:ahLst/>
+            <a:cxnLst>
+              <a:cxn ang="0">
+                <a:pos x="csX0" y="csY0"/>
+              </a:cxn>
+              <a:cxn ang="0">
+                <a:pos x="csX1" y="csY1"/>
+              </a:cxn>
+              <a:cxn ang="0">
+                <a:pos x="csX2" y="csY2"/>
+              </a:cxn>
+              <a:cxn ang="0">
+                <a:pos x="csX3" y="csY3"/>
+              </a:cxn>
+              <a:cxn ang="0">
+                <a:pos x="csX4" y="csY4"/>
+              </a:cxn>
+              <a:cxn ang="0">
+                <a:pos x="csX5" y="csY5"/>
+              </a:cxn>
+              <a:cxn ang="0">
+                <a:pos x="csX6" y="csY6"/>
+              </a:cxn>
+              <a:cxn ang="0">
+                <a:pos x="csX7" y="csY7"/>
+              </a:cxn>
+              <a:cxn ang="0">
+                <a:pos x="csX8" y="csY8"/>
+              </a:cxn>
+              <a:cxn ang="0">
+                <a:pos x="csX9" y="csY9"/>
+              </a:cxn>
+              <a:cxn ang="0">
+                <a:pos x="csX10" y="csY10"/>
+              </a:cxn>
+              <a:cxn ang="0">
+                <a:pos x="csX11" y="csY11"/>
+              </a:cxn>
+              <a:cxn ang="0">
+                <a:pos x="csX12" y="csY12"/>
+              </a:cxn>
+              <a:cxn ang="0">
+                <a:pos x="csX13" y="csY13"/>
+              </a:cxn>
+              <a:cxn ang="0">
+                <a:pos x="csX14" y="csY14"/>
+              </a:cxn>
+              <a:cxn ang="0">
+                <a:pos x="csX15" y="csY15"/>
+              </a:cxn>
+              <a:cxn ang="0">
+                <a:pos x="csX16" y="csY16"/>
+              </a:cxn>
+            </a:cxnLst>
+            <a:rect l="l" t="t" r="r" b="b"/>
+            <a:pathLst>
+              <a:path w="4243589" h="18288" fill="none" extrusionOk="0">
+                <a:moveTo>
+                  <a:pt x="0" y="0"/>
+                </a:moveTo>
+                <a:cubicBezTo>
+                  <a:pt x="213395" y="-21006"/>
+                  <a:pt x="307421" y="-18116"/>
+                  <a:pt x="478919" y="0"/>
+                </a:cubicBezTo>
+                <a:cubicBezTo>
+                  <a:pt x="650417" y="18116"/>
+                  <a:pt x="831092" y="-21237"/>
+                  <a:pt x="957839" y="0"/>
+                </a:cubicBezTo>
+                <a:cubicBezTo>
+                  <a:pt x="1084586" y="21237"/>
+                  <a:pt x="1301682" y="25124"/>
+                  <a:pt x="1521630" y="0"/>
+                </a:cubicBezTo>
+                <a:cubicBezTo>
+                  <a:pt x="1741578" y="-25124"/>
+                  <a:pt x="1970269" y="-29139"/>
+                  <a:pt x="2212729" y="0"/>
+                </a:cubicBezTo>
+                <a:cubicBezTo>
+                  <a:pt x="2455189" y="29139"/>
+                  <a:pt x="2558847" y="-4796"/>
+                  <a:pt x="2734084" y="0"/>
+                </a:cubicBezTo>
+                <a:cubicBezTo>
+                  <a:pt x="2909321" y="4796"/>
+                  <a:pt x="3097217" y="-13409"/>
+                  <a:pt x="3255439" y="0"/>
+                </a:cubicBezTo>
+                <a:cubicBezTo>
+                  <a:pt x="3413662" y="13409"/>
+                  <a:pt x="3979999" y="-10121"/>
+                  <a:pt x="4243589" y="0"/>
+                </a:cubicBezTo>
+                <a:cubicBezTo>
+                  <a:pt x="4244484" y="8974"/>
+                  <a:pt x="4243043" y="9359"/>
+                  <a:pt x="4243589" y="18288"/>
+                </a:cubicBezTo>
+                <a:cubicBezTo>
+                  <a:pt x="4058777" y="31246"/>
+                  <a:pt x="3910348" y="3158"/>
+                  <a:pt x="3594926" y="18288"/>
+                </a:cubicBezTo>
+                <a:cubicBezTo>
+                  <a:pt x="3279504" y="33418"/>
+                  <a:pt x="3319955" y="-3977"/>
+                  <a:pt x="3073571" y="18288"/>
+                </a:cubicBezTo>
+                <a:cubicBezTo>
+                  <a:pt x="2827187" y="40553"/>
+                  <a:pt x="2767387" y="1863"/>
+                  <a:pt x="2552216" y="18288"/>
+                </a:cubicBezTo>
+                <a:cubicBezTo>
+                  <a:pt x="2337046" y="34713"/>
+                  <a:pt x="2181871" y="19527"/>
+                  <a:pt x="1903553" y="18288"/>
+                </a:cubicBezTo>
+                <a:cubicBezTo>
+                  <a:pt x="1625235" y="17049"/>
+                  <a:pt x="1557672" y="24174"/>
+                  <a:pt x="1212454" y="18288"/>
+                </a:cubicBezTo>
+                <a:cubicBezTo>
+                  <a:pt x="867236" y="12402"/>
+                  <a:pt x="874382" y="15627"/>
+                  <a:pt x="733535" y="18288"/>
+                </a:cubicBezTo>
+                <a:cubicBezTo>
+                  <a:pt x="592688" y="20949"/>
+                  <a:pt x="183477" y="14753"/>
+                  <a:pt x="0" y="18288"/>
+                </a:cubicBezTo>
+                <a:cubicBezTo>
+                  <a:pt x="-229" y="14222"/>
+                  <a:pt x="509" y="5816"/>
+                  <a:pt x="0" y="0"/>
+                </a:cubicBezTo>
+                <a:close/>
+              </a:path>
+              <a:path w="4243589" h="18288" stroke="0" extrusionOk="0">
+                <a:moveTo>
+                  <a:pt x="0" y="0"/>
+                </a:moveTo>
+                <a:cubicBezTo>
+                  <a:pt x="143690" y="16630"/>
+                  <a:pt x="266667" y="14847"/>
+                  <a:pt x="521355" y="0"/>
+                </a:cubicBezTo>
+                <a:cubicBezTo>
+                  <a:pt x="776043" y="-14847"/>
+                  <a:pt x="814491" y="-17363"/>
+                  <a:pt x="1000275" y="0"/>
+                </a:cubicBezTo>
+                <a:cubicBezTo>
+                  <a:pt x="1186059" y="17363"/>
+                  <a:pt x="1352504" y="-23507"/>
+                  <a:pt x="1521630" y="0"/>
+                </a:cubicBezTo>
+                <a:cubicBezTo>
+                  <a:pt x="1690756" y="23507"/>
+                  <a:pt x="1889525" y="5871"/>
+                  <a:pt x="2127857" y="0"/>
+                </a:cubicBezTo>
+                <a:cubicBezTo>
+                  <a:pt x="2366189" y="-5871"/>
+                  <a:pt x="2620628" y="-27997"/>
+                  <a:pt x="2776520" y="0"/>
+                </a:cubicBezTo>
+                <a:cubicBezTo>
+                  <a:pt x="2932412" y="27997"/>
+                  <a:pt x="3131683" y="-25073"/>
+                  <a:pt x="3467618" y="0"/>
+                </a:cubicBezTo>
+                <a:cubicBezTo>
+                  <a:pt x="3803553" y="25073"/>
+                  <a:pt x="4017371" y="3071"/>
+                  <a:pt x="4243589" y="0"/>
+                </a:cubicBezTo>
+                <a:cubicBezTo>
+                  <a:pt x="4243134" y="6162"/>
+                  <a:pt x="4243492" y="11775"/>
+                  <a:pt x="4243589" y="18288"/>
+                </a:cubicBezTo>
+                <a:cubicBezTo>
+                  <a:pt x="4017834" y="-5779"/>
+                  <a:pt x="3834586" y="13376"/>
+                  <a:pt x="3594926" y="18288"/>
+                </a:cubicBezTo>
+                <a:cubicBezTo>
+                  <a:pt x="3355266" y="23200"/>
+                  <a:pt x="3204179" y="2869"/>
+                  <a:pt x="2903827" y="18288"/>
+                </a:cubicBezTo>
+                <a:cubicBezTo>
+                  <a:pt x="2603475" y="33707"/>
+                  <a:pt x="2526187" y="46187"/>
+                  <a:pt x="2212729" y="18288"/>
+                </a:cubicBezTo>
+                <a:cubicBezTo>
+                  <a:pt x="1899271" y="-9611"/>
+                  <a:pt x="1966289" y="29692"/>
+                  <a:pt x="1733809" y="18288"/>
+                </a:cubicBezTo>
+                <a:cubicBezTo>
+                  <a:pt x="1501329" y="6884"/>
+                  <a:pt x="1343612" y="12492"/>
+                  <a:pt x="1085146" y="18288"/>
+                </a:cubicBezTo>
+                <a:cubicBezTo>
+                  <a:pt x="826680" y="24084"/>
+                  <a:pt x="778184" y="35607"/>
+                  <a:pt x="521355" y="18288"/>
+                </a:cubicBezTo>
+                <a:cubicBezTo>
+                  <a:pt x="264526" y="969"/>
+                  <a:pt x="120277" y="4268"/>
+                  <a:pt x="0" y="18288"/>
+                </a:cubicBezTo>
+                <a:cubicBezTo>
+                  <a:pt x="766" y="10800"/>
+                  <a:pt x="-457" y="8180"/>
+                  <a:pt x="0" y="0"/>
+                </a:cubicBezTo>
+                <a:close/>
+              </a:path>
+            </a:pathLst>
+          </a:custGeom>
+          <a:solidFill>
+            <a:schemeClr val="accent2"/>
+          </a:solidFill>
+          <a:ln w="41275" cap="rnd">
+            <a:solidFill>
+              <a:schemeClr val="accent2"/>
+            </a:solidFill>
+            <a:round/>
+            <a:extLst>
+              <a:ext uri="{C807C97D-BFC1-408E-A445-0C87EB9F89A2}">
+                <ask:lineSketchStyleProps xmlns:ask="http://schemas.microsoft.com/office/drawing/2018/sketchyshapes" sd="2727557108">
+                  <a:prstGeom prst="rect">
+                    <a:avLst/>
+                  </a:prstGeom>
+                  <ask:type>
+                    <ask:lineSketchFreehand/>
+                  </ask:type>
+                </ask:lineSketchStyleProps>
+              </a:ext>
+            </a:extLst>
+          </a:ln>
+        </p:spPr>
+        <p:style>
+          <a:lnRef idx="2">
+            <a:schemeClr val="accent1">
+              <a:shade val="50000"/>
+            </a:schemeClr>
+          </a:lnRef>
+          <a:fillRef idx="1">
+            <a:schemeClr val="accent1"/>
+          </a:fillRef>
+          <a:effectRef idx="0">
+            <a:schemeClr val="accent1"/>
+          </a:effectRef>
+          <a:fontRef idx="minor">
+            <a:schemeClr val="lt1"/>
+          </a:fontRef>
+        </p:style>
+        <p:txBody>
+          <a:bodyPr rtlCol="0" anchor="ctr"/>
+          <a:lstStyle/>
+          <a:p>
+            <a:pPr algn="ctr"/>
+            <a:endParaRPr lang="en-US"/>
+          </a:p>
+        </p:txBody>
+      </p:sp>
+      <p:sp>
+        <p:nvSpPr>
+          <p:cNvPr id="7" name="Content Placeholder 6">
+            <a:extLst>
+              <a:ext uri="{FF2B5EF4-FFF2-40B4-BE49-F238E27FC236}">
+                <a16:creationId xmlns:a16="http://schemas.microsoft.com/office/drawing/2014/main" id="{2715A7C2-6897-3AAB-D972-6614488360EE}"/>
+              </a:ext>
+            </a:extLst>
+          </p:cNvPr>
+          <p:cNvSpPr>
+            <a:spLocks noGrp="1"/>
+          </p:cNvSpPr>
+          <p:nvPr>
+            <p:ph idx="1"/>
+          </p:nvPr>
+        </p:nvSpPr>
+        <p:spPr>
+          <a:xfrm>
+            <a:off x="640080" y="2706624"/>
+            <a:ext cx="6894576" cy="3907932"/>
+          </a:xfrm>
+        </p:spPr>
+        <p:txBody>
+          <a:bodyPr>
+            <a:noAutofit/>
+          </a:bodyPr>
+          <a:lstStyle/>
+          <a:p>
+            <a:r>
+              <a:rPr lang="en-US" sz="2200" dirty="0"/>
+              <a:t>Given </a:t>
+            </a:r>
+          </a:p>
+          <a:p>
+            <a:pPr lvl="1"/>
+            <a:r>
+              <a:rPr lang="en-US" sz="2200" dirty="0"/>
+              <a:t>A protein</a:t>
+            </a:r>
+          </a:p>
+          <a:p>
+            <a:pPr lvl="1"/>
+            <a:r>
+              <a:rPr lang="en-US" sz="2200" dirty="0"/>
+              <a:t>An edit (</a:t>
+            </a:r>
+            <a:r>
+              <a:rPr lang="en-US" sz="2200" dirty="0" err="1"/>
+              <a:t>ie</a:t>
+            </a:r>
+            <a:r>
+              <a:rPr lang="en-US" sz="2200" dirty="0"/>
+              <a:t> subs XXX-&gt;WHS)</a:t>
+            </a:r>
+          </a:p>
+          <a:p>
+            <a:r>
+              <a:rPr lang="en-US" sz="2200" dirty="0"/>
+              <a:t>Most mutations are deleterious!</a:t>
+            </a:r>
+          </a:p>
+          <a:p>
+            <a:r>
+              <a:rPr lang="en-US" sz="2200" dirty="0"/>
+              <a:t>Find compensatory mutations to</a:t>
+            </a:r>
+            <a:br>
+              <a:rPr lang="en-US" sz="2200" dirty="0"/>
+            </a:br>
+            <a:r>
+              <a:rPr lang="en-US" sz="2200" dirty="0"/>
+              <a:t>lock the edit in!</a:t>
+            </a:r>
+          </a:p>
+          <a:p>
+            <a:r>
+              <a:rPr lang="en-US" sz="2200" dirty="0"/>
+              <a:t>Why?</a:t>
+            </a:r>
+          </a:p>
+          <a:p>
+            <a:r>
+              <a:rPr lang="en-US" sz="2200" dirty="0"/>
+              <a:t>@</a:t>
+            </a:r>
+            <a:r>
+              <a:rPr lang="en-US" sz="2200" dirty="0" err="1"/>
+              <a:t>AndinoLab</a:t>
+            </a:r>
+            <a:r>
+              <a:rPr lang="en-US" sz="2200" dirty="0"/>
+              <a:t>: engineer loss</a:t>
+            </a:r>
+            <a:br>
+              <a:rPr lang="en-US" sz="2200" dirty="0"/>
+            </a:br>
+            <a:r>
+              <a:rPr lang="en-US" sz="2200" dirty="0"/>
+              <a:t>of function in viruses to create new vaccines. </a:t>
+            </a:r>
+            <a:br>
+              <a:rPr lang="en-US" sz="2200" dirty="0"/>
+            </a:br>
+            <a:r>
+              <a:rPr lang="en-US" sz="2200" dirty="0"/>
+              <a:t>Talk to me if you’re interested!</a:t>
+            </a:r>
+          </a:p>
+        </p:txBody>
+      </p:sp>
+      <p:pic>
+        <p:nvPicPr>
+          <p:cNvPr id="8" name="Content Placeholder 4">
+            <a:extLst>
+              <a:ext uri="{FF2B5EF4-FFF2-40B4-BE49-F238E27FC236}">
+                <a16:creationId xmlns:a16="http://schemas.microsoft.com/office/drawing/2014/main" id="{4ECB7661-4261-074D-EC8C-E2DF83FCB46A}"/>
+              </a:ext>
+            </a:extLst>
+          </p:cNvPr>
+          <p:cNvPicPr>
+            <a:picLocks noChangeAspect="1"/>
+          </p:cNvPicPr>
+          <p:nvPr/>
+        </p:nvPicPr>
+        <p:blipFill>
+          <a:blip r:embed="rId3"/>
+          <a:srcRect l="24525" r="29074"/>
+          <a:stretch>
+            <a:fillRect/>
+          </a:stretch>
+        </p:blipFill>
+        <p:spPr>
+          <a:xfrm>
+            <a:off x="6863239" y="625784"/>
+            <a:ext cx="4912984" cy="5903032"/>
+          </a:xfrm>
+          <a:custGeom>
+            <a:avLst/>
+            <a:gdLst/>
+            <a:ahLst/>
+            <a:cxnLst/>
+            <a:rect l="l" t="t" r="r" b="b"/>
+            <a:pathLst>
+              <a:path w="4047645" h="2495811">
+                <a:moveTo>
+                  <a:pt x="2441891" y="4"/>
+                </a:moveTo>
+                <a:cubicBezTo>
+                  <a:pt x="2489381" y="-78"/>
+                  <a:pt x="2536882" y="1163"/>
+                  <a:pt x="2584383" y="4428"/>
+                </a:cubicBezTo>
+                <a:cubicBezTo>
+                  <a:pt x="2744314" y="17813"/>
+                  <a:pt x="2904989" y="21079"/>
+                  <a:pt x="3065367" y="14222"/>
+                </a:cubicBezTo>
+                <a:cubicBezTo>
+                  <a:pt x="3194244" y="5694"/>
+                  <a:pt x="3323514" y="4206"/>
+                  <a:pt x="3452568" y="9782"/>
+                </a:cubicBezTo>
+                <a:cubicBezTo>
+                  <a:pt x="3572813" y="16442"/>
+                  <a:pt x="3693059" y="23233"/>
+                  <a:pt x="3813712" y="19315"/>
+                </a:cubicBezTo>
+                <a:cubicBezTo>
+                  <a:pt x="3861755" y="17748"/>
+                  <a:pt x="3909121" y="15789"/>
+                  <a:pt x="3956758" y="13177"/>
+                </a:cubicBezTo>
+                <a:lnTo>
+                  <a:pt x="4047645" y="9696"/>
+                </a:lnTo>
+                <a:lnTo>
+                  <a:pt x="4047645" y="2495811"/>
+                </a:lnTo>
+                <a:lnTo>
+                  <a:pt x="28177" y="2495811"/>
+                </a:lnTo>
+                <a:lnTo>
+                  <a:pt x="28782" y="2485852"/>
+                </a:lnTo>
+                <a:cubicBezTo>
+                  <a:pt x="31911" y="2365446"/>
+                  <a:pt x="35027" y="2245002"/>
+                  <a:pt x="38157" y="2124521"/>
+                </a:cubicBezTo>
+                <a:cubicBezTo>
+                  <a:pt x="38284" y="2119444"/>
+                  <a:pt x="39171" y="2114494"/>
+                  <a:pt x="39171" y="2109417"/>
+                </a:cubicBezTo>
+                <a:cubicBezTo>
+                  <a:pt x="48166" y="1995573"/>
+                  <a:pt x="53107" y="1881729"/>
+                  <a:pt x="18899" y="1770550"/>
+                </a:cubicBezTo>
+                <a:cubicBezTo>
+                  <a:pt x="15871" y="1760104"/>
+                  <a:pt x="14262" y="1749304"/>
+                  <a:pt x="14084" y="1738440"/>
+                </a:cubicBezTo>
+                <a:cubicBezTo>
+                  <a:pt x="12413" y="1641514"/>
+                  <a:pt x="16644" y="1544587"/>
+                  <a:pt x="26754" y="1448181"/>
+                </a:cubicBezTo>
+                <a:cubicBezTo>
+                  <a:pt x="31949" y="1389038"/>
+                  <a:pt x="26754" y="1329006"/>
+                  <a:pt x="43478" y="1270498"/>
+                </a:cubicBezTo>
+                <a:cubicBezTo>
+                  <a:pt x="50864" y="1241421"/>
+                  <a:pt x="55109" y="1211634"/>
+                  <a:pt x="56147" y="1181656"/>
+                </a:cubicBezTo>
+                <a:cubicBezTo>
+                  <a:pt x="59948" y="1109060"/>
+                  <a:pt x="38537" y="1040779"/>
+                  <a:pt x="18139" y="972244"/>
+                </a:cubicBezTo>
+                <a:cubicBezTo>
+                  <a:pt x="7370" y="935945"/>
+                  <a:pt x="-5426" y="898886"/>
+                  <a:pt x="2429" y="860811"/>
+                </a:cubicBezTo>
+                <a:cubicBezTo>
+                  <a:pt x="16707" y="802251"/>
+                  <a:pt x="24854" y="742359"/>
+                  <a:pt x="26754" y="682112"/>
+                </a:cubicBezTo>
+                <a:cubicBezTo>
+                  <a:pt x="26754" y="639468"/>
+                  <a:pt x="16365" y="597712"/>
+                  <a:pt x="20039" y="555195"/>
+                </a:cubicBezTo>
+                <a:cubicBezTo>
+                  <a:pt x="28211" y="472712"/>
+                  <a:pt x="30238" y="389734"/>
+                  <a:pt x="26121" y="306946"/>
+                </a:cubicBezTo>
+                <a:cubicBezTo>
+                  <a:pt x="26095" y="273846"/>
+                  <a:pt x="29846" y="240848"/>
+                  <a:pt x="37270" y="208585"/>
+                </a:cubicBezTo>
+                <a:cubicBezTo>
+                  <a:pt x="46506" y="151651"/>
+                  <a:pt x="48419" y="93777"/>
+                  <a:pt x="42971" y="36360"/>
+                </a:cubicBezTo>
+                <a:lnTo>
+                  <a:pt x="38853" y="8429"/>
+                </a:lnTo>
+                <a:lnTo>
+                  <a:pt x="56649" y="7824"/>
+                </a:lnTo>
+                <a:cubicBezTo>
+                  <a:pt x="210497" y="-156"/>
+                  <a:pt x="364754" y="3162"/>
+                  <a:pt x="518087" y="17748"/>
+                </a:cubicBezTo>
+                <a:cubicBezTo>
+                  <a:pt x="626567" y="25440"/>
+                  <a:pt x="735534" y="24213"/>
+                  <a:pt x="843809" y="14092"/>
+                </a:cubicBezTo>
+                <a:cubicBezTo>
+                  <a:pt x="1042499" y="-1711"/>
+                  <a:pt x="1240782" y="10958"/>
+                  <a:pt x="1439065" y="21666"/>
+                </a:cubicBezTo>
+                <a:cubicBezTo>
+                  <a:pt x="1631105" y="32113"/>
+                  <a:pt x="1823010" y="24408"/>
+                  <a:pt x="2015050" y="17487"/>
+                </a:cubicBezTo>
+                <a:cubicBezTo>
+                  <a:pt x="2157045" y="12394"/>
+                  <a:pt x="2299420" y="249"/>
+                  <a:pt x="2441891" y="4"/>
+                </a:cubicBezTo>
+                <a:close/>
+              </a:path>
+            </a:pathLst>
+          </a:custGeom>
+        </p:spPr>
+      </p:pic>
+      <p:pic>
+        <p:nvPicPr>
+          <p:cNvPr id="10" name="Picture 9">
+            <a:extLst>
+              <a:ext uri="{FF2B5EF4-FFF2-40B4-BE49-F238E27FC236}">
+                <a16:creationId xmlns:a16="http://schemas.microsoft.com/office/drawing/2014/main" id="{BE48C9B2-CA1E-1655-C015-36F373AD7271}"/>
+              </a:ext>
+            </a:extLst>
+          </p:cNvPr>
+          <p:cNvPicPr>
+            <a:picLocks noChangeAspect="1"/>
+          </p:cNvPicPr>
+          <p:nvPr/>
+        </p:nvPicPr>
+        <p:blipFill>
+          <a:blip r:embed="rId4"/>
+          <a:srcRect l="3428"/>
+          <a:stretch>
+            <a:fillRect/>
+          </a:stretch>
+        </p:blipFill>
+        <p:spPr>
+          <a:xfrm>
+            <a:off x="9607747" y="3303961"/>
+            <a:ext cx="2787569" cy="2886527"/>
+          </a:xfrm>
+          <a:custGeom>
+            <a:avLst/>
+            <a:gdLst/>
+            <a:ahLst/>
+            <a:cxnLst/>
+            <a:rect l="l" t="t" r="r" b="b"/>
+            <a:pathLst>
+              <a:path w="4035547" h="4178808">
+                <a:moveTo>
+                  <a:pt x="14988" y="0"/>
+                </a:moveTo>
+                <a:lnTo>
+                  <a:pt x="4035547" y="0"/>
+                </a:lnTo>
+                <a:lnTo>
+                  <a:pt x="4035547" y="4161794"/>
+                </a:lnTo>
+                <a:lnTo>
+                  <a:pt x="3918602" y="4164199"/>
+                </a:lnTo>
+                <a:cubicBezTo>
+                  <a:pt x="3673497" y="4178956"/>
+                  <a:pt x="3428120" y="4172295"/>
+                  <a:pt x="3183014" y="4175560"/>
+                </a:cubicBezTo>
+                <a:cubicBezTo>
+                  <a:pt x="2855121" y="4180001"/>
+                  <a:pt x="2527499" y="4168639"/>
+                  <a:pt x="2199742" y="4167595"/>
+                </a:cubicBezTo>
+                <a:cubicBezTo>
+                  <a:pt x="2132562" y="4167334"/>
+                  <a:pt x="2065110" y="4170729"/>
+                  <a:pt x="1998202" y="4175952"/>
+                </a:cubicBezTo>
+                <a:cubicBezTo>
+                  <a:pt x="1905507" y="4183005"/>
+                  <a:pt x="1814033" y="4174124"/>
+                  <a:pt x="1722153" y="4165766"/>
+                </a:cubicBezTo>
+                <a:cubicBezTo>
+                  <a:pt x="1611407" y="4155711"/>
+                  <a:pt x="1500933" y="4164591"/>
+                  <a:pt x="1390867" y="4176214"/>
+                </a:cubicBezTo>
+                <a:lnTo>
+                  <a:pt x="1348076" y="4178808"/>
+                </a:lnTo>
+                <a:lnTo>
+                  <a:pt x="597587" y="4178808"/>
+                </a:lnTo>
+                <a:lnTo>
+                  <a:pt x="507890" y="4175773"/>
+                </a:lnTo>
+                <a:cubicBezTo>
+                  <a:pt x="403218" y="4174810"/>
+                  <a:pt x="298546" y="4175691"/>
+                  <a:pt x="193840" y="4176214"/>
+                </a:cubicBezTo>
+                <a:lnTo>
+                  <a:pt x="2757" y="4175742"/>
+                </a:lnTo>
+                <a:lnTo>
+                  <a:pt x="2810" y="4034870"/>
+                </a:lnTo>
+                <a:cubicBezTo>
+                  <a:pt x="5629" y="3979851"/>
+                  <a:pt x="10539" y="3924896"/>
+                  <a:pt x="15416" y="3870068"/>
+                </a:cubicBezTo>
+                <a:cubicBezTo>
+                  <a:pt x="23018" y="3799731"/>
+                  <a:pt x="25045" y="3728899"/>
+                  <a:pt x="21498" y="3658244"/>
+                </a:cubicBezTo>
+                <a:cubicBezTo>
+                  <a:pt x="17063" y="3602147"/>
+                  <a:pt x="10095" y="3546050"/>
+                  <a:pt x="8828" y="3489953"/>
+                </a:cubicBezTo>
+                <a:cubicBezTo>
+                  <a:pt x="6548" y="3389688"/>
+                  <a:pt x="7434" y="3289424"/>
+                  <a:pt x="13262" y="3189160"/>
+                </a:cubicBezTo>
+                <a:cubicBezTo>
+                  <a:pt x="16176" y="3138901"/>
+                  <a:pt x="20864" y="3089150"/>
+                  <a:pt x="22891" y="3038510"/>
+                </a:cubicBezTo>
+                <a:cubicBezTo>
+                  <a:pt x="24918" y="2987870"/>
+                  <a:pt x="28973" y="2936723"/>
+                  <a:pt x="17444" y="2887098"/>
+                </a:cubicBezTo>
+                <a:cubicBezTo>
+                  <a:pt x="-2068" y="2802699"/>
+                  <a:pt x="12249" y="2718680"/>
+                  <a:pt x="16430" y="2634534"/>
+                </a:cubicBezTo>
+                <a:cubicBezTo>
+                  <a:pt x="18964" y="2582244"/>
+                  <a:pt x="34168" y="2528685"/>
+                  <a:pt x="20738" y="2477919"/>
+                </a:cubicBezTo>
+                <a:cubicBezTo>
+                  <a:pt x="-421" y="2398342"/>
+                  <a:pt x="13389" y="2320415"/>
+                  <a:pt x="20738" y="2242107"/>
+                </a:cubicBezTo>
+                <a:cubicBezTo>
+                  <a:pt x="29213" y="2168001"/>
+                  <a:pt x="27718" y="2093082"/>
+                  <a:pt x="16303" y="2019369"/>
+                </a:cubicBezTo>
+                <a:cubicBezTo>
+                  <a:pt x="1986" y="1946239"/>
+                  <a:pt x="1986" y="1871028"/>
+                  <a:pt x="16303" y="1797899"/>
+                </a:cubicBezTo>
+                <a:cubicBezTo>
+                  <a:pt x="28162" y="1737537"/>
+                  <a:pt x="29530" y="1675589"/>
+                  <a:pt x="20357" y="1614758"/>
+                </a:cubicBezTo>
+                <a:cubicBezTo>
+                  <a:pt x="14149" y="1571226"/>
+                  <a:pt x="3000" y="1527947"/>
+                  <a:pt x="1480" y="1484415"/>
+                </a:cubicBezTo>
+                <a:cubicBezTo>
+                  <a:pt x="-1662" y="1393377"/>
+                  <a:pt x="200" y="1302238"/>
+                  <a:pt x="7055" y="1211417"/>
+                </a:cubicBezTo>
+                <a:cubicBezTo>
+                  <a:pt x="15036" y="1107980"/>
+                  <a:pt x="30366" y="1004923"/>
+                  <a:pt x="19724" y="900725"/>
+                </a:cubicBezTo>
+                <a:cubicBezTo>
+                  <a:pt x="16050" y="864934"/>
+                  <a:pt x="8575" y="829270"/>
+                  <a:pt x="7815" y="793353"/>
+                </a:cubicBezTo>
+                <a:cubicBezTo>
+                  <a:pt x="6168" y="726087"/>
+                  <a:pt x="5407" y="659710"/>
+                  <a:pt x="9208" y="590286"/>
+                </a:cubicBezTo>
+                <a:cubicBezTo>
+                  <a:pt x="13009" y="520863"/>
+                  <a:pt x="27452" y="450424"/>
+                  <a:pt x="17697" y="382270"/>
+                </a:cubicBezTo>
+                <a:cubicBezTo>
+                  <a:pt x="7941" y="314115"/>
+                  <a:pt x="14276" y="247103"/>
+                  <a:pt x="20611" y="180218"/>
+                </a:cubicBezTo>
+                <a:cubicBezTo>
+                  <a:pt x="23652" y="148426"/>
+                  <a:pt x="25711" y="116982"/>
+                  <a:pt x="25156" y="85665"/>
+                </a:cubicBezTo>
+                <a:close/>
+              </a:path>
+            </a:pathLst>
+          </a:custGeom>
+        </p:spPr>
+      </p:pic>
+    </p:spTree>
+    <p:extLst>
+      <p:ext uri="{BB962C8B-B14F-4D97-AF65-F5344CB8AC3E}">
+        <p14:creationId xmlns:p14="http://schemas.microsoft.com/office/powerpoint/2010/main" val="2463228209"/>
+      </p:ext>
+    </p:extLst>
+  </p:cSld>
+  <p:clrMapOvr>
+    <a:masterClrMapping/>
+  </p:clrMapOvr>
+</p:sld>
+</file>
+
+<file path=ppt/slides/slide4.xml><?xml version="1.0" encoding="utf-8"?>
+<p:sld xmlns:a="http://schemas.openxmlformats.org/drawingml/2006/main" xmlns:r="http://schemas.openxmlformats.org/officeDocument/2006/relationships" xmlns:p="http://schemas.openxmlformats.org/presentationml/2006/main">
+  <p:cSld>
+    <p:bg>
+      <p:bgPr>
+        <a:solidFill>
+          <a:schemeClr val="bg1"/>
+        </a:solidFill>
+        <a:effectLst/>
+      </p:bgPr>
+    </p:bg>
+    <p:spTree>
+      <p:nvGrpSpPr>
+        <p:cNvPr id="1" name="">
+          <a:extLst>
+            <a:ext uri="{FF2B5EF4-FFF2-40B4-BE49-F238E27FC236}">
+              <a16:creationId xmlns:a16="http://schemas.microsoft.com/office/drawing/2014/main" id="{5782BFEA-CA0D-9194-CE85-8DE9D9D3F379}"/>
+            </a:ext>
+          </a:extLst>
+        </p:cNvPr>
+        <p:cNvGrpSpPr/>
+        <p:nvPr/>
+      </p:nvGrpSpPr>
+      <p:grpSpPr>
+        <a:xfrm>
+          <a:off x="0" y="0"/>
+          <a:ext cx="0" cy="0"/>
+          <a:chOff x="0" y="0"/>
+          <a:chExt cx="0" cy="0"/>
+        </a:xfrm>
+      </p:grpSpPr>
+      <p:sp useBgFill="1">
+        <p:nvSpPr>
+          <p:cNvPr id="21" name="Rectangle 20">
+            <a:extLst>
+              <a:ext uri="{FF2B5EF4-FFF2-40B4-BE49-F238E27FC236}">
+                <a16:creationId xmlns:a16="http://schemas.microsoft.com/office/drawing/2014/main" id="{3E3ED7B9-0C69-F9B3-08A0-28AA24C85BFE}"/>
+              </a:ext>
+              <a:ext uri="{C183D7F6-B498-43B3-948B-1728B52AA6E4}">
+                <adec:decorative xmlns:adec="http://schemas.microsoft.com/office/drawing/2017/decorative" val="1"/>
+              </a:ext>
+            </a:extLst>
+          </p:cNvPr>
+          <p:cNvSpPr>
+            <a:spLocks noGrp="1" noRot="1" noChangeAspect="1" noMove="1" noResize="1" noEditPoints="1" noAdjustHandles="1" noChangeArrowheads="1" noChangeShapeType="1" noTextEdit="1"/>
+          </p:cNvSpPr>
+          <p:nvPr>
+            <p:extLst>
+              <p:ext uri="{386F3935-93C4-4BCD-93E2-E3B085C9AB24}">
+                <p16:designElem xmlns:p16="http://schemas.microsoft.com/office/powerpoint/2015/main" val="1"/>
+              </p:ext>
+            </p:extLst>
+          </p:nvPr>
+        </p:nvSpPr>
+        <p:spPr>
+          <a:xfrm>
+            <a:off x="0" y="0"/>
+            <a:ext cx="12188952" cy="6858000"/>
+          </a:xfrm>
+          <a:prstGeom prst="rect">
+            <a:avLst/>
+          </a:prstGeom>
+          <a:ln>
+            <a:noFill/>
+          </a:ln>
+        </p:spPr>
+        <p:style>
+          <a:lnRef idx="2">
+            <a:schemeClr val="accent1">
+              <a:shade val="50000"/>
+            </a:schemeClr>
+          </a:lnRef>
+          <a:fillRef idx="1">
+            <a:schemeClr val="accent1"/>
+          </a:fillRef>
+          <a:effectRef idx="0">
+            <a:schemeClr val="accent1"/>
+          </a:effectRef>
+          <a:fontRef idx="minor">
+            <a:schemeClr val="lt1"/>
+          </a:fontRef>
+        </p:style>
+        <p:txBody>
+          <a:bodyPr rtlCol="0" anchor="ctr"/>
+          <a:lstStyle/>
+          <a:p>
+            <a:pPr algn="ctr"/>
+            <a:endParaRPr lang="en-US"/>
+          </a:p>
+        </p:txBody>
+      </p:sp>
+      <p:sp>
+        <p:nvSpPr>
+          <p:cNvPr id="2" name="Title 1">
+            <a:extLst>
+              <a:ext uri="{FF2B5EF4-FFF2-40B4-BE49-F238E27FC236}">
+                <a16:creationId xmlns:a16="http://schemas.microsoft.com/office/drawing/2014/main" id="{E9703A27-027A-1B77-C802-DAA1534DF6C0}"/>
+              </a:ext>
+            </a:extLst>
+          </p:cNvPr>
+          <p:cNvSpPr>
+            <a:spLocks noGrp="1"/>
+          </p:cNvSpPr>
+          <p:nvPr>
+            <p:ph type="title"/>
+          </p:nvPr>
+        </p:nvSpPr>
+        <p:spPr>
+          <a:xfrm>
+            <a:off x="640080" y="329184"/>
+            <a:ext cx="6894576" cy="1783080"/>
+          </a:xfrm>
+        </p:spPr>
+        <p:txBody>
+          <a:bodyPr anchor="b">
+            <a:normAutofit/>
+          </a:bodyPr>
+          <a:lstStyle/>
+          <a:p>
+            <a:r>
+              <a:rPr lang="en-US" sz="6600" dirty="0"/>
+              <a:t>Pipeline</a:t>
+            </a:r>
+          </a:p>
+        </p:txBody>
+      </p:sp>
+      <p:sp>
+        <p:nvSpPr>
+          <p:cNvPr id="22" name="sketch line">
+            <a:extLst>
+              <a:ext uri="{FF2B5EF4-FFF2-40B4-BE49-F238E27FC236}">
+                <a16:creationId xmlns:a16="http://schemas.microsoft.com/office/drawing/2014/main" id="{1C99FC40-3269-4AE6-6530-587534A6FE1B}"/>
+              </a:ext>
+              <a:ext uri="{C183D7F6-B498-43B3-948B-1728B52AA6E4}">
+                <adec:decorative xmlns:adec="http://schemas.microsoft.com/office/drawing/2017/decorative" val="1"/>
+              </a:ext>
+            </a:extLst>
+          </p:cNvPr>
+          <p:cNvSpPr>
+            <a:spLocks noGrp="1" noRot="1" noChangeAspect="1" noMove="1" noResize="1" noEditPoints="1" noAdjustHandles="1" noChangeArrowheads="1" noChangeShapeType="1" noTextEdit="1"/>
+          </p:cNvSpPr>
+          <p:nvPr>
+            <p:extLst>
+              <p:ext uri="{386F3935-93C4-4BCD-93E2-E3B085C9AB24}">
+                <p16:designElem xmlns:p16="http://schemas.microsoft.com/office/powerpoint/2015/main" val="1"/>
+              </p:ext>
+            </p:extLst>
+          </p:nvPr>
+        </p:nvSpPr>
+        <p:spPr>
+          <a:xfrm>
+            <a:off x="758952" y="2395728"/>
+            <a:ext cx="4243589" cy="18288"/>
+          </a:xfrm>
+          <a:custGeom>
+            <a:avLst/>
+            <a:gdLst>
+              <a:gd name="csX0" fmla="*/ 0 w 4243589"/>
+              <a:gd name="csY0" fmla="*/ 0 h 18288"/>
+              <a:gd name="csX1" fmla="*/ 478919 w 4243589"/>
+              <a:gd name="csY1" fmla="*/ 0 h 18288"/>
+              <a:gd name="csX2" fmla="*/ 957839 w 4243589"/>
+              <a:gd name="csY2" fmla="*/ 0 h 18288"/>
+              <a:gd name="csX3" fmla="*/ 1521630 w 4243589"/>
+              <a:gd name="csY3" fmla="*/ 0 h 18288"/>
+              <a:gd name="csX4" fmla="*/ 2212729 w 4243589"/>
+              <a:gd name="csY4" fmla="*/ 0 h 18288"/>
+              <a:gd name="csX5" fmla="*/ 2734084 w 4243589"/>
+              <a:gd name="csY5" fmla="*/ 0 h 18288"/>
+              <a:gd name="csX6" fmla="*/ 3255439 w 4243589"/>
+              <a:gd name="csY6" fmla="*/ 0 h 18288"/>
+              <a:gd name="csX7" fmla="*/ 4243589 w 4243589"/>
+              <a:gd name="csY7" fmla="*/ 0 h 18288"/>
+              <a:gd name="csX8" fmla="*/ 4243589 w 4243589"/>
+              <a:gd name="csY8" fmla="*/ 18288 h 18288"/>
+              <a:gd name="csX9" fmla="*/ 3594926 w 4243589"/>
+              <a:gd name="csY9" fmla="*/ 18288 h 18288"/>
+              <a:gd name="csX10" fmla="*/ 3073571 w 4243589"/>
+              <a:gd name="csY10" fmla="*/ 18288 h 18288"/>
+              <a:gd name="csX11" fmla="*/ 2552216 w 4243589"/>
+              <a:gd name="csY11" fmla="*/ 18288 h 18288"/>
+              <a:gd name="csX12" fmla="*/ 1903553 w 4243589"/>
+              <a:gd name="csY12" fmla="*/ 18288 h 18288"/>
+              <a:gd name="csX13" fmla="*/ 1212454 w 4243589"/>
+              <a:gd name="csY13" fmla="*/ 18288 h 18288"/>
+              <a:gd name="csX14" fmla="*/ 733535 w 4243589"/>
+              <a:gd name="csY14" fmla="*/ 18288 h 18288"/>
+              <a:gd name="csX15" fmla="*/ 0 w 4243589"/>
+              <a:gd name="csY15" fmla="*/ 18288 h 18288"/>
+              <a:gd name="csX16" fmla="*/ 0 w 4243589"/>
+              <a:gd name="csY16" fmla="*/ 0 h 18288"/>
+            </a:gdLst>
+            <a:ahLst/>
+            <a:cxnLst>
+              <a:cxn ang="0">
+                <a:pos x="csX0" y="csY0"/>
+              </a:cxn>
+              <a:cxn ang="0">
+                <a:pos x="csX1" y="csY1"/>
+              </a:cxn>
+              <a:cxn ang="0">
+                <a:pos x="csX2" y="csY2"/>
+              </a:cxn>
+              <a:cxn ang="0">
+                <a:pos x="csX3" y="csY3"/>
+              </a:cxn>
+              <a:cxn ang="0">
+                <a:pos x="csX4" y="csY4"/>
+              </a:cxn>
+              <a:cxn ang="0">
+                <a:pos x="csX5" y="csY5"/>
+              </a:cxn>
+              <a:cxn ang="0">
+                <a:pos x="csX6" y="csY6"/>
+              </a:cxn>
+              <a:cxn ang="0">
+                <a:pos x="csX7" y="csY7"/>
+              </a:cxn>
+              <a:cxn ang="0">
+                <a:pos x="csX8" y="csY8"/>
+              </a:cxn>
+              <a:cxn ang="0">
+                <a:pos x="csX9" y="csY9"/>
+              </a:cxn>
+              <a:cxn ang="0">
+                <a:pos x="csX10" y="csY10"/>
+              </a:cxn>
+              <a:cxn ang="0">
+                <a:pos x="csX11" y="csY11"/>
+              </a:cxn>
+              <a:cxn ang="0">
+                <a:pos x="csX12" y="csY12"/>
+              </a:cxn>
+              <a:cxn ang="0">
+                <a:pos x="csX13" y="csY13"/>
+              </a:cxn>
+              <a:cxn ang="0">
+                <a:pos x="csX14" y="csY14"/>
+              </a:cxn>
+              <a:cxn ang="0">
+                <a:pos x="csX15" y="csY15"/>
+              </a:cxn>
+              <a:cxn ang="0">
+                <a:pos x="csX16" y="csY16"/>
+              </a:cxn>
+            </a:cxnLst>
+            <a:rect l="l" t="t" r="r" b="b"/>
+            <a:pathLst>
+              <a:path w="4243589" h="18288" fill="none" extrusionOk="0">
+                <a:moveTo>
+                  <a:pt x="0" y="0"/>
+                </a:moveTo>
+                <a:cubicBezTo>
+                  <a:pt x="213395" y="-21006"/>
+                  <a:pt x="307421" y="-18116"/>
+                  <a:pt x="478919" y="0"/>
+                </a:cubicBezTo>
+                <a:cubicBezTo>
+                  <a:pt x="650417" y="18116"/>
+                  <a:pt x="831092" y="-21237"/>
+                  <a:pt x="957839" y="0"/>
+                </a:cubicBezTo>
+                <a:cubicBezTo>
+                  <a:pt x="1084586" y="21237"/>
+                  <a:pt x="1301682" y="25124"/>
+                  <a:pt x="1521630" y="0"/>
+                </a:cubicBezTo>
+                <a:cubicBezTo>
+                  <a:pt x="1741578" y="-25124"/>
+                  <a:pt x="1970269" y="-29139"/>
+                  <a:pt x="2212729" y="0"/>
+                </a:cubicBezTo>
+                <a:cubicBezTo>
+                  <a:pt x="2455189" y="29139"/>
+                  <a:pt x="2558847" y="-4796"/>
+                  <a:pt x="2734084" y="0"/>
+                </a:cubicBezTo>
+                <a:cubicBezTo>
+                  <a:pt x="2909321" y="4796"/>
+                  <a:pt x="3097217" y="-13409"/>
+                  <a:pt x="3255439" y="0"/>
+                </a:cubicBezTo>
+                <a:cubicBezTo>
+                  <a:pt x="3413662" y="13409"/>
+                  <a:pt x="3979999" y="-10121"/>
+                  <a:pt x="4243589" y="0"/>
+                </a:cubicBezTo>
+                <a:cubicBezTo>
+                  <a:pt x="4244484" y="8974"/>
+                  <a:pt x="4243043" y="9359"/>
+                  <a:pt x="4243589" y="18288"/>
+                </a:cubicBezTo>
+                <a:cubicBezTo>
+                  <a:pt x="4058777" y="31246"/>
+                  <a:pt x="3910348" y="3158"/>
+                  <a:pt x="3594926" y="18288"/>
+                </a:cubicBezTo>
+                <a:cubicBezTo>
+                  <a:pt x="3279504" y="33418"/>
+                  <a:pt x="3319955" y="-3977"/>
+                  <a:pt x="3073571" y="18288"/>
+                </a:cubicBezTo>
+                <a:cubicBezTo>
+                  <a:pt x="2827187" y="40553"/>
+                  <a:pt x="2767387" y="1863"/>
+                  <a:pt x="2552216" y="18288"/>
+                </a:cubicBezTo>
+                <a:cubicBezTo>
+                  <a:pt x="2337046" y="34713"/>
+                  <a:pt x="2181871" y="19527"/>
+                  <a:pt x="1903553" y="18288"/>
+                </a:cubicBezTo>
+                <a:cubicBezTo>
+                  <a:pt x="1625235" y="17049"/>
+                  <a:pt x="1557672" y="24174"/>
+                  <a:pt x="1212454" y="18288"/>
+                </a:cubicBezTo>
+                <a:cubicBezTo>
+                  <a:pt x="867236" y="12402"/>
+                  <a:pt x="874382" y="15627"/>
+                  <a:pt x="733535" y="18288"/>
+                </a:cubicBezTo>
+                <a:cubicBezTo>
+                  <a:pt x="592688" y="20949"/>
+                  <a:pt x="183477" y="14753"/>
+                  <a:pt x="0" y="18288"/>
+                </a:cubicBezTo>
+                <a:cubicBezTo>
+                  <a:pt x="-229" y="14222"/>
+                  <a:pt x="509" y="5816"/>
+                  <a:pt x="0" y="0"/>
+                </a:cubicBezTo>
+                <a:close/>
+              </a:path>
+              <a:path w="4243589" h="18288" stroke="0" extrusionOk="0">
+                <a:moveTo>
+                  <a:pt x="0" y="0"/>
+                </a:moveTo>
+                <a:cubicBezTo>
+                  <a:pt x="143690" y="16630"/>
+                  <a:pt x="266667" y="14847"/>
+                  <a:pt x="521355" y="0"/>
+                </a:cubicBezTo>
+                <a:cubicBezTo>
+                  <a:pt x="776043" y="-14847"/>
+                  <a:pt x="814491" y="-17363"/>
+                  <a:pt x="1000275" y="0"/>
+                </a:cubicBezTo>
+                <a:cubicBezTo>
+                  <a:pt x="1186059" y="17363"/>
+                  <a:pt x="1352504" y="-23507"/>
+                  <a:pt x="1521630" y="0"/>
+                </a:cubicBezTo>
+                <a:cubicBezTo>
+                  <a:pt x="1690756" y="23507"/>
+                  <a:pt x="1889525" y="5871"/>
+                  <a:pt x="2127857" y="0"/>
+                </a:cubicBezTo>
+                <a:cubicBezTo>
+                  <a:pt x="2366189" y="-5871"/>
+                  <a:pt x="2620628" y="-27997"/>
+                  <a:pt x="2776520" y="0"/>
+                </a:cubicBezTo>
+                <a:cubicBezTo>
+                  <a:pt x="2932412" y="27997"/>
+                  <a:pt x="3131683" y="-25073"/>
+                  <a:pt x="3467618" y="0"/>
+                </a:cubicBezTo>
+                <a:cubicBezTo>
+                  <a:pt x="3803553" y="25073"/>
+                  <a:pt x="4017371" y="3071"/>
+                  <a:pt x="4243589" y="0"/>
+                </a:cubicBezTo>
+                <a:cubicBezTo>
+                  <a:pt x="4243134" y="6162"/>
+                  <a:pt x="4243492" y="11775"/>
+                  <a:pt x="4243589" y="18288"/>
+                </a:cubicBezTo>
+                <a:cubicBezTo>
+                  <a:pt x="4017834" y="-5779"/>
+                  <a:pt x="3834586" y="13376"/>
+                  <a:pt x="3594926" y="18288"/>
+                </a:cubicBezTo>
+                <a:cubicBezTo>
+                  <a:pt x="3355266" y="23200"/>
+                  <a:pt x="3204179" y="2869"/>
+                  <a:pt x="2903827" y="18288"/>
+                </a:cubicBezTo>
+                <a:cubicBezTo>
+                  <a:pt x="2603475" y="33707"/>
+                  <a:pt x="2526187" y="46187"/>
+                  <a:pt x="2212729" y="18288"/>
+                </a:cubicBezTo>
+                <a:cubicBezTo>
+                  <a:pt x="1899271" y="-9611"/>
+                  <a:pt x="1966289" y="29692"/>
+                  <a:pt x="1733809" y="18288"/>
+                </a:cubicBezTo>
+                <a:cubicBezTo>
+                  <a:pt x="1501329" y="6884"/>
+                  <a:pt x="1343612" y="12492"/>
+                  <a:pt x="1085146" y="18288"/>
+                </a:cubicBezTo>
+                <a:cubicBezTo>
+                  <a:pt x="826680" y="24084"/>
+                  <a:pt x="778184" y="35607"/>
+                  <a:pt x="521355" y="18288"/>
+                </a:cubicBezTo>
+                <a:cubicBezTo>
+                  <a:pt x="264526" y="969"/>
+                  <a:pt x="120277" y="4268"/>
+                  <a:pt x="0" y="18288"/>
+                </a:cubicBezTo>
+                <a:cubicBezTo>
+                  <a:pt x="766" y="10800"/>
+                  <a:pt x="-457" y="8180"/>
+                  <a:pt x="0" y="0"/>
+                </a:cubicBezTo>
+                <a:close/>
+              </a:path>
+            </a:pathLst>
+          </a:custGeom>
+          <a:solidFill>
+            <a:schemeClr val="accent2"/>
+          </a:solidFill>
+          <a:ln w="41275" cap="rnd">
+            <a:solidFill>
+              <a:schemeClr val="accent2"/>
+            </a:solidFill>
+            <a:round/>
+            <a:extLst>
+              <a:ext uri="{C807C97D-BFC1-408E-A445-0C87EB9F89A2}">
+                <ask:lineSketchStyleProps xmlns:ask="http://schemas.microsoft.com/office/drawing/2018/sketchyshapes" sd="2727557108">
+                  <a:prstGeom prst="rect">
+                    <a:avLst/>
+                  </a:prstGeom>
+                  <ask:type>
+                    <ask:lineSketchFreehand/>
+                  </ask:type>
+                </ask:lineSketchStyleProps>
+              </a:ext>
+            </a:extLst>
+          </a:ln>
+        </p:spPr>
+        <p:style>
+          <a:lnRef idx="2">
+            <a:schemeClr val="accent1">
+              <a:shade val="50000"/>
+            </a:schemeClr>
+          </a:lnRef>
+          <a:fillRef idx="1">
+            <a:schemeClr val="accent1"/>
+          </a:fillRef>
+          <a:effectRef idx="0">
+            <a:schemeClr val="accent1"/>
+          </a:effectRef>
+          <a:fontRef idx="minor">
+            <a:schemeClr val="lt1"/>
+          </a:fontRef>
+        </p:style>
+        <p:txBody>
+          <a:bodyPr rtlCol="0" anchor="ctr"/>
+          <a:lstStyle/>
+          <a:p>
+            <a:pPr algn="ctr"/>
+            <a:endParaRPr lang="en-US"/>
+          </a:p>
+        </p:txBody>
+      </p:sp>
+      <p:pic>
+        <p:nvPicPr>
+          <p:cNvPr id="4" name="Picture 3">
+            <a:extLst>
+              <a:ext uri="{FF2B5EF4-FFF2-40B4-BE49-F238E27FC236}">
+                <a16:creationId xmlns:a16="http://schemas.microsoft.com/office/drawing/2014/main" id="{407765A8-0DC4-8172-65AC-C37ED9EB468C}"/>
+              </a:ext>
+            </a:extLst>
+          </p:cNvPr>
+          <p:cNvPicPr>
+            <a:picLocks noChangeAspect="1"/>
+          </p:cNvPicPr>
+          <p:nvPr/>
+        </p:nvPicPr>
+        <p:blipFill>
+          <a:blip r:embed="rId3"/>
+          <a:stretch>
+            <a:fillRect/>
+          </a:stretch>
+        </p:blipFill>
+        <p:spPr>
+          <a:xfrm>
+            <a:off x="5427909" y="1199407"/>
+            <a:ext cx="5699952" cy="5049507"/>
+          </a:xfrm>
+          <a:prstGeom prst="rect">
+            <a:avLst/>
+          </a:prstGeom>
+        </p:spPr>
+      </p:pic>
+      <p:sp>
+        <p:nvSpPr>
+          <p:cNvPr id="7" name="Content Placeholder 6">
+            <a:extLst>
+              <a:ext uri="{FF2B5EF4-FFF2-40B4-BE49-F238E27FC236}">
+                <a16:creationId xmlns:a16="http://schemas.microsoft.com/office/drawing/2014/main" id="{71C4E1C2-FFE5-D70B-E3F2-CCDE22AFCB68}"/>
+              </a:ext>
+            </a:extLst>
+          </p:cNvPr>
+          <p:cNvSpPr>
+            <a:spLocks noGrp="1"/>
+          </p:cNvSpPr>
+          <p:nvPr>
+            <p:ph idx="1"/>
+          </p:nvPr>
+        </p:nvSpPr>
+        <p:spPr>
+          <a:xfrm>
+            <a:off x="640080" y="2706624"/>
+            <a:ext cx="6894576" cy="3483864"/>
+          </a:xfrm>
+        </p:spPr>
+        <p:txBody>
+          <a:bodyPr anchor="ctr">
+            <a:normAutofit/>
+          </a:bodyPr>
+          <a:lstStyle/>
+          <a:p>
+            <a:r>
+              <a:rPr lang="en-US" sz="2000" dirty="0" err="1"/>
+              <a:t>Streamlit</a:t>
+            </a:r>
+            <a:r>
+              <a:rPr lang="en-US" sz="2000" dirty="0"/>
+              <a:t> app</a:t>
+            </a:r>
+          </a:p>
+        </p:txBody>
+      </p:sp>
+    </p:spTree>
+    <p:extLst>
+      <p:ext uri="{BB962C8B-B14F-4D97-AF65-F5344CB8AC3E}">
+        <p14:creationId xmlns:p14="http://schemas.microsoft.com/office/powerpoint/2010/main" val="2007673441"/>
+      </p:ext>
+    </p:extLst>
+  </p:cSld>
+  <p:clrMapOvr>
+    <a:masterClrMapping/>
+  </p:clrMapOvr>
+</p:sld>
+</file>
+
+<file path=ppt/slides/slide5.xml><?xml version="1.0" encoding="utf-8"?>
+<p:sld xmlns:a="http://schemas.openxmlformats.org/drawingml/2006/main" xmlns:r="http://schemas.openxmlformats.org/officeDocument/2006/relationships" xmlns:p="http://schemas.openxmlformats.org/presentationml/2006/main">
+  <p:cSld>
+    <p:bg>
+      <p:bgPr>
+        <a:solidFill>
+          <a:schemeClr val="bg1"/>
+        </a:solidFill>
+        <a:effectLst/>
+      </p:bgPr>
+    </p:bg>
+    <p:spTree>
+      <p:nvGrpSpPr>
+        <p:cNvPr id="1" name="">
+          <a:extLst>
+            <a:ext uri="{FF2B5EF4-FFF2-40B4-BE49-F238E27FC236}">
+              <a16:creationId xmlns:a16="http://schemas.microsoft.com/office/drawing/2014/main" id="{7B4F8B40-3C6F-E01F-5745-B9E6902F8D77}"/>
+            </a:ext>
+          </a:extLst>
+        </p:cNvPr>
+        <p:cNvGrpSpPr/>
+        <p:nvPr/>
+      </p:nvGrpSpPr>
+      <p:grpSpPr>
+        <a:xfrm>
+          <a:off x="0" y="0"/>
+          <a:ext cx="0" cy="0"/>
+          <a:chOff x="0" y="0"/>
+          <a:chExt cx="0" cy="0"/>
+        </a:xfrm>
+      </p:grpSpPr>
+      <p:sp useBgFill="1">
+        <p:nvSpPr>
+          <p:cNvPr id="21" name="Rectangle 20">
+            <a:extLst>
+              <a:ext uri="{FF2B5EF4-FFF2-40B4-BE49-F238E27FC236}">
+                <a16:creationId xmlns:a16="http://schemas.microsoft.com/office/drawing/2014/main" id="{BD22A26D-EA44-E9B7-E882-8CA1160EEDCA}"/>
+              </a:ext>
+              <a:ext uri="{C183D7F6-B498-43B3-948B-1728B52AA6E4}">
+                <adec:decorative xmlns:adec="http://schemas.microsoft.com/office/drawing/2017/decorative" val="1"/>
+              </a:ext>
+            </a:extLst>
+          </p:cNvPr>
+          <p:cNvSpPr>
+            <a:spLocks noGrp="1" noRot="1" noChangeAspect="1" noMove="1" noResize="1" noEditPoints="1" noAdjustHandles="1" noChangeArrowheads="1" noChangeShapeType="1" noTextEdit="1"/>
+          </p:cNvSpPr>
+          <p:nvPr>
+            <p:extLst>
+              <p:ext uri="{386F3935-93C4-4BCD-93E2-E3B085C9AB24}">
+                <p16:designElem xmlns:p16="http://schemas.microsoft.com/office/powerpoint/2015/main" val="1"/>
+              </p:ext>
+            </p:extLst>
+          </p:nvPr>
+        </p:nvSpPr>
+        <p:spPr>
+          <a:xfrm>
+            <a:off x="0" y="0"/>
+            <a:ext cx="12188952" cy="6858000"/>
+          </a:xfrm>
+          <a:prstGeom prst="rect">
+            <a:avLst/>
+          </a:prstGeom>
+          <a:ln>
+            <a:noFill/>
+          </a:ln>
+        </p:spPr>
+        <p:style>
+          <a:lnRef idx="2">
+            <a:schemeClr val="accent1">
+              <a:shade val="50000"/>
+            </a:schemeClr>
+          </a:lnRef>
+          <a:fillRef idx="1">
+            <a:schemeClr val="accent1"/>
+          </a:fillRef>
+          <a:effectRef idx="0">
+            <a:schemeClr val="accent1"/>
+          </a:effectRef>
+          <a:fontRef idx="minor">
+            <a:schemeClr val="lt1"/>
+          </a:fontRef>
+        </p:style>
+        <p:txBody>
+          <a:bodyPr rtlCol="0" anchor="ctr"/>
+          <a:lstStyle/>
+          <a:p>
+            <a:pPr algn="ctr"/>
+            <a:endParaRPr lang="en-US"/>
+          </a:p>
+        </p:txBody>
+      </p:sp>
+      <p:sp>
+        <p:nvSpPr>
+          <p:cNvPr id="2" name="Title 1">
+            <a:extLst>
+              <a:ext uri="{FF2B5EF4-FFF2-40B4-BE49-F238E27FC236}">
+                <a16:creationId xmlns:a16="http://schemas.microsoft.com/office/drawing/2014/main" id="{0AF79FED-5949-1B45-B1A1-483CC9708515}"/>
+              </a:ext>
+            </a:extLst>
+          </p:cNvPr>
+          <p:cNvSpPr>
+            <a:spLocks noGrp="1"/>
+          </p:cNvSpPr>
+          <p:nvPr>
+            <p:ph type="title"/>
+          </p:nvPr>
+        </p:nvSpPr>
+        <p:spPr>
+          <a:xfrm>
+            <a:off x="640080" y="329184"/>
+            <a:ext cx="6894576" cy="1783080"/>
+          </a:xfrm>
+        </p:spPr>
+        <p:txBody>
+          <a:bodyPr anchor="b">
+            <a:normAutofit/>
+          </a:bodyPr>
+          <a:lstStyle/>
+          <a:p>
+            <a:r>
+              <a:rPr lang="en-US" sz="6600" dirty="0"/>
+              <a:t>Optimizer</a:t>
+            </a:r>
+          </a:p>
+        </p:txBody>
+      </p:sp>
+      <p:sp>
+        <p:nvSpPr>
+          <p:cNvPr id="22" name="sketch line">
+            <a:extLst>
+              <a:ext uri="{FF2B5EF4-FFF2-40B4-BE49-F238E27FC236}">
+                <a16:creationId xmlns:a16="http://schemas.microsoft.com/office/drawing/2014/main" id="{C7368457-936F-CB97-D452-E65BAA8C4224}"/>
+              </a:ext>
+              <a:ext uri="{C183D7F6-B498-43B3-948B-1728B52AA6E4}">
+                <adec:decorative xmlns:adec="http://schemas.microsoft.com/office/drawing/2017/decorative" val="1"/>
+              </a:ext>
+            </a:extLst>
+          </p:cNvPr>
+          <p:cNvSpPr>
+            <a:spLocks noGrp="1" noRot="1" noChangeAspect="1" noMove="1" noResize="1" noEditPoints="1" noAdjustHandles="1" noChangeArrowheads="1" noChangeShapeType="1" noTextEdit="1"/>
+          </p:cNvSpPr>
+          <p:nvPr>
+            <p:extLst>
+              <p:ext uri="{386F3935-93C4-4BCD-93E2-E3B085C9AB24}">
+                <p16:designElem xmlns:p16="http://schemas.microsoft.com/office/powerpoint/2015/main" val="1"/>
+              </p:ext>
+            </p:extLst>
+          </p:nvPr>
+        </p:nvSpPr>
+        <p:spPr>
+          <a:xfrm>
+            <a:off x="758952" y="2395728"/>
+            <a:ext cx="4243589" cy="18288"/>
+          </a:xfrm>
+          <a:custGeom>
+            <a:avLst/>
+            <a:gdLst>
+              <a:gd name="csX0" fmla="*/ 0 w 4243589"/>
+              <a:gd name="csY0" fmla="*/ 0 h 18288"/>
+              <a:gd name="csX1" fmla="*/ 478919 w 4243589"/>
+              <a:gd name="csY1" fmla="*/ 0 h 18288"/>
+              <a:gd name="csX2" fmla="*/ 957839 w 4243589"/>
+              <a:gd name="csY2" fmla="*/ 0 h 18288"/>
+              <a:gd name="csX3" fmla="*/ 1521630 w 4243589"/>
+              <a:gd name="csY3" fmla="*/ 0 h 18288"/>
+              <a:gd name="csX4" fmla="*/ 2212729 w 4243589"/>
+              <a:gd name="csY4" fmla="*/ 0 h 18288"/>
+              <a:gd name="csX5" fmla="*/ 2734084 w 4243589"/>
+              <a:gd name="csY5" fmla="*/ 0 h 18288"/>
+              <a:gd name="csX6" fmla="*/ 3255439 w 4243589"/>
+              <a:gd name="csY6" fmla="*/ 0 h 18288"/>
+              <a:gd name="csX7" fmla="*/ 4243589 w 4243589"/>
+              <a:gd name="csY7" fmla="*/ 0 h 18288"/>
+              <a:gd name="csX8" fmla="*/ 4243589 w 4243589"/>
+              <a:gd name="csY8" fmla="*/ 18288 h 18288"/>
+              <a:gd name="csX9" fmla="*/ 3594926 w 4243589"/>
+              <a:gd name="csY9" fmla="*/ 18288 h 18288"/>
+              <a:gd name="csX10" fmla="*/ 3073571 w 4243589"/>
+              <a:gd name="csY10" fmla="*/ 18288 h 18288"/>
+              <a:gd name="csX11" fmla="*/ 2552216 w 4243589"/>
+              <a:gd name="csY11" fmla="*/ 18288 h 18288"/>
+              <a:gd name="csX12" fmla="*/ 1903553 w 4243589"/>
+              <a:gd name="csY12" fmla="*/ 18288 h 18288"/>
+              <a:gd name="csX13" fmla="*/ 1212454 w 4243589"/>
+              <a:gd name="csY13" fmla="*/ 18288 h 18288"/>
+              <a:gd name="csX14" fmla="*/ 733535 w 4243589"/>
+              <a:gd name="csY14" fmla="*/ 18288 h 18288"/>
+              <a:gd name="csX15" fmla="*/ 0 w 4243589"/>
+              <a:gd name="csY15" fmla="*/ 18288 h 18288"/>
+              <a:gd name="csX16" fmla="*/ 0 w 4243589"/>
+              <a:gd name="csY16" fmla="*/ 0 h 18288"/>
+            </a:gdLst>
+            <a:ahLst/>
+            <a:cxnLst>
+              <a:cxn ang="0">
+                <a:pos x="csX0" y="csY0"/>
+              </a:cxn>
+              <a:cxn ang="0">
+                <a:pos x="csX1" y="csY1"/>
+              </a:cxn>
+              <a:cxn ang="0">
+                <a:pos x="csX2" y="csY2"/>
+              </a:cxn>
+              <a:cxn ang="0">
+                <a:pos x="csX3" y="csY3"/>
+              </a:cxn>
+              <a:cxn ang="0">
+                <a:pos x="csX4" y="csY4"/>
+              </a:cxn>
+              <a:cxn ang="0">
+                <a:pos x="csX5" y="csY5"/>
+              </a:cxn>
+              <a:cxn ang="0">
+                <a:pos x="csX6" y="csY6"/>
+              </a:cxn>
+              <a:cxn ang="0">
+                <a:pos x="csX7" y="csY7"/>
+              </a:cxn>
+              <a:cxn ang="0">
+                <a:pos x="csX8" y="csY8"/>
+              </a:cxn>
+              <a:cxn ang="0">
+                <a:pos x="csX9" y="csY9"/>
+              </a:cxn>
+              <a:cxn ang="0">
+                <a:pos x="csX10" y="csY10"/>
+              </a:cxn>
+              <a:cxn ang="0">
+                <a:pos x="csX11" y="csY11"/>
+              </a:cxn>
+              <a:cxn ang="0">
+                <a:pos x="csX12" y="csY12"/>
+              </a:cxn>
+              <a:cxn ang="0">
+                <a:pos x="csX13" y="csY13"/>
+              </a:cxn>
+              <a:cxn ang="0">
+                <a:pos x="csX14" y="csY14"/>
+              </a:cxn>
+              <a:cxn ang="0">
+                <a:pos x="csX15" y="csY15"/>
+              </a:cxn>
+              <a:cxn ang="0">
+                <a:pos x="csX16" y="csY16"/>
+              </a:cxn>
+            </a:cxnLst>
+            <a:rect l="l" t="t" r="r" b="b"/>
+            <a:pathLst>
+              <a:path w="4243589" h="18288" fill="none" extrusionOk="0">
+                <a:moveTo>
+                  <a:pt x="0" y="0"/>
+                </a:moveTo>
+                <a:cubicBezTo>
+                  <a:pt x="213395" y="-21006"/>
+                  <a:pt x="307421" y="-18116"/>
+                  <a:pt x="478919" y="0"/>
+                </a:cubicBezTo>
+                <a:cubicBezTo>
+                  <a:pt x="650417" y="18116"/>
+                  <a:pt x="831092" y="-21237"/>
+                  <a:pt x="957839" y="0"/>
+                </a:cubicBezTo>
+                <a:cubicBezTo>
+                  <a:pt x="1084586" y="21237"/>
+                  <a:pt x="1301682" y="25124"/>
+                  <a:pt x="1521630" y="0"/>
+                </a:cubicBezTo>
+                <a:cubicBezTo>
+                  <a:pt x="1741578" y="-25124"/>
+                  <a:pt x="1970269" y="-29139"/>
+                  <a:pt x="2212729" y="0"/>
+                </a:cubicBezTo>
+                <a:cubicBezTo>
+                  <a:pt x="2455189" y="29139"/>
+                  <a:pt x="2558847" y="-4796"/>
+                  <a:pt x="2734084" y="0"/>
+                </a:cubicBezTo>
+                <a:cubicBezTo>
+                  <a:pt x="2909321" y="4796"/>
+                  <a:pt x="3097217" y="-13409"/>
+                  <a:pt x="3255439" y="0"/>
+                </a:cubicBezTo>
+                <a:cubicBezTo>
+                  <a:pt x="3413662" y="13409"/>
+                  <a:pt x="3979999" y="-10121"/>
+                  <a:pt x="4243589" y="0"/>
+                </a:cubicBezTo>
+                <a:cubicBezTo>
+                  <a:pt x="4244484" y="8974"/>
+                  <a:pt x="4243043" y="9359"/>
+                  <a:pt x="4243589" y="18288"/>
+                </a:cubicBezTo>
+                <a:cubicBezTo>
+                  <a:pt x="4058777" y="31246"/>
+                  <a:pt x="3910348" y="3158"/>
+                  <a:pt x="3594926" y="18288"/>
+                </a:cubicBezTo>
+                <a:cubicBezTo>
+                  <a:pt x="3279504" y="33418"/>
+                  <a:pt x="3319955" y="-3977"/>
+                  <a:pt x="3073571" y="18288"/>
+                </a:cubicBezTo>
+                <a:cubicBezTo>
+                  <a:pt x="2827187" y="40553"/>
+                  <a:pt x="2767387" y="1863"/>
+                  <a:pt x="2552216" y="18288"/>
+                </a:cubicBezTo>
+                <a:cubicBezTo>
+                  <a:pt x="2337046" y="34713"/>
+                  <a:pt x="2181871" y="19527"/>
+                  <a:pt x="1903553" y="18288"/>
+                </a:cubicBezTo>
+                <a:cubicBezTo>
+                  <a:pt x="1625235" y="17049"/>
+                  <a:pt x="1557672" y="24174"/>
+                  <a:pt x="1212454" y="18288"/>
+                </a:cubicBezTo>
+                <a:cubicBezTo>
+                  <a:pt x="867236" y="12402"/>
+                  <a:pt x="874382" y="15627"/>
+                  <a:pt x="733535" y="18288"/>
+                </a:cubicBezTo>
+                <a:cubicBezTo>
+                  <a:pt x="592688" y="20949"/>
+                  <a:pt x="183477" y="14753"/>
+                  <a:pt x="0" y="18288"/>
+                </a:cubicBezTo>
+                <a:cubicBezTo>
+                  <a:pt x="-229" y="14222"/>
+                  <a:pt x="509" y="5816"/>
+                  <a:pt x="0" y="0"/>
+                </a:cubicBezTo>
+                <a:close/>
+              </a:path>
+              <a:path w="4243589" h="18288" stroke="0" extrusionOk="0">
+                <a:moveTo>
+                  <a:pt x="0" y="0"/>
+                </a:moveTo>
+                <a:cubicBezTo>
+                  <a:pt x="143690" y="16630"/>
+                  <a:pt x="266667" y="14847"/>
+                  <a:pt x="521355" y="0"/>
+                </a:cubicBezTo>
+                <a:cubicBezTo>
+                  <a:pt x="776043" y="-14847"/>
+                  <a:pt x="814491" y="-17363"/>
+                  <a:pt x="1000275" y="0"/>
+                </a:cubicBezTo>
+                <a:cubicBezTo>
+                  <a:pt x="1186059" y="17363"/>
+                  <a:pt x="1352504" y="-23507"/>
+                  <a:pt x="1521630" y="0"/>
+                </a:cubicBezTo>
+                <a:cubicBezTo>
+                  <a:pt x="1690756" y="23507"/>
+                  <a:pt x="1889525" y="5871"/>
+                  <a:pt x="2127857" y="0"/>
+                </a:cubicBezTo>
+                <a:cubicBezTo>
+                  <a:pt x="2366189" y="-5871"/>
+                  <a:pt x="2620628" y="-27997"/>
+                  <a:pt x="2776520" y="0"/>
+                </a:cubicBezTo>
+                <a:cubicBezTo>
+                  <a:pt x="2932412" y="27997"/>
+                  <a:pt x="3131683" y="-25073"/>
+                  <a:pt x="3467618" y="0"/>
+                </a:cubicBezTo>
+                <a:cubicBezTo>
+                  <a:pt x="3803553" y="25073"/>
+                  <a:pt x="4017371" y="3071"/>
+                  <a:pt x="4243589" y="0"/>
+                </a:cubicBezTo>
+                <a:cubicBezTo>
+                  <a:pt x="4243134" y="6162"/>
+                  <a:pt x="4243492" y="11775"/>
+                  <a:pt x="4243589" y="18288"/>
+                </a:cubicBezTo>
+                <a:cubicBezTo>
+                  <a:pt x="4017834" y="-5779"/>
+                  <a:pt x="3834586" y="13376"/>
+                  <a:pt x="3594926" y="18288"/>
+                </a:cubicBezTo>
+                <a:cubicBezTo>
+                  <a:pt x="3355266" y="23200"/>
+                  <a:pt x="3204179" y="2869"/>
+                  <a:pt x="2903827" y="18288"/>
+                </a:cubicBezTo>
+                <a:cubicBezTo>
+                  <a:pt x="2603475" y="33707"/>
+                  <a:pt x="2526187" y="46187"/>
+                  <a:pt x="2212729" y="18288"/>
+                </a:cubicBezTo>
+                <a:cubicBezTo>
+                  <a:pt x="1899271" y="-9611"/>
+                  <a:pt x="1966289" y="29692"/>
+                  <a:pt x="1733809" y="18288"/>
+                </a:cubicBezTo>
+                <a:cubicBezTo>
+                  <a:pt x="1501329" y="6884"/>
+                  <a:pt x="1343612" y="12492"/>
+                  <a:pt x="1085146" y="18288"/>
+                </a:cubicBezTo>
+                <a:cubicBezTo>
+                  <a:pt x="826680" y="24084"/>
+                  <a:pt x="778184" y="35607"/>
+                  <a:pt x="521355" y="18288"/>
+                </a:cubicBezTo>
+                <a:cubicBezTo>
+                  <a:pt x="264526" y="969"/>
+                  <a:pt x="120277" y="4268"/>
+                  <a:pt x="0" y="18288"/>
+                </a:cubicBezTo>
+                <a:cubicBezTo>
+                  <a:pt x="766" y="10800"/>
+                  <a:pt x="-457" y="8180"/>
+                  <a:pt x="0" y="0"/>
+                </a:cubicBezTo>
+                <a:close/>
+              </a:path>
+            </a:pathLst>
+          </a:custGeom>
+          <a:solidFill>
+            <a:schemeClr val="accent2"/>
+          </a:solidFill>
+          <a:ln w="41275" cap="rnd">
+            <a:solidFill>
+              <a:schemeClr val="accent2"/>
+            </a:solidFill>
+            <a:round/>
+            <a:extLst>
+              <a:ext uri="{C807C97D-BFC1-408E-A445-0C87EB9F89A2}">
+                <ask:lineSketchStyleProps xmlns:ask="http://schemas.microsoft.com/office/drawing/2018/sketchyshapes" sd="2727557108">
+                  <a:prstGeom prst="rect">
+                    <a:avLst/>
+                  </a:prstGeom>
+                  <ask:type>
+                    <ask:lineSketchFreehand/>
+                  </ask:type>
+                </ask:lineSketchStyleProps>
+              </a:ext>
+            </a:extLst>
+          </a:ln>
+        </p:spPr>
+        <p:style>
+          <a:lnRef idx="2">
+            <a:schemeClr val="accent1">
+              <a:shade val="50000"/>
+            </a:schemeClr>
+          </a:lnRef>
+          <a:fillRef idx="1">
+            <a:schemeClr val="accent1"/>
+          </a:fillRef>
+          <a:effectRef idx="0">
+            <a:schemeClr val="accent1"/>
+          </a:effectRef>
+          <a:fontRef idx="minor">
+            <a:schemeClr val="lt1"/>
+          </a:fontRef>
+        </p:style>
+        <p:txBody>
+          <a:bodyPr rtlCol="0" anchor="ctr"/>
+          <a:lstStyle/>
+          <a:p>
+            <a:pPr algn="ctr"/>
+            <a:endParaRPr lang="en-US"/>
+          </a:p>
+        </p:txBody>
+      </p:sp>
+      <p:pic>
+        <p:nvPicPr>
+          <p:cNvPr id="3" name="Content Placeholder 4">
+            <a:extLst>
+              <a:ext uri="{FF2B5EF4-FFF2-40B4-BE49-F238E27FC236}">
+                <a16:creationId xmlns:a16="http://schemas.microsoft.com/office/drawing/2014/main" id="{826A1B86-04E5-244C-637B-6552A7D3A21E}"/>
+              </a:ext>
+            </a:extLst>
+          </p:cNvPr>
+          <p:cNvPicPr>
+            <a:picLocks noChangeAspect="1"/>
+          </p:cNvPicPr>
+          <p:nvPr/>
+        </p:nvPicPr>
+        <p:blipFill>
+          <a:blip r:embed="rId3"/>
+          <a:srcRect l="24525" r="29074"/>
+          <a:stretch>
+            <a:fillRect/>
+          </a:stretch>
+        </p:blipFill>
+        <p:spPr>
+          <a:xfrm>
+            <a:off x="6863239" y="625784"/>
+            <a:ext cx="4912984" cy="5903032"/>
+          </a:xfrm>
+          <a:custGeom>
+            <a:avLst/>
+            <a:gdLst/>
+            <a:ahLst/>
+            <a:cxnLst/>
+            <a:rect l="l" t="t" r="r" b="b"/>
+            <a:pathLst>
+              <a:path w="4047645" h="2495811">
+                <a:moveTo>
+                  <a:pt x="2441891" y="4"/>
+                </a:moveTo>
+                <a:cubicBezTo>
+                  <a:pt x="2489381" y="-78"/>
+                  <a:pt x="2536882" y="1163"/>
+                  <a:pt x="2584383" y="4428"/>
+                </a:cubicBezTo>
+                <a:cubicBezTo>
+                  <a:pt x="2744314" y="17813"/>
+                  <a:pt x="2904989" y="21079"/>
+                  <a:pt x="3065367" y="14222"/>
+                </a:cubicBezTo>
+                <a:cubicBezTo>
+                  <a:pt x="3194244" y="5694"/>
+                  <a:pt x="3323514" y="4206"/>
+                  <a:pt x="3452568" y="9782"/>
+                </a:cubicBezTo>
+                <a:cubicBezTo>
+                  <a:pt x="3572813" y="16442"/>
+                  <a:pt x="3693059" y="23233"/>
+                  <a:pt x="3813712" y="19315"/>
+                </a:cubicBezTo>
+                <a:cubicBezTo>
+                  <a:pt x="3861755" y="17748"/>
+                  <a:pt x="3909121" y="15789"/>
+                  <a:pt x="3956758" y="13177"/>
+                </a:cubicBezTo>
+                <a:lnTo>
+                  <a:pt x="4047645" y="9696"/>
+                </a:lnTo>
+                <a:lnTo>
+                  <a:pt x="4047645" y="2495811"/>
+                </a:lnTo>
+                <a:lnTo>
+                  <a:pt x="28177" y="2495811"/>
+                </a:lnTo>
+                <a:lnTo>
+                  <a:pt x="28782" y="2485852"/>
+                </a:lnTo>
+                <a:cubicBezTo>
+                  <a:pt x="31911" y="2365446"/>
+                  <a:pt x="35027" y="2245002"/>
+                  <a:pt x="38157" y="2124521"/>
+                </a:cubicBezTo>
+                <a:cubicBezTo>
+                  <a:pt x="38284" y="2119444"/>
+                  <a:pt x="39171" y="2114494"/>
+                  <a:pt x="39171" y="2109417"/>
+                </a:cubicBezTo>
+                <a:cubicBezTo>
+                  <a:pt x="48166" y="1995573"/>
+                  <a:pt x="53107" y="1881729"/>
+                  <a:pt x="18899" y="1770550"/>
+                </a:cubicBezTo>
+                <a:cubicBezTo>
+                  <a:pt x="15871" y="1760104"/>
+                  <a:pt x="14262" y="1749304"/>
+                  <a:pt x="14084" y="1738440"/>
+                </a:cubicBezTo>
+                <a:cubicBezTo>
+                  <a:pt x="12413" y="1641514"/>
+                  <a:pt x="16644" y="1544587"/>
+                  <a:pt x="26754" y="1448181"/>
+                </a:cubicBezTo>
+                <a:cubicBezTo>
+                  <a:pt x="31949" y="1389038"/>
+                  <a:pt x="26754" y="1329006"/>
+                  <a:pt x="43478" y="1270498"/>
+                </a:cubicBezTo>
+                <a:cubicBezTo>
+                  <a:pt x="50864" y="1241421"/>
+                  <a:pt x="55109" y="1211634"/>
+                  <a:pt x="56147" y="1181656"/>
+                </a:cubicBezTo>
+                <a:cubicBezTo>
+                  <a:pt x="59948" y="1109060"/>
+                  <a:pt x="38537" y="1040779"/>
+                  <a:pt x="18139" y="972244"/>
+                </a:cubicBezTo>
+                <a:cubicBezTo>
+                  <a:pt x="7370" y="935945"/>
+                  <a:pt x="-5426" y="898886"/>
+                  <a:pt x="2429" y="860811"/>
+                </a:cubicBezTo>
+                <a:cubicBezTo>
+                  <a:pt x="16707" y="802251"/>
+                  <a:pt x="24854" y="742359"/>
+                  <a:pt x="26754" y="682112"/>
+                </a:cubicBezTo>
+                <a:cubicBezTo>
+                  <a:pt x="26754" y="639468"/>
+                  <a:pt x="16365" y="597712"/>
+                  <a:pt x="20039" y="555195"/>
+                </a:cubicBezTo>
+                <a:cubicBezTo>
+                  <a:pt x="28211" y="472712"/>
+                  <a:pt x="30238" y="389734"/>
+                  <a:pt x="26121" y="306946"/>
+                </a:cubicBezTo>
+                <a:cubicBezTo>
+                  <a:pt x="26095" y="273846"/>
+                  <a:pt x="29846" y="240848"/>
+                  <a:pt x="37270" y="208585"/>
+                </a:cubicBezTo>
+                <a:cubicBezTo>
+                  <a:pt x="46506" y="151651"/>
+                  <a:pt x="48419" y="93777"/>
+                  <a:pt x="42971" y="36360"/>
+                </a:cubicBezTo>
+                <a:lnTo>
+                  <a:pt x="38853" y="8429"/>
+                </a:lnTo>
+                <a:lnTo>
+                  <a:pt x="56649" y="7824"/>
+                </a:lnTo>
+                <a:cubicBezTo>
+                  <a:pt x="210497" y="-156"/>
+                  <a:pt x="364754" y="3162"/>
+                  <a:pt x="518087" y="17748"/>
+                </a:cubicBezTo>
+                <a:cubicBezTo>
+                  <a:pt x="626567" y="25440"/>
+                  <a:pt x="735534" y="24213"/>
+                  <a:pt x="843809" y="14092"/>
+                </a:cubicBezTo>
+                <a:cubicBezTo>
+                  <a:pt x="1042499" y="-1711"/>
+                  <a:pt x="1240782" y="10958"/>
+                  <a:pt x="1439065" y="21666"/>
+                </a:cubicBezTo>
+                <a:cubicBezTo>
+                  <a:pt x="1631105" y="32113"/>
+                  <a:pt x="1823010" y="24408"/>
+                  <a:pt x="2015050" y="17487"/>
+                </a:cubicBezTo>
+                <a:cubicBezTo>
+                  <a:pt x="2157045" y="12394"/>
+                  <a:pt x="2299420" y="249"/>
+                  <a:pt x="2441891" y="4"/>
+                </a:cubicBezTo>
+                <a:close/>
+              </a:path>
+            </a:pathLst>
+          </a:custGeom>
+        </p:spPr>
+      </p:pic>
+      <p:sp>
+        <p:nvSpPr>
+          <p:cNvPr id="7" name="Content Placeholder 6">
+            <a:extLst>
+              <a:ext uri="{FF2B5EF4-FFF2-40B4-BE49-F238E27FC236}">
+                <a16:creationId xmlns:a16="http://schemas.microsoft.com/office/drawing/2014/main" id="{8E80FB45-36E0-5E26-1356-77D89B71A1AC}"/>
+              </a:ext>
+            </a:extLst>
+          </p:cNvPr>
+          <p:cNvSpPr>
+            <a:spLocks noGrp="1"/>
+          </p:cNvSpPr>
+          <p:nvPr>
+            <p:ph idx="1"/>
+          </p:nvPr>
+        </p:nvSpPr>
+        <p:spPr>
+          <a:xfrm>
+            <a:off x="640080" y="2706624"/>
+            <a:ext cx="6894576" cy="3483864"/>
+          </a:xfrm>
+        </p:spPr>
+        <p:txBody>
+          <a:bodyPr anchor="ctr">
+            <a:normAutofit/>
+          </a:bodyPr>
+          <a:lstStyle/>
+          <a:p>
+            <a:pPr marL="0" indent="0">
+              <a:buNone/>
+            </a:pPr>
+            <a:r>
+              <a:rPr lang="en-US" sz="2400" b="1" dirty="0"/>
+              <a:t>Proto </a:t>
+            </a:r>
+          </a:p>
+          <a:p>
+            <a:r>
+              <a:rPr lang="en-US" sz="2400" dirty="0"/>
+              <a:t>Constraint: Retain Edit</a:t>
+            </a:r>
+          </a:p>
+          <a:p>
+            <a:r>
+              <a:rPr lang="en-US" sz="2400" dirty="0"/>
+              <a:t>Optimizer: MOE (</a:t>
+            </a:r>
+            <a:r>
+              <a:rPr lang="en-US" sz="2400" dirty="0">
+                <a:solidFill>
+                  <a:srgbClr val="FF0000"/>
+                </a:solidFill>
+              </a:rPr>
+              <a:t>ESM2 </a:t>
+            </a:r>
+            <a:r>
+              <a:rPr lang="en-US" sz="2400" dirty="0"/>
+              <a:t>+ </a:t>
+            </a:r>
+            <a:r>
+              <a:rPr lang="en-US" sz="2400" dirty="0">
+                <a:solidFill>
+                  <a:srgbClr val="0070C0"/>
+                </a:solidFill>
+              </a:rPr>
+              <a:t>PMPNN </a:t>
+            </a:r>
+            <a:r>
+              <a:rPr lang="en-US" sz="2400" dirty="0"/>
+              <a:t>+ </a:t>
+            </a:r>
+            <a:r>
+              <a:rPr lang="en-US" sz="2400" dirty="0">
+                <a:solidFill>
+                  <a:srgbClr val="00B050"/>
+                </a:solidFill>
+              </a:rPr>
+              <a:t>EVO2</a:t>
+            </a:r>
+            <a:r>
+              <a:rPr lang="en-US" sz="2400" dirty="0"/>
+              <a:t>)</a:t>
+            </a:r>
+          </a:p>
+        </p:txBody>
+      </p:sp>
+      <p:cxnSp>
+        <p:nvCxnSpPr>
+          <p:cNvPr id="9" name="Straight Arrow Connector 8">
+            <a:extLst>
+              <a:ext uri="{FF2B5EF4-FFF2-40B4-BE49-F238E27FC236}">
+                <a16:creationId xmlns:a16="http://schemas.microsoft.com/office/drawing/2014/main" id="{4D08F9E6-F7A7-7F18-2DBC-DC1C4783B80A}"/>
+              </a:ext>
+            </a:extLst>
+          </p:cNvPr>
+          <p:cNvCxnSpPr/>
+          <p:nvPr/>
+        </p:nvCxnSpPr>
+        <p:spPr>
+          <a:xfrm rot="5400000" flipH="1" flipV="1">
+            <a:off x="7851483" y="1070095"/>
+            <a:ext cx="2209388" cy="2164904"/>
+          </a:xfrm>
+          <a:prstGeom prst="curvedConnector3">
+            <a:avLst>
+              <a:gd name="adj1" fmla="val 109166"/>
+            </a:avLst>
+          </a:prstGeom>
+          <a:ln w="50800">
+            <a:tailEnd type="triangle"/>
+          </a:ln>
+        </p:spPr>
+        <p:style>
+          <a:lnRef idx="2">
+            <a:schemeClr val="accent1"/>
+          </a:lnRef>
+          <a:fillRef idx="0">
+            <a:schemeClr val="accent1"/>
+          </a:fillRef>
+          <a:effectRef idx="1">
+            <a:schemeClr val="accent1"/>
+          </a:effectRef>
+          <a:fontRef idx="minor">
+            <a:schemeClr val="tx1"/>
+          </a:fontRef>
+        </p:style>
+      </p:cxnSp>
+      <p:sp>
+        <p:nvSpPr>
+          <p:cNvPr id="17" name="TextBox 16">
+            <a:extLst>
+              <a:ext uri="{FF2B5EF4-FFF2-40B4-BE49-F238E27FC236}">
+                <a16:creationId xmlns:a16="http://schemas.microsoft.com/office/drawing/2014/main" id="{30746DA0-6E20-1056-A04D-29ADD4157107}"/>
+              </a:ext>
+            </a:extLst>
+          </p:cNvPr>
+          <p:cNvSpPr txBox="1"/>
+          <p:nvPr/>
+        </p:nvSpPr>
+        <p:spPr>
+          <a:xfrm>
+            <a:off x="7375879" y="759059"/>
+            <a:ext cx="1580298" cy="461665"/>
+          </a:xfrm>
+          <a:prstGeom prst="rect">
+            <a:avLst/>
+          </a:prstGeom>
+          <a:noFill/>
+        </p:spPr>
+        <p:txBody>
+          <a:bodyPr wrap="square" rtlCol="0">
+            <a:spAutoFit/>
+          </a:bodyPr>
+          <a:lstStyle/>
+          <a:p>
+            <a:r>
+              <a:rPr lang="en-US" sz="2400" dirty="0"/>
+              <a:t>Proto</a:t>
+            </a:r>
+          </a:p>
+        </p:txBody>
+      </p:sp>
+      <p:pic>
+        <p:nvPicPr>
+          <p:cNvPr id="18" name="Picture 17">
+            <a:extLst>
+              <a:ext uri="{FF2B5EF4-FFF2-40B4-BE49-F238E27FC236}">
+                <a16:creationId xmlns:a16="http://schemas.microsoft.com/office/drawing/2014/main" id="{1E81EABC-CC7F-FB96-B009-5832C7AC9A0A}"/>
+              </a:ext>
+            </a:extLst>
+          </p:cNvPr>
+          <p:cNvPicPr>
+            <a:picLocks noChangeAspect="1"/>
+          </p:cNvPicPr>
+          <p:nvPr/>
+        </p:nvPicPr>
+        <p:blipFill>
+          <a:blip r:embed="rId4"/>
+          <a:srcRect l="3428"/>
+          <a:stretch>
+            <a:fillRect/>
+          </a:stretch>
+        </p:blipFill>
+        <p:spPr>
+          <a:xfrm>
+            <a:off x="9607747" y="3303961"/>
+            <a:ext cx="2787569" cy="2886527"/>
+          </a:xfrm>
+          <a:custGeom>
+            <a:avLst/>
+            <a:gdLst/>
+            <a:ahLst/>
+            <a:cxnLst/>
+            <a:rect l="l" t="t" r="r" b="b"/>
+            <a:pathLst>
+              <a:path w="4035547" h="4178808">
+                <a:moveTo>
+                  <a:pt x="14988" y="0"/>
+                </a:moveTo>
+                <a:lnTo>
+                  <a:pt x="4035547" y="0"/>
+                </a:lnTo>
+                <a:lnTo>
+                  <a:pt x="4035547" y="4161794"/>
+                </a:lnTo>
+                <a:lnTo>
+                  <a:pt x="3918602" y="4164199"/>
+                </a:lnTo>
+                <a:cubicBezTo>
+                  <a:pt x="3673497" y="4178956"/>
+                  <a:pt x="3428120" y="4172295"/>
+                  <a:pt x="3183014" y="4175560"/>
+                </a:cubicBezTo>
+                <a:cubicBezTo>
+                  <a:pt x="2855121" y="4180001"/>
+                  <a:pt x="2527499" y="4168639"/>
+                  <a:pt x="2199742" y="4167595"/>
+                </a:cubicBezTo>
+                <a:cubicBezTo>
+                  <a:pt x="2132562" y="4167334"/>
+                  <a:pt x="2065110" y="4170729"/>
+                  <a:pt x="1998202" y="4175952"/>
+                </a:cubicBezTo>
+                <a:cubicBezTo>
+                  <a:pt x="1905507" y="4183005"/>
+                  <a:pt x="1814033" y="4174124"/>
+                  <a:pt x="1722153" y="4165766"/>
+                </a:cubicBezTo>
+                <a:cubicBezTo>
+                  <a:pt x="1611407" y="4155711"/>
+                  <a:pt x="1500933" y="4164591"/>
+                  <a:pt x="1390867" y="4176214"/>
+                </a:cubicBezTo>
+                <a:lnTo>
+                  <a:pt x="1348076" y="4178808"/>
+                </a:lnTo>
+                <a:lnTo>
+                  <a:pt x="597587" y="4178808"/>
+                </a:lnTo>
+                <a:lnTo>
+                  <a:pt x="507890" y="4175773"/>
+                </a:lnTo>
+                <a:cubicBezTo>
+                  <a:pt x="403218" y="4174810"/>
+                  <a:pt x="298546" y="4175691"/>
+                  <a:pt x="193840" y="4176214"/>
+                </a:cubicBezTo>
+                <a:lnTo>
+                  <a:pt x="2757" y="4175742"/>
+                </a:lnTo>
+                <a:lnTo>
+                  <a:pt x="2810" y="4034870"/>
+                </a:lnTo>
+                <a:cubicBezTo>
+                  <a:pt x="5629" y="3979851"/>
+                  <a:pt x="10539" y="3924896"/>
+                  <a:pt x="15416" y="3870068"/>
+                </a:cubicBezTo>
+                <a:cubicBezTo>
+                  <a:pt x="23018" y="3799731"/>
+                  <a:pt x="25045" y="3728899"/>
+                  <a:pt x="21498" y="3658244"/>
+                </a:cubicBezTo>
+                <a:cubicBezTo>
+                  <a:pt x="17063" y="3602147"/>
+                  <a:pt x="10095" y="3546050"/>
+                  <a:pt x="8828" y="3489953"/>
+                </a:cubicBezTo>
+                <a:cubicBezTo>
+                  <a:pt x="6548" y="3389688"/>
+                  <a:pt x="7434" y="3289424"/>
+                  <a:pt x="13262" y="3189160"/>
+                </a:cubicBezTo>
+                <a:cubicBezTo>
+                  <a:pt x="16176" y="3138901"/>
+                  <a:pt x="20864" y="3089150"/>
+                  <a:pt x="22891" y="3038510"/>
+                </a:cubicBezTo>
+                <a:cubicBezTo>
+                  <a:pt x="24918" y="2987870"/>
+                  <a:pt x="28973" y="2936723"/>
+                  <a:pt x="17444" y="2887098"/>
+                </a:cubicBezTo>
+                <a:cubicBezTo>
+                  <a:pt x="-2068" y="2802699"/>
+                  <a:pt x="12249" y="2718680"/>
+                  <a:pt x="16430" y="2634534"/>
+                </a:cubicBezTo>
+                <a:cubicBezTo>
+                  <a:pt x="18964" y="2582244"/>
+                  <a:pt x="34168" y="2528685"/>
+                  <a:pt x="20738" y="2477919"/>
+                </a:cubicBezTo>
+                <a:cubicBezTo>
+                  <a:pt x="-421" y="2398342"/>
+                  <a:pt x="13389" y="2320415"/>
+                  <a:pt x="20738" y="2242107"/>
+                </a:cubicBezTo>
+                <a:cubicBezTo>
+                  <a:pt x="29213" y="2168001"/>
+                  <a:pt x="27718" y="2093082"/>
+                  <a:pt x="16303" y="2019369"/>
+                </a:cubicBezTo>
+                <a:cubicBezTo>
+                  <a:pt x="1986" y="1946239"/>
+                  <a:pt x="1986" y="1871028"/>
+                  <a:pt x="16303" y="1797899"/>
+                </a:cubicBezTo>
+                <a:cubicBezTo>
+                  <a:pt x="28162" y="1737537"/>
+                  <a:pt x="29530" y="1675589"/>
+                  <a:pt x="20357" y="1614758"/>
+                </a:cubicBezTo>
+                <a:cubicBezTo>
+                  <a:pt x="14149" y="1571226"/>
+                  <a:pt x="3000" y="1527947"/>
+                  <a:pt x="1480" y="1484415"/>
+                </a:cubicBezTo>
+                <a:cubicBezTo>
+                  <a:pt x="-1662" y="1393377"/>
+                  <a:pt x="200" y="1302238"/>
+                  <a:pt x="7055" y="1211417"/>
+                </a:cubicBezTo>
+                <a:cubicBezTo>
+                  <a:pt x="15036" y="1107980"/>
+                  <a:pt x="30366" y="1004923"/>
+                  <a:pt x="19724" y="900725"/>
+                </a:cubicBezTo>
+                <a:cubicBezTo>
+                  <a:pt x="16050" y="864934"/>
+                  <a:pt x="8575" y="829270"/>
+                  <a:pt x="7815" y="793353"/>
+                </a:cubicBezTo>
+                <a:cubicBezTo>
+                  <a:pt x="6168" y="726087"/>
+                  <a:pt x="5407" y="659710"/>
+                  <a:pt x="9208" y="590286"/>
+                </a:cubicBezTo>
+                <a:cubicBezTo>
+                  <a:pt x="13009" y="520863"/>
+                  <a:pt x="27452" y="450424"/>
+                  <a:pt x="17697" y="382270"/>
+                </a:cubicBezTo>
+                <a:cubicBezTo>
+                  <a:pt x="7941" y="314115"/>
+                  <a:pt x="14276" y="247103"/>
+                  <a:pt x="20611" y="180218"/>
+                </a:cubicBezTo>
+                <a:cubicBezTo>
+                  <a:pt x="23652" y="148426"/>
+                  <a:pt x="25711" y="116982"/>
+                  <a:pt x="25156" y="85665"/>
+                </a:cubicBezTo>
+                <a:close/>
+              </a:path>
+            </a:pathLst>
+          </a:custGeom>
+        </p:spPr>
+      </p:pic>
+    </p:spTree>
+    <p:extLst>
+      <p:ext uri="{BB962C8B-B14F-4D97-AF65-F5344CB8AC3E}">
+        <p14:creationId xmlns:p14="http://schemas.microsoft.com/office/powerpoint/2010/main" val="1302916948"/>
+      </p:ext>
+    </p:extLst>
+  </p:cSld>
+  <p:clrMapOvr>
+    <a:masterClrMapping/>
+  </p:clrMapOvr>
+</p:sld>
+</file>
+
+<file path=ppt/slides/slide6.xml><?xml version="1.0" encoding="utf-8"?>
+<p:sld xmlns:a="http://schemas.openxmlformats.org/drawingml/2006/main" xmlns:r="http://schemas.openxmlformats.org/officeDocument/2006/relationships" xmlns:p="http://schemas.openxmlformats.org/presentationml/2006/main">
+  <p:cSld>
+    <p:bg>
+      <p:bgPr>
+        <a:solidFill>
+          <a:schemeClr val="bg1"/>
+        </a:solidFill>
+        <a:effectLst/>
+      </p:bgPr>
+    </p:bg>
+    <p:spTree>
+      <p:nvGrpSpPr>
+        <p:cNvPr id="1" name="">
+          <a:extLst>
+            <a:ext uri="{FF2B5EF4-FFF2-40B4-BE49-F238E27FC236}">
+              <a16:creationId xmlns:a16="http://schemas.microsoft.com/office/drawing/2014/main" id="{0C9456C9-F615-094C-BD4B-F34E8BA4A718}"/>
+            </a:ext>
+          </a:extLst>
+        </p:cNvPr>
+        <p:cNvGrpSpPr/>
+        <p:nvPr/>
+      </p:nvGrpSpPr>
+      <p:grpSpPr>
+        <a:xfrm>
+          <a:off x="0" y="0"/>
+          <a:ext cx="0" cy="0"/>
+          <a:chOff x="0" y="0"/>
+          <a:chExt cx="0" cy="0"/>
+        </a:xfrm>
+      </p:grpSpPr>
+      <p:sp useBgFill="1">
+        <p:nvSpPr>
+          <p:cNvPr id="21" name="Rectangle 20">
+            <a:extLst>
+              <a:ext uri="{FF2B5EF4-FFF2-40B4-BE49-F238E27FC236}">
+                <a16:creationId xmlns:a16="http://schemas.microsoft.com/office/drawing/2014/main" id="{EB83B015-61D2-6F15-D76C-8CE1493B5B01}"/>
+              </a:ext>
+              <a:ext uri="{C183D7F6-B498-43B3-948B-1728B52AA6E4}">
+                <adec:decorative xmlns:adec="http://schemas.microsoft.com/office/drawing/2017/decorative" val="1"/>
+              </a:ext>
+            </a:extLst>
+          </p:cNvPr>
+          <p:cNvSpPr>
+            <a:spLocks noGrp="1" noRot="1" noChangeAspect="1" noMove="1" noResize="1" noEditPoints="1" noAdjustHandles="1" noChangeArrowheads="1" noChangeShapeType="1" noTextEdit="1"/>
+          </p:cNvSpPr>
+          <p:nvPr>
+            <p:extLst>
+              <p:ext uri="{386F3935-93C4-4BCD-93E2-E3B085C9AB24}">
+                <p16:designElem xmlns:p16="http://schemas.microsoft.com/office/powerpoint/2015/main" val="1"/>
+              </p:ext>
+            </p:extLst>
+          </p:nvPr>
+        </p:nvSpPr>
+        <p:spPr>
+          <a:xfrm>
+            <a:off x="0" y="0"/>
+            <a:ext cx="12188952" cy="6858000"/>
+          </a:xfrm>
+          <a:prstGeom prst="rect">
+            <a:avLst/>
+          </a:prstGeom>
+          <a:ln>
+            <a:noFill/>
+          </a:ln>
+        </p:spPr>
+        <p:style>
+          <a:lnRef idx="2">
+            <a:schemeClr val="accent1">
+              <a:shade val="50000"/>
+            </a:schemeClr>
+          </a:lnRef>
+          <a:fillRef idx="1">
+            <a:schemeClr val="accent1"/>
+          </a:fillRef>
+          <a:effectRef idx="0">
+            <a:schemeClr val="accent1"/>
+          </a:effectRef>
+          <a:fontRef idx="minor">
+            <a:schemeClr val="lt1"/>
+          </a:fontRef>
+        </p:style>
+        <p:txBody>
+          <a:bodyPr rtlCol="0" anchor="ctr"/>
+          <a:lstStyle/>
+          <a:p>
+            <a:pPr algn="ctr"/>
+            <a:endParaRPr lang="en-US"/>
+          </a:p>
+        </p:txBody>
+      </p:sp>
+      <p:sp>
+        <p:nvSpPr>
+          <p:cNvPr id="2" name="Title 1">
+            <a:extLst>
+              <a:ext uri="{FF2B5EF4-FFF2-40B4-BE49-F238E27FC236}">
+                <a16:creationId xmlns:a16="http://schemas.microsoft.com/office/drawing/2014/main" id="{4980958B-CCA7-BB15-45A0-75B7B55F7D88}"/>
+              </a:ext>
+            </a:extLst>
+          </p:cNvPr>
+          <p:cNvSpPr>
+            <a:spLocks noGrp="1"/>
+          </p:cNvSpPr>
+          <p:nvPr>
+            <p:ph type="title"/>
+          </p:nvPr>
+        </p:nvSpPr>
+        <p:spPr>
+          <a:xfrm>
+            <a:off x="640080" y="329184"/>
+            <a:ext cx="6894576" cy="1783080"/>
+          </a:xfrm>
+        </p:spPr>
+        <p:txBody>
+          <a:bodyPr anchor="b">
+            <a:normAutofit/>
+          </a:bodyPr>
+          <a:lstStyle/>
+          <a:p>
+            <a:r>
+              <a:rPr lang="en-US" sz="6600" dirty="0"/>
+              <a:t>Interpretability</a:t>
+            </a:r>
+          </a:p>
+        </p:txBody>
+      </p:sp>
+      <p:sp>
+        <p:nvSpPr>
+          <p:cNvPr id="22" name="sketch line">
+            <a:extLst>
+              <a:ext uri="{FF2B5EF4-FFF2-40B4-BE49-F238E27FC236}">
+                <a16:creationId xmlns:a16="http://schemas.microsoft.com/office/drawing/2014/main" id="{3BF5B354-AD05-7957-67E0-5B140FFD7B4F}"/>
+              </a:ext>
+              <a:ext uri="{C183D7F6-B498-43B3-948B-1728B52AA6E4}">
+                <adec:decorative xmlns:adec="http://schemas.microsoft.com/office/drawing/2017/decorative" val="1"/>
+              </a:ext>
+            </a:extLst>
+          </p:cNvPr>
+          <p:cNvSpPr>
+            <a:spLocks noGrp="1" noRot="1" noChangeAspect="1" noMove="1" noResize="1" noEditPoints="1" noAdjustHandles="1" noChangeArrowheads="1" noChangeShapeType="1" noTextEdit="1"/>
+          </p:cNvSpPr>
+          <p:nvPr>
+            <p:extLst>
+              <p:ext uri="{386F3935-93C4-4BCD-93E2-E3B085C9AB24}">
+                <p16:designElem xmlns:p16="http://schemas.microsoft.com/office/powerpoint/2015/main" val="1"/>
+              </p:ext>
+            </p:extLst>
+          </p:nvPr>
+        </p:nvSpPr>
+        <p:spPr>
+          <a:xfrm>
+            <a:off x="758952" y="2395728"/>
+            <a:ext cx="4243589" cy="18288"/>
+          </a:xfrm>
+          <a:custGeom>
+            <a:avLst/>
+            <a:gdLst>
+              <a:gd name="csX0" fmla="*/ 0 w 4243589"/>
+              <a:gd name="csY0" fmla="*/ 0 h 18288"/>
+              <a:gd name="csX1" fmla="*/ 478919 w 4243589"/>
+              <a:gd name="csY1" fmla="*/ 0 h 18288"/>
+              <a:gd name="csX2" fmla="*/ 957839 w 4243589"/>
+              <a:gd name="csY2" fmla="*/ 0 h 18288"/>
+              <a:gd name="csX3" fmla="*/ 1521630 w 4243589"/>
+              <a:gd name="csY3" fmla="*/ 0 h 18288"/>
+              <a:gd name="csX4" fmla="*/ 2212729 w 4243589"/>
+              <a:gd name="csY4" fmla="*/ 0 h 18288"/>
+              <a:gd name="csX5" fmla="*/ 2734084 w 4243589"/>
+              <a:gd name="csY5" fmla="*/ 0 h 18288"/>
+              <a:gd name="csX6" fmla="*/ 3255439 w 4243589"/>
+              <a:gd name="csY6" fmla="*/ 0 h 18288"/>
+              <a:gd name="csX7" fmla="*/ 4243589 w 4243589"/>
+              <a:gd name="csY7" fmla="*/ 0 h 18288"/>
+              <a:gd name="csX8" fmla="*/ 4243589 w 4243589"/>
+              <a:gd name="csY8" fmla="*/ 18288 h 18288"/>
+              <a:gd name="csX9" fmla="*/ 3594926 w 4243589"/>
+              <a:gd name="csY9" fmla="*/ 18288 h 18288"/>
+              <a:gd name="csX10" fmla="*/ 3073571 w 4243589"/>
+              <a:gd name="csY10" fmla="*/ 18288 h 18288"/>
+              <a:gd name="csX11" fmla="*/ 2552216 w 4243589"/>
+              <a:gd name="csY11" fmla="*/ 18288 h 18288"/>
+              <a:gd name="csX12" fmla="*/ 1903553 w 4243589"/>
+              <a:gd name="csY12" fmla="*/ 18288 h 18288"/>
+              <a:gd name="csX13" fmla="*/ 1212454 w 4243589"/>
+              <a:gd name="csY13" fmla="*/ 18288 h 18288"/>
+              <a:gd name="csX14" fmla="*/ 733535 w 4243589"/>
+              <a:gd name="csY14" fmla="*/ 18288 h 18288"/>
+              <a:gd name="csX15" fmla="*/ 0 w 4243589"/>
+              <a:gd name="csY15" fmla="*/ 18288 h 18288"/>
+              <a:gd name="csX16" fmla="*/ 0 w 4243589"/>
+              <a:gd name="csY16" fmla="*/ 0 h 18288"/>
+            </a:gdLst>
+            <a:ahLst/>
+            <a:cxnLst>
+              <a:cxn ang="0">
+                <a:pos x="csX0" y="csY0"/>
+              </a:cxn>
+              <a:cxn ang="0">
+                <a:pos x="csX1" y="csY1"/>
+              </a:cxn>
+              <a:cxn ang="0">
+                <a:pos x="csX2" y="csY2"/>
+              </a:cxn>
+              <a:cxn ang="0">
+                <a:pos x="csX3" y="csY3"/>
+              </a:cxn>
+              <a:cxn ang="0">
+                <a:pos x="csX4" y="csY4"/>
+              </a:cxn>
+              <a:cxn ang="0">
+                <a:pos x="csX5" y="csY5"/>
+              </a:cxn>
+              <a:cxn ang="0">
+                <a:pos x="csX6" y="csY6"/>
+              </a:cxn>
+              <a:cxn ang="0">
+                <a:pos x="csX7" y="csY7"/>
+              </a:cxn>
+              <a:cxn ang="0">
+                <a:pos x="csX8" y="csY8"/>
+              </a:cxn>
+              <a:cxn ang="0">
+                <a:pos x="csX9" y="csY9"/>
+              </a:cxn>
+              <a:cxn ang="0">
+                <a:pos x="csX10" y="csY10"/>
+              </a:cxn>
+              <a:cxn ang="0">
+                <a:pos x="csX11" y="csY11"/>
+              </a:cxn>
+              <a:cxn ang="0">
+                <a:pos x="csX12" y="csY12"/>
+              </a:cxn>
+              <a:cxn ang="0">
+                <a:pos x="csX13" y="csY13"/>
+              </a:cxn>
+              <a:cxn ang="0">
+                <a:pos x="csX14" y="csY14"/>
+              </a:cxn>
+              <a:cxn ang="0">
+                <a:pos x="csX15" y="csY15"/>
+              </a:cxn>
+              <a:cxn ang="0">
+                <a:pos x="csX16" y="csY16"/>
+              </a:cxn>
+            </a:cxnLst>
+            <a:rect l="l" t="t" r="r" b="b"/>
+            <a:pathLst>
+              <a:path w="4243589" h="18288" fill="none" extrusionOk="0">
+                <a:moveTo>
+                  <a:pt x="0" y="0"/>
+                </a:moveTo>
+                <a:cubicBezTo>
+                  <a:pt x="213395" y="-21006"/>
+                  <a:pt x="307421" y="-18116"/>
+                  <a:pt x="478919" y="0"/>
+                </a:cubicBezTo>
+                <a:cubicBezTo>
+                  <a:pt x="650417" y="18116"/>
+                  <a:pt x="831092" y="-21237"/>
+                  <a:pt x="957839" y="0"/>
+                </a:cubicBezTo>
+                <a:cubicBezTo>
+                  <a:pt x="1084586" y="21237"/>
+                  <a:pt x="1301682" y="25124"/>
+                  <a:pt x="1521630" y="0"/>
+                </a:cubicBezTo>
+                <a:cubicBezTo>
+                  <a:pt x="1741578" y="-25124"/>
+                  <a:pt x="1970269" y="-29139"/>
+                  <a:pt x="2212729" y="0"/>
+                </a:cubicBezTo>
+                <a:cubicBezTo>
+                  <a:pt x="2455189" y="29139"/>
+                  <a:pt x="2558847" y="-4796"/>
+                  <a:pt x="2734084" y="0"/>
+                </a:cubicBezTo>
+                <a:cubicBezTo>
+                  <a:pt x="2909321" y="4796"/>
+                  <a:pt x="3097217" y="-13409"/>
+                  <a:pt x="3255439" y="0"/>
+                </a:cubicBezTo>
+                <a:cubicBezTo>
+                  <a:pt x="3413662" y="13409"/>
+                  <a:pt x="3979999" y="-10121"/>
+                  <a:pt x="4243589" y="0"/>
+                </a:cubicBezTo>
+                <a:cubicBezTo>
+                  <a:pt x="4244484" y="8974"/>
+                  <a:pt x="4243043" y="9359"/>
+                  <a:pt x="4243589" y="18288"/>
+                </a:cubicBezTo>
+                <a:cubicBezTo>
+                  <a:pt x="4058777" y="31246"/>
+                  <a:pt x="3910348" y="3158"/>
+                  <a:pt x="3594926" y="18288"/>
+                </a:cubicBezTo>
+                <a:cubicBezTo>
+                  <a:pt x="3279504" y="33418"/>
+                  <a:pt x="3319955" y="-3977"/>
+                  <a:pt x="3073571" y="18288"/>
+                </a:cubicBezTo>
+                <a:cubicBezTo>
+                  <a:pt x="2827187" y="40553"/>
+                  <a:pt x="2767387" y="1863"/>
+                  <a:pt x="2552216" y="18288"/>
+                </a:cubicBezTo>
+                <a:cubicBezTo>
+                  <a:pt x="2337046" y="34713"/>
+                  <a:pt x="2181871" y="19527"/>
+                  <a:pt x="1903553" y="18288"/>
+                </a:cubicBezTo>
+                <a:cubicBezTo>
+                  <a:pt x="1625235" y="17049"/>
+                  <a:pt x="1557672" y="24174"/>
+                  <a:pt x="1212454" y="18288"/>
+                </a:cubicBezTo>
+                <a:cubicBezTo>
+                  <a:pt x="867236" y="12402"/>
+                  <a:pt x="874382" y="15627"/>
+                  <a:pt x="733535" y="18288"/>
+                </a:cubicBezTo>
+                <a:cubicBezTo>
+                  <a:pt x="592688" y="20949"/>
+                  <a:pt x="183477" y="14753"/>
+                  <a:pt x="0" y="18288"/>
+                </a:cubicBezTo>
+                <a:cubicBezTo>
+                  <a:pt x="-229" y="14222"/>
+                  <a:pt x="509" y="5816"/>
+                  <a:pt x="0" y="0"/>
+                </a:cubicBezTo>
+                <a:close/>
+              </a:path>
+              <a:path w="4243589" h="18288" stroke="0" extrusionOk="0">
+                <a:moveTo>
+                  <a:pt x="0" y="0"/>
+                </a:moveTo>
+                <a:cubicBezTo>
+                  <a:pt x="143690" y="16630"/>
+                  <a:pt x="266667" y="14847"/>
+                  <a:pt x="521355" y="0"/>
+                </a:cubicBezTo>
+                <a:cubicBezTo>
+                  <a:pt x="776043" y="-14847"/>
+                  <a:pt x="814491" y="-17363"/>
+                  <a:pt x="1000275" y="0"/>
+                </a:cubicBezTo>
+                <a:cubicBezTo>
+                  <a:pt x="1186059" y="17363"/>
+                  <a:pt x="1352504" y="-23507"/>
+                  <a:pt x="1521630" y="0"/>
+                </a:cubicBezTo>
+                <a:cubicBezTo>
+                  <a:pt x="1690756" y="23507"/>
+                  <a:pt x="1889525" y="5871"/>
+                  <a:pt x="2127857" y="0"/>
+                </a:cubicBezTo>
+                <a:cubicBezTo>
+                  <a:pt x="2366189" y="-5871"/>
+                  <a:pt x="2620628" y="-27997"/>
+                  <a:pt x="2776520" y="0"/>
+                </a:cubicBezTo>
+                <a:cubicBezTo>
+                  <a:pt x="2932412" y="27997"/>
+                  <a:pt x="3131683" y="-25073"/>
+                  <a:pt x="3467618" y="0"/>
+                </a:cubicBezTo>
+                <a:cubicBezTo>
+                  <a:pt x="3803553" y="25073"/>
+                  <a:pt x="4017371" y="3071"/>
+                  <a:pt x="4243589" y="0"/>
+                </a:cubicBezTo>
+                <a:cubicBezTo>
+                  <a:pt x="4243134" y="6162"/>
+                  <a:pt x="4243492" y="11775"/>
+                  <a:pt x="4243589" y="18288"/>
+                </a:cubicBezTo>
+                <a:cubicBezTo>
+                  <a:pt x="4017834" y="-5779"/>
+                  <a:pt x="3834586" y="13376"/>
+                  <a:pt x="3594926" y="18288"/>
+                </a:cubicBezTo>
+                <a:cubicBezTo>
+                  <a:pt x="3355266" y="23200"/>
+                  <a:pt x="3204179" y="2869"/>
+                  <a:pt x="2903827" y="18288"/>
+                </a:cubicBezTo>
+                <a:cubicBezTo>
+                  <a:pt x="2603475" y="33707"/>
+                  <a:pt x="2526187" y="46187"/>
+                  <a:pt x="2212729" y="18288"/>
+                </a:cubicBezTo>
+                <a:cubicBezTo>
+                  <a:pt x="1899271" y="-9611"/>
+                  <a:pt x="1966289" y="29692"/>
+                  <a:pt x="1733809" y="18288"/>
+                </a:cubicBezTo>
+                <a:cubicBezTo>
+                  <a:pt x="1501329" y="6884"/>
+                  <a:pt x="1343612" y="12492"/>
+                  <a:pt x="1085146" y="18288"/>
+                </a:cubicBezTo>
+                <a:cubicBezTo>
+                  <a:pt x="826680" y="24084"/>
+                  <a:pt x="778184" y="35607"/>
+                  <a:pt x="521355" y="18288"/>
+                </a:cubicBezTo>
+                <a:cubicBezTo>
+                  <a:pt x="264526" y="969"/>
+                  <a:pt x="120277" y="4268"/>
+                  <a:pt x="0" y="18288"/>
+                </a:cubicBezTo>
+                <a:cubicBezTo>
+                  <a:pt x="766" y="10800"/>
+                  <a:pt x="-457" y="8180"/>
+                  <a:pt x="0" y="0"/>
+                </a:cubicBezTo>
+                <a:close/>
+              </a:path>
+            </a:pathLst>
+          </a:custGeom>
+          <a:solidFill>
+            <a:schemeClr val="accent2"/>
+          </a:solidFill>
+          <a:ln w="41275" cap="rnd">
+            <a:solidFill>
+              <a:schemeClr val="accent2"/>
+            </a:solidFill>
+            <a:round/>
+            <a:extLst>
+              <a:ext uri="{C807C97D-BFC1-408E-A445-0C87EB9F89A2}">
+                <ask:lineSketchStyleProps xmlns:ask="http://schemas.microsoft.com/office/drawing/2018/sketchyshapes" sd="2727557108">
+                  <a:prstGeom prst="rect">
+                    <a:avLst/>
+                  </a:prstGeom>
+                  <ask:type>
+                    <ask:lineSketchFreehand/>
+                  </ask:type>
+                </ask:lineSketchStyleProps>
+              </a:ext>
+            </a:extLst>
+          </a:ln>
+        </p:spPr>
+        <p:style>
+          <a:lnRef idx="2">
+            <a:schemeClr val="accent1">
+              <a:shade val="50000"/>
+            </a:schemeClr>
+          </a:lnRef>
+          <a:fillRef idx="1">
+            <a:schemeClr val="accent1"/>
+          </a:fillRef>
+          <a:effectRef idx="0">
+            <a:schemeClr val="accent1"/>
+          </a:effectRef>
+          <a:fontRef idx="minor">
+            <a:schemeClr val="lt1"/>
+          </a:fontRef>
+        </p:style>
+        <p:txBody>
+          <a:bodyPr rtlCol="0" anchor="ctr"/>
+          <a:lstStyle/>
+          <a:p>
+            <a:pPr algn="ctr"/>
+            <a:endParaRPr lang="en-US"/>
+          </a:p>
+        </p:txBody>
+      </p:sp>
+      <p:pic>
+        <p:nvPicPr>
+          <p:cNvPr id="4" name="Picture 3" descr="0">
+            <a:extLst>
+              <a:ext uri="{FF2B5EF4-FFF2-40B4-BE49-F238E27FC236}">
+                <a16:creationId xmlns:a16="http://schemas.microsoft.com/office/drawing/2014/main" id="{AC830950-3D22-5830-E2C4-0AE63CC76BB0}"/>
+              </a:ext>
+            </a:extLst>
+          </p:cNvPr>
+          <p:cNvPicPr>
+            <a:picLocks noChangeAspect="1"/>
+          </p:cNvPicPr>
+          <p:nvPr/>
+        </p:nvPicPr>
+        <p:blipFill>
+          <a:blip r:embed="rId3"/>
+          <a:stretch>
+            <a:fillRect/>
+          </a:stretch>
+        </p:blipFill>
+        <p:spPr>
+          <a:xfrm>
+            <a:off x="5764541" y="263251"/>
+            <a:ext cx="6427459" cy="6594749"/>
+          </a:xfrm>
+          <a:prstGeom prst="rect">
+            <a:avLst/>
+          </a:prstGeom>
+        </p:spPr>
+      </p:pic>
+      <p:sp>
+        <p:nvSpPr>
+          <p:cNvPr id="7" name="Content Placeholder 6">
+            <a:extLst>
+              <a:ext uri="{FF2B5EF4-FFF2-40B4-BE49-F238E27FC236}">
+                <a16:creationId xmlns:a16="http://schemas.microsoft.com/office/drawing/2014/main" id="{EF563EF8-1375-8B3C-6434-12DCFB37074F}"/>
+              </a:ext>
+            </a:extLst>
+          </p:cNvPr>
+          <p:cNvSpPr>
+            <a:spLocks noGrp="1"/>
+          </p:cNvSpPr>
+          <p:nvPr>
+            <p:ph idx="1"/>
+          </p:nvPr>
+        </p:nvSpPr>
+        <p:spPr>
+          <a:xfrm>
+            <a:off x="640080" y="2706624"/>
+            <a:ext cx="6894576" cy="3483864"/>
+          </a:xfrm>
+        </p:spPr>
+        <p:txBody>
+          <a:bodyPr anchor="ctr">
+            <a:normAutofit/>
+          </a:bodyPr>
+          <a:lstStyle/>
+          <a:p>
+            <a:pPr marL="0" indent="0">
+              <a:buNone/>
+            </a:pPr>
+            <a:r>
+              <a:rPr lang="en-US" sz="2400" b="1" dirty="0"/>
+              <a:t>Paperclip</a:t>
+            </a:r>
+          </a:p>
+          <a:p>
+            <a:pPr marL="0" indent="0">
+              <a:buNone/>
+            </a:pPr>
+            <a:r>
+              <a:rPr lang="en-US" sz="2400" dirty="0"/>
+              <a:t>Search PDB in the literature for </a:t>
+            </a:r>
+          </a:p>
+          <a:p>
+            <a:r>
+              <a:rPr lang="en-US" sz="2400" dirty="0"/>
+              <a:t>Structural features</a:t>
+            </a:r>
+          </a:p>
+          <a:p>
+            <a:r>
+              <a:rPr lang="en-US" sz="2400" dirty="0"/>
+              <a:t>Functional features</a:t>
+            </a:r>
+          </a:p>
+        </p:txBody>
+      </p:sp>
+    </p:spTree>
+    <p:extLst>
+      <p:ext uri="{BB962C8B-B14F-4D97-AF65-F5344CB8AC3E}">
+        <p14:creationId xmlns:p14="http://schemas.microsoft.com/office/powerpoint/2010/main" val="512447210"/>
+      </p:ext>
+    </p:extLst>
+  </p:cSld>
+  <p:clrMapOvr>
+    <a:masterClrMapping/>
+  </p:clrMapOvr>
+</p:sld>
+</file>
+
+<file path=ppt/slides/slide7.xml><?xml version="1.0" encoding="utf-8"?>
+<p:sld xmlns:a="http://schemas.openxmlformats.org/drawingml/2006/main" xmlns:r="http://schemas.openxmlformats.org/officeDocument/2006/relationships" xmlns:p="http://schemas.openxmlformats.org/presentationml/2006/main">
+  <p:cSld>
+    <p:bg>
+      <p:bgPr>
+        <a:solidFill>
+          <a:schemeClr val="bg1"/>
+        </a:solidFill>
+        <a:effectLst/>
+      </p:bgPr>
+    </p:bg>
+    <p:spTree>
+      <p:nvGrpSpPr>
+        <p:cNvPr id="1" name="">
+          <a:extLst>
+            <a:ext uri="{FF2B5EF4-FFF2-40B4-BE49-F238E27FC236}">
+              <a16:creationId xmlns:a16="http://schemas.microsoft.com/office/drawing/2014/main" id="{267FAE46-18FD-5350-2D52-63337A27D7E4}"/>
+            </a:ext>
+          </a:extLst>
+        </p:cNvPr>
+        <p:cNvGrpSpPr/>
+        <p:nvPr/>
+      </p:nvGrpSpPr>
+      <p:grpSpPr>
+        <a:xfrm>
+          <a:off x="0" y="0"/>
+          <a:ext cx="0" cy="0"/>
+          <a:chOff x="0" y="0"/>
+          <a:chExt cx="0" cy="0"/>
+        </a:xfrm>
+      </p:grpSpPr>
+      <p:sp useBgFill="1">
+        <p:nvSpPr>
+          <p:cNvPr id="21" name="Rectangle 20">
+            <a:extLst>
+              <a:ext uri="{FF2B5EF4-FFF2-40B4-BE49-F238E27FC236}">
+                <a16:creationId xmlns:a16="http://schemas.microsoft.com/office/drawing/2014/main" id="{716F2476-C560-5F59-58BD-1966DC8F7336}"/>
+              </a:ext>
+              <a:ext uri="{C183D7F6-B498-43B3-948B-1728B52AA6E4}">
+                <adec:decorative xmlns:adec="http://schemas.microsoft.com/office/drawing/2017/decorative" val="1"/>
+              </a:ext>
+            </a:extLst>
+          </p:cNvPr>
+          <p:cNvSpPr>
+            <a:spLocks noGrp="1" noRot="1" noChangeAspect="1" noMove="1" noResize="1" noEditPoints="1" noAdjustHandles="1" noChangeArrowheads="1" noChangeShapeType="1" noTextEdit="1"/>
+          </p:cNvSpPr>
+          <p:nvPr>
+            <p:extLst>
+              <p:ext uri="{386F3935-93C4-4BCD-93E2-E3B085C9AB24}">
+                <p16:designElem xmlns:p16="http://schemas.microsoft.com/office/powerpoint/2015/main" val="1"/>
+              </p:ext>
+            </p:extLst>
+          </p:nvPr>
+        </p:nvSpPr>
+        <p:spPr>
+          <a:xfrm>
+            <a:off x="0" y="0"/>
+            <a:ext cx="12188952" cy="6858000"/>
+          </a:xfrm>
+          <a:prstGeom prst="rect">
+            <a:avLst/>
+          </a:prstGeom>
+          <a:ln>
+            <a:noFill/>
+          </a:ln>
+        </p:spPr>
+        <p:style>
+          <a:lnRef idx="2">
+            <a:schemeClr val="accent1">
+              <a:shade val="50000"/>
+            </a:schemeClr>
+          </a:lnRef>
+          <a:fillRef idx="1">
+            <a:schemeClr val="accent1"/>
+          </a:fillRef>
+          <a:effectRef idx="0">
+            <a:schemeClr val="accent1"/>
+          </a:effectRef>
+          <a:fontRef idx="minor">
+            <a:schemeClr val="lt1"/>
+          </a:fontRef>
+        </p:style>
+        <p:txBody>
+          <a:bodyPr rtlCol="0" anchor="ctr"/>
+          <a:lstStyle/>
+          <a:p>
+            <a:pPr algn="ctr"/>
+            <a:endParaRPr lang="en-US"/>
+          </a:p>
+        </p:txBody>
+      </p:sp>
+      <p:sp>
+        <p:nvSpPr>
+          <p:cNvPr id="2" name="Title 1">
+            <a:extLst>
+              <a:ext uri="{FF2B5EF4-FFF2-40B4-BE49-F238E27FC236}">
+                <a16:creationId xmlns:a16="http://schemas.microsoft.com/office/drawing/2014/main" id="{835B57BE-3B07-AAF7-003E-9E8CB676A24B}"/>
+              </a:ext>
+            </a:extLst>
+          </p:cNvPr>
+          <p:cNvSpPr>
+            <a:spLocks noGrp="1"/>
+          </p:cNvSpPr>
+          <p:nvPr>
+            <p:ph type="title"/>
+          </p:nvPr>
+        </p:nvSpPr>
+        <p:spPr>
+          <a:xfrm>
+            <a:off x="640080" y="329184"/>
+            <a:ext cx="6894576" cy="1783080"/>
+          </a:xfrm>
+        </p:spPr>
+        <p:txBody>
+          <a:bodyPr anchor="b">
+            <a:normAutofit/>
+          </a:bodyPr>
+          <a:lstStyle/>
+          <a:p>
+            <a:r>
+              <a:rPr lang="en-US" sz="6600" dirty="0"/>
+              <a:t>Interpretability</a:t>
+            </a:r>
+          </a:p>
+        </p:txBody>
+      </p:sp>
+      <p:sp>
+        <p:nvSpPr>
+          <p:cNvPr id="22" name="sketch line">
+            <a:extLst>
+              <a:ext uri="{FF2B5EF4-FFF2-40B4-BE49-F238E27FC236}">
+                <a16:creationId xmlns:a16="http://schemas.microsoft.com/office/drawing/2014/main" id="{47DA4C2B-B5FA-1565-3236-A57896494926}"/>
+              </a:ext>
+              <a:ext uri="{C183D7F6-B498-43B3-948B-1728B52AA6E4}">
+                <adec:decorative xmlns:adec="http://schemas.microsoft.com/office/drawing/2017/decorative" val="1"/>
+              </a:ext>
+            </a:extLst>
+          </p:cNvPr>
+          <p:cNvSpPr>
+            <a:spLocks noGrp="1" noRot="1" noChangeAspect="1" noMove="1" noResize="1" noEditPoints="1" noAdjustHandles="1" noChangeArrowheads="1" noChangeShapeType="1" noTextEdit="1"/>
+          </p:cNvSpPr>
+          <p:nvPr>
+            <p:extLst>
+              <p:ext uri="{386F3935-93C4-4BCD-93E2-E3B085C9AB24}">
+                <p16:designElem xmlns:p16="http://schemas.microsoft.com/office/powerpoint/2015/main" val="1"/>
+              </p:ext>
+            </p:extLst>
+          </p:nvPr>
+        </p:nvSpPr>
+        <p:spPr>
+          <a:xfrm>
+            <a:off x="758952" y="2395728"/>
+            <a:ext cx="4243589" cy="18288"/>
+          </a:xfrm>
+          <a:custGeom>
+            <a:avLst/>
+            <a:gdLst>
+              <a:gd name="csX0" fmla="*/ 0 w 4243589"/>
+              <a:gd name="csY0" fmla="*/ 0 h 18288"/>
+              <a:gd name="csX1" fmla="*/ 478919 w 4243589"/>
+              <a:gd name="csY1" fmla="*/ 0 h 18288"/>
+              <a:gd name="csX2" fmla="*/ 957839 w 4243589"/>
+              <a:gd name="csY2" fmla="*/ 0 h 18288"/>
+              <a:gd name="csX3" fmla="*/ 1521630 w 4243589"/>
+              <a:gd name="csY3" fmla="*/ 0 h 18288"/>
+              <a:gd name="csX4" fmla="*/ 2212729 w 4243589"/>
+              <a:gd name="csY4" fmla="*/ 0 h 18288"/>
+              <a:gd name="csX5" fmla="*/ 2734084 w 4243589"/>
+              <a:gd name="csY5" fmla="*/ 0 h 18288"/>
+              <a:gd name="csX6" fmla="*/ 3255439 w 4243589"/>
+              <a:gd name="csY6" fmla="*/ 0 h 18288"/>
+              <a:gd name="csX7" fmla="*/ 4243589 w 4243589"/>
+              <a:gd name="csY7" fmla="*/ 0 h 18288"/>
+              <a:gd name="csX8" fmla="*/ 4243589 w 4243589"/>
+              <a:gd name="csY8" fmla="*/ 18288 h 18288"/>
+              <a:gd name="csX9" fmla="*/ 3594926 w 4243589"/>
+              <a:gd name="csY9" fmla="*/ 18288 h 18288"/>
+              <a:gd name="csX10" fmla="*/ 3073571 w 4243589"/>
+              <a:gd name="csY10" fmla="*/ 18288 h 18288"/>
+              <a:gd name="csX11" fmla="*/ 2552216 w 4243589"/>
+              <a:gd name="csY11" fmla="*/ 18288 h 18288"/>
+              <a:gd name="csX12" fmla="*/ 1903553 w 4243589"/>
+              <a:gd name="csY12" fmla="*/ 18288 h 18288"/>
+              <a:gd name="csX13" fmla="*/ 1212454 w 4243589"/>
+              <a:gd name="csY13" fmla="*/ 18288 h 18288"/>
+              <a:gd name="csX14" fmla="*/ 733535 w 4243589"/>
+              <a:gd name="csY14" fmla="*/ 18288 h 18288"/>
+              <a:gd name="csX15" fmla="*/ 0 w 4243589"/>
+              <a:gd name="csY15" fmla="*/ 18288 h 18288"/>
+              <a:gd name="csX16" fmla="*/ 0 w 4243589"/>
+              <a:gd name="csY16" fmla="*/ 0 h 18288"/>
+            </a:gdLst>
+            <a:ahLst/>
+            <a:cxnLst>
+              <a:cxn ang="0">
+                <a:pos x="csX0" y="csY0"/>
+              </a:cxn>
+              <a:cxn ang="0">
+                <a:pos x="csX1" y="csY1"/>
+              </a:cxn>
+              <a:cxn ang="0">
+                <a:pos x="csX2" y="csY2"/>
+              </a:cxn>
+              <a:cxn ang="0">
+                <a:pos x="csX3" y="csY3"/>
+              </a:cxn>
+              <a:cxn ang="0">
+                <a:pos x="csX4" y="csY4"/>
+              </a:cxn>
+              <a:cxn ang="0">
+                <a:pos x="csX5" y="csY5"/>
+              </a:cxn>
+              <a:cxn ang="0">
+                <a:pos x="csX6" y="csY6"/>
+              </a:cxn>
+              <a:cxn ang="0">
+                <a:pos x="csX7" y="csY7"/>
+              </a:cxn>
+              <a:cxn ang="0">
+                <a:pos x="csX8" y="csY8"/>
+              </a:cxn>
+              <a:cxn ang="0">
+                <a:pos x="csX9" y="csY9"/>
+              </a:cxn>
+              <a:cxn ang="0">
+                <a:pos x="csX10" y="csY10"/>
+              </a:cxn>
+              <a:cxn ang="0">
+                <a:pos x="csX11" y="csY11"/>
+              </a:cxn>
+              <a:cxn ang="0">
+                <a:pos x="csX12" y="csY12"/>
+              </a:cxn>
+              <a:cxn ang="0">
+                <a:pos x="csX13" y="csY13"/>
+              </a:cxn>
+              <a:cxn ang="0">
+                <a:pos x="csX14" y="csY14"/>
+              </a:cxn>
+              <a:cxn ang="0">
+                <a:pos x="csX15" y="csY15"/>
+              </a:cxn>
+              <a:cxn ang="0">
+                <a:pos x="csX16" y="csY16"/>
+              </a:cxn>
+            </a:cxnLst>
+            <a:rect l="l" t="t" r="r" b="b"/>
+            <a:pathLst>
+              <a:path w="4243589" h="18288" fill="none" extrusionOk="0">
+                <a:moveTo>
+                  <a:pt x="0" y="0"/>
+                </a:moveTo>
+                <a:cubicBezTo>
+                  <a:pt x="213395" y="-21006"/>
+                  <a:pt x="307421" y="-18116"/>
+                  <a:pt x="478919" y="0"/>
+                </a:cubicBezTo>
+                <a:cubicBezTo>
+                  <a:pt x="650417" y="18116"/>
+                  <a:pt x="831092" y="-21237"/>
+                  <a:pt x="957839" y="0"/>
+                </a:cubicBezTo>
+                <a:cubicBezTo>
+                  <a:pt x="1084586" y="21237"/>
+                  <a:pt x="1301682" y="25124"/>
+                  <a:pt x="1521630" y="0"/>
+                </a:cubicBezTo>
+                <a:cubicBezTo>
+                  <a:pt x="1741578" y="-25124"/>
+                  <a:pt x="1970269" y="-29139"/>
+                  <a:pt x="2212729" y="0"/>
+                </a:cubicBezTo>
+                <a:cubicBezTo>
+                  <a:pt x="2455189" y="29139"/>
+                  <a:pt x="2558847" y="-4796"/>
+                  <a:pt x="2734084" y="0"/>
+                </a:cubicBezTo>
+                <a:cubicBezTo>
+                  <a:pt x="2909321" y="4796"/>
+                  <a:pt x="3097217" y="-13409"/>
+                  <a:pt x="3255439" y="0"/>
+                </a:cubicBezTo>
+                <a:cubicBezTo>
+                  <a:pt x="3413662" y="13409"/>
+                  <a:pt x="3979999" y="-10121"/>
+                  <a:pt x="4243589" y="0"/>
+                </a:cubicBezTo>
+                <a:cubicBezTo>
+                  <a:pt x="4244484" y="8974"/>
+                  <a:pt x="4243043" y="9359"/>
+                  <a:pt x="4243589" y="18288"/>
+                </a:cubicBezTo>
+                <a:cubicBezTo>
+                  <a:pt x="4058777" y="31246"/>
+                  <a:pt x="3910348" y="3158"/>
+                  <a:pt x="3594926" y="18288"/>
+                </a:cubicBezTo>
+                <a:cubicBezTo>
+                  <a:pt x="3279504" y="33418"/>
+                  <a:pt x="3319955" y="-3977"/>
+                  <a:pt x="3073571" y="18288"/>
+                </a:cubicBezTo>
+                <a:cubicBezTo>
+                  <a:pt x="2827187" y="40553"/>
+                  <a:pt x="2767387" y="1863"/>
+                  <a:pt x="2552216" y="18288"/>
+                </a:cubicBezTo>
+                <a:cubicBezTo>
+                  <a:pt x="2337046" y="34713"/>
+                  <a:pt x="2181871" y="19527"/>
+                  <a:pt x="1903553" y="18288"/>
+                </a:cubicBezTo>
+                <a:cubicBezTo>
+                  <a:pt x="1625235" y="17049"/>
+                  <a:pt x="1557672" y="24174"/>
+                  <a:pt x="1212454" y="18288"/>
+                </a:cubicBezTo>
+                <a:cubicBezTo>
+                  <a:pt x="867236" y="12402"/>
+                  <a:pt x="874382" y="15627"/>
+                  <a:pt x="733535" y="18288"/>
+                </a:cubicBezTo>
+                <a:cubicBezTo>
+                  <a:pt x="592688" y="20949"/>
+                  <a:pt x="183477" y="14753"/>
+                  <a:pt x="0" y="18288"/>
+                </a:cubicBezTo>
+                <a:cubicBezTo>
+                  <a:pt x="-229" y="14222"/>
+                  <a:pt x="509" y="5816"/>
+                  <a:pt x="0" y="0"/>
+                </a:cubicBezTo>
+                <a:close/>
+              </a:path>
+              <a:path w="4243589" h="18288" stroke="0" extrusionOk="0">
+                <a:moveTo>
+                  <a:pt x="0" y="0"/>
+                </a:moveTo>
+                <a:cubicBezTo>
+                  <a:pt x="143690" y="16630"/>
+                  <a:pt x="266667" y="14847"/>
+                  <a:pt x="521355" y="0"/>
+                </a:cubicBezTo>
+                <a:cubicBezTo>
+                  <a:pt x="776043" y="-14847"/>
+                  <a:pt x="814491" y="-17363"/>
+                  <a:pt x="1000275" y="0"/>
+                </a:cubicBezTo>
+                <a:cubicBezTo>
+                  <a:pt x="1186059" y="17363"/>
+                  <a:pt x="1352504" y="-23507"/>
+                  <a:pt x="1521630" y="0"/>
+                </a:cubicBezTo>
+                <a:cubicBezTo>
+                  <a:pt x="1690756" y="23507"/>
+                  <a:pt x="1889525" y="5871"/>
+                  <a:pt x="2127857" y="0"/>
+                </a:cubicBezTo>
+                <a:cubicBezTo>
+                  <a:pt x="2366189" y="-5871"/>
+                  <a:pt x="2620628" y="-27997"/>
+                  <a:pt x="2776520" y="0"/>
+                </a:cubicBezTo>
+                <a:cubicBezTo>
+                  <a:pt x="2932412" y="27997"/>
+                  <a:pt x="3131683" y="-25073"/>
+                  <a:pt x="3467618" y="0"/>
+                </a:cubicBezTo>
+                <a:cubicBezTo>
+                  <a:pt x="3803553" y="25073"/>
+                  <a:pt x="4017371" y="3071"/>
+                  <a:pt x="4243589" y="0"/>
+                </a:cubicBezTo>
+                <a:cubicBezTo>
+                  <a:pt x="4243134" y="6162"/>
+                  <a:pt x="4243492" y="11775"/>
+                  <a:pt x="4243589" y="18288"/>
+                </a:cubicBezTo>
+                <a:cubicBezTo>
+                  <a:pt x="4017834" y="-5779"/>
+                  <a:pt x="3834586" y="13376"/>
+                  <a:pt x="3594926" y="18288"/>
+                </a:cubicBezTo>
+                <a:cubicBezTo>
+                  <a:pt x="3355266" y="23200"/>
+                  <a:pt x="3204179" y="2869"/>
+                  <a:pt x="2903827" y="18288"/>
+                </a:cubicBezTo>
+                <a:cubicBezTo>
+                  <a:pt x="2603475" y="33707"/>
+                  <a:pt x="2526187" y="46187"/>
+                  <a:pt x="2212729" y="18288"/>
+                </a:cubicBezTo>
+                <a:cubicBezTo>
+                  <a:pt x="1899271" y="-9611"/>
+                  <a:pt x="1966289" y="29692"/>
+                  <a:pt x="1733809" y="18288"/>
+                </a:cubicBezTo>
+                <a:cubicBezTo>
+                  <a:pt x="1501329" y="6884"/>
+                  <a:pt x="1343612" y="12492"/>
+                  <a:pt x="1085146" y="18288"/>
+                </a:cubicBezTo>
+                <a:cubicBezTo>
+                  <a:pt x="826680" y="24084"/>
+                  <a:pt x="778184" y="35607"/>
+                  <a:pt x="521355" y="18288"/>
+                </a:cubicBezTo>
+                <a:cubicBezTo>
+                  <a:pt x="264526" y="969"/>
+                  <a:pt x="120277" y="4268"/>
+                  <a:pt x="0" y="18288"/>
+                </a:cubicBezTo>
+                <a:cubicBezTo>
+                  <a:pt x="766" y="10800"/>
+                  <a:pt x="-457" y="8180"/>
+                  <a:pt x="0" y="0"/>
+                </a:cubicBezTo>
+                <a:close/>
+              </a:path>
+            </a:pathLst>
+          </a:custGeom>
+          <a:solidFill>
+            <a:schemeClr val="accent2"/>
+          </a:solidFill>
+          <a:ln w="41275" cap="rnd">
+            <a:solidFill>
+              <a:schemeClr val="accent2"/>
+            </a:solidFill>
+            <a:round/>
+            <a:extLst>
+              <a:ext uri="{C807C97D-BFC1-408E-A445-0C87EB9F89A2}">
+                <ask:lineSketchStyleProps xmlns:ask="http://schemas.microsoft.com/office/drawing/2018/sketchyshapes" sd="2727557108">
+                  <a:prstGeom prst="rect">
+                    <a:avLst/>
+                  </a:prstGeom>
+                  <ask:type>
+                    <ask:lineSketchFreehand/>
+                  </ask:type>
+                </ask:lineSketchStyleProps>
+              </a:ext>
+            </a:extLst>
+          </a:ln>
+        </p:spPr>
+        <p:style>
+          <a:lnRef idx="2">
+            <a:schemeClr val="accent1">
+              <a:shade val="50000"/>
+            </a:schemeClr>
+          </a:lnRef>
+          <a:fillRef idx="1">
+            <a:schemeClr val="accent1"/>
+          </a:fillRef>
+          <a:effectRef idx="0">
+            <a:schemeClr val="accent1"/>
+          </a:effectRef>
+          <a:fontRef idx="minor">
+            <a:schemeClr val="lt1"/>
+          </a:fontRef>
+        </p:style>
+        <p:txBody>
+          <a:bodyPr rtlCol="0" anchor="ctr"/>
+          <a:lstStyle/>
+          <a:p>
+            <a:pPr algn="ctr"/>
+            <a:endParaRPr lang="en-US"/>
+          </a:p>
+        </p:txBody>
+      </p:sp>
+      <mc:AlternateContent xmlns:mc="http://schemas.openxmlformats.org/markup-compatibility/2006">
+        <mc:Choice xmlns:a14="http://schemas.microsoft.com/office/drawing/2010/main" Requires="a14">
+          <p:sp>
+            <p:nvSpPr>
+              <p:cNvPr id="7" name="Content Placeholder 6">
+                <a:extLst>
+                  <a:ext uri="{FF2B5EF4-FFF2-40B4-BE49-F238E27FC236}">
+                    <a16:creationId xmlns:a16="http://schemas.microsoft.com/office/drawing/2014/main" id="{B2ACCDF7-A19E-834D-F507-A75ACCB9E197}"/>
+                  </a:ext>
+                </a:extLst>
+              </p:cNvPr>
+              <p:cNvSpPr>
+                <a:spLocks noGrp="1"/>
+              </p:cNvSpPr>
+              <p:nvPr>
+                <p:ph idx="1"/>
+              </p:nvPr>
+            </p:nvSpPr>
+            <p:spPr>
+              <a:xfrm>
+                <a:off x="640080" y="2706624"/>
+                <a:ext cx="6894576" cy="3483864"/>
+              </a:xfrm>
+            </p:spPr>
+            <p:txBody>
+              <a:bodyPr anchor="ctr">
+                <a:normAutofit/>
+              </a:bodyPr>
+              <a:lstStyle/>
+              <a:p>
+                <a:pPr marL="0" indent="0">
+                  <a:buNone/>
+                </a:pPr>
+                <a:r>
+                  <a:rPr lang="en-US" sz="2400" b="1" dirty="0"/>
+                  <a:t>ESM-SAE </a:t>
+                </a:r>
+              </a:p>
+              <a:p>
+                <a:pPr marL="0" indent="0">
+                  <a:buNone/>
+                </a:pPr>
+                <a:r>
+                  <a:rPr lang="en-US" sz="2400" dirty="0"/>
+                  <a:t>Search SAE components with</a:t>
+                </a:r>
+                <a:br>
+                  <a:rPr lang="en-US" sz="2400" dirty="0"/>
+                </a:br>
+                <a14:m>
+                  <m:oMathPara xmlns:m="http://schemas.openxmlformats.org/officeDocument/2006/math">
+                    <m:oMath>
+                      <m:r>
+                        <a:rPr lang="en-US" sz="2400" b="0" i="1" smtClean="0">
+                          <a:latin typeface="Cambria Math" panose="02040503050406030204" pitchFamily="18" charset="0"/>
+                        </a:rPr>
+                        <m:t> </m:t>
+                      </m:r>
+                      <m:r>
+                        <m:rPr>
+                          <m:sty m:val="p"/>
+                        </m:rPr>
+                        <a:rPr lang="en-US" sz="2400" b="0" i="0" smtClean="0">
+                          <a:latin typeface="Cambria Math" panose="02040503050406030204" pitchFamily="18" charset="0"/>
+                        </a:rPr>
+                        <m:t>Δ</m:t>
+                      </m:r>
+                      <m:r>
+                        <m:rPr>
+                          <m:sty m:val="p"/>
+                        </m:rPr>
+                        <a:rPr lang="en-US" sz="2400" b="0" i="0" smtClean="0">
+                          <a:latin typeface="Cambria Math" panose="02040503050406030204" pitchFamily="18" charset="0"/>
+                        </a:rPr>
+                        <m:t>Δ</m:t>
+                      </m:r>
+                      <m:r>
+                        <a:rPr lang="en-US" sz="2400" b="0" i="1" smtClean="0">
+                          <a:latin typeface="Cambria Math" panose="02040503050406030204" pitchFamily="18" charset="0"/>
+                        </a:rPr>
+                        <m:t>𝑆𝐴𝐸</m:t>
+                      </m:r>
+                      <m:r>
+                        <a:rPr lang="en-US" sz="2400" b="0" i="1" smtClean="0">
+                          <a:latin typeface="Cambria Math" panose="02040503050406030204" pitchFamily="18" charset="0"/>
+                        </a:rPr>
+                        <m:t>=</m:t>
+                      </m:r>
+                      <m:r>
+                        <a:rPr lang="en-US" sz="2400" b="0" i="1" smtClean="0">
+                          <a:latin typeface="Cambria Math" panose="02040503050406030204" pitchFamily="18" charset="0"/>
+                        </a:rPr>
+                        <m:t>𝑆𝐴𝐸</m:t>
+                      </m:r>
+                      <m:d>
+                        <m:dPr>
+                          <m:ctrlPr>
+                            <a:rPr lang="en-US" sz="2400" b="0" i="1" smtClean="0">
+                              <a:latin typeface="Cambria Math" panose="02040503050406030204" pitchFamily="18" charset="0"/>
+                            </a:rPr>
+                          </m:ctrlPr>
+                        </m:dPr>
+                        <m:e>
+                          <m:r>
+                            <a:rPr lang="en-US" sz="2400" b="0" i="1" smtClean="0">
+                              <a:latin typeface="Cambria Math" panose="02040503050406030204" pitchFamily="18" charset="0"/>
+                            </a:rPr>
+                            <m:t>𝜇</m:t>
+                          </m:r>
+                          <m:r>
+                            <a:rPr lang="en-US" sz="2400" b="0" i="1" smtClean="0">
+                              <a:latin typeface="Cambria Math" panose="02040503050406030204" pitchFamily="18" charset="0"/>
+                            </a:rPr>
+                            <m:t>_</m:t>
+                          </m:r>
+                          <m:r>
+                            <a:rPr lang="en-US" sz="2400" b="0" i="1" smtClean="0">
+                              <a:latin typeface="Cambria Math" panose="02040503050406030204" pitchFamily="18" charset="0"/>
+                            </a:rPr>
+                            <m:t>𝑐𝑜𝑚𝑝</m:t>
+                          </m:r>
+                        </m:e>
+                      </m:d>
+                      <m:r>
+                        <a:rPr lang="en-US" sz="2400" b="0" i="1" smtClean="0">
+                          <a:latin typeface="Cambria Math" panose="02040503050406030204" pitchFamily="18" charset="0"/>
+                        </a:rPr>
+                        <m:t>−</m:t>
+                      </m:r>
+                      <m:r>
+                        <a:rPr lang="en-US" sz="2400" b="0" i="1" smtClean="0">
+                          <a:latin typeface="Cambria Math" panose="02040503050406030204" pitchFamily="18" charset="0"/>
+                        </a:rPr>
+                        <m:t>𝑆𝐴𝐸</m:t>
+                      </m:r>
+                      <m:d>
+                        <m:dPr>
+                          <m:ctrlPr>
+                            <a:rPr lang="en-US" sz="2400" b="0" i="1" smtClean="0">
+                              <a:latin typeface="Cambria Math" panose="02040503050406030204" pitchFamily="18" charset="0"/>
+                            </a:rPr>
+                          </m:ctrlPr>
+                        </m:dPr>
+                        <m:e>
+                          <m:r>
+                            <a:rPr lang="en-US" sz="2400" b="0" i="1" smtClean="0">
+                              <a:latin typeface="Cambria Math" panose="02040503050406030204" pitchFamily="18" charset="0"/>
+                            </a:rPr>
+                            <m:t>𝑤𝑡</m:t>
+                          </m:r>
+                        </m:e>
+                      </m:d>
+                    </m:oMath>
+                  </m:oMathPara>
+                </a14:m>
+                <a:endParaRPr lang="en-US" sz="2400" b="0" dirty="0"/>
+              </a:p>
+            </p:txBody>
+          </p:sp>
+        </mc:Choice>
+        <mc:Fallback>
+          <p:sp>
+            <p:nvSpPr>
+              <p:cNvPr id="7" name="Content Placeholder 6">
+                <a:extLst>
+                  <a:ext uri="{FF2B5EF4-FFF2-40B4-BE49-F238E27FC236}">
+                    <a16:creationId xmlns:a16="http://schemas.microsoft.com/office/drawing/2014/main" id="{B2ACCDF7-A19E-834D-F507-A75ACCB9E197}"/>
+                  </a:ext>
+                </a:extLst>
+              </p:cNvPr>
+              <p:cNvSpPr>
+                <a:spLocks noGrp="1" noRot="1" noChangeAspect="1" noMove="1" noResize="1" noEditPoints="1" noAdjustHandles="1" noChangeArrowheads="1" noChangeShapeType="1" noTextEdit="1"/>
+              </p:cNvSpPr>
+              <p:nvPr>
+                <p:ph idx="1"/>
+              </p:nvPr>
+            </p:nvSpPr>
+            <p:spPr>
+              <a:xfrm>
+                <a:off x="640080" y="2706624"/>
+                <a:ext cx="6894576" cy="3483864"/>
+              </a:xfrm>
+              <a:blipFill>
+                <a:blip r:embed="rId3"/>
+                <a:stretch>
+                  <a:fillRect l="-1471"/>
+                </a:stretch>
+              </a:blipFill>
+            </p:spPr>
+            <p:txBody>
+              <a:bodyPr/>
+              <a:lstStyle/>
+              <a:p>
+                <a:r>
+                  <a:rPr lang="en-US">
+                    <a:noFill/>
+                  </a:rPr>
+                  <a:t> </a:t>
+                </a:r>
+              </a:p>
+            </p:txBody>
+          </p:sp>
+        </mc:Fallback>
+      </mc:AlternateContent>
+      <p:grpSp>
+        <p:nvGrpSpPr>
+          <p:cNvPr id="10" name="Group 9">
+            <a:extLst>
+              <a:ext uri="{FF2B5EF4-FFF2-40B4-BE49-F238E27FC236}">
+                <a16:creationId xmlns:a16="http://schemas.microsoft.com/office/drawing/2014/main" id="{3C53C946-54A9-7060-40C4-D3BD497061D4}"/>
+              </a:ext>
+            </a:extLst>
+          </p:cNvPr>
+          <p:cNvGrpSpPr/>
+          <p:nvPr/>
+        </p:nvGrpSpPr>
+        <p:grpSpPr>
+          <a:xfrm>
+            <a:off x="439701" y="1674966"/>
+            <a:ext cx="12064926" cy="5145590"/>
+            <a:chOff x="439701" y="1674966"/>
+            <a:chExt cx="12064926" cy="5145590"/>
+          </a:xfrm>
+        </p:grpSpPr>
+        <p:pic>
+          <p:nvPicPr>
+            <p:cNvPr id="3" name="Picture 2">
+              <a:extLst>
+                <a:ext uri="{FF2B5EF4-FFF2-40B4-BE49-F238E27FC236}">
+                  <a16:creationId xmlns:a16="http://schemas.microsoft.com/office/drawing/2014/main" id="{F7839342-357A-DE2F-3752-A717C84CB0DF}"/>
+                </a:ext>
+              </a:extLst>
+            </p:cNvPr>
+            <p:cNvPicPr>
+              <a:picLocks noChangeAspect="1"/>
+            </p:cNvPicPr>
+            <p:nvPr/>
+          </p:nvPicPr>
+          <p:blipFill>
+            <a:blip r:embed="rId4"/>
+            <a:stretch>
+              <a:fillRect/>
+            </a:stretch>
+          </p:blipFill>
+          <p:spPr>
+            <a:xfrm>
+              <a:off x="439701" y="2057503"/>
+              <a:ext cx="7295333" cy="4738848"/>
+            </a:xfrm>
+            <a:prstGeom prst="rect">
+              <a:avLst/>
+            </a:prstGeom>
+          </p:spPr>
+        </p:pic>
+        <p:pic>
+          <p:nvPicPr>
+            <p:cNvPr id="9" name="Picture 8">
+              <a:extLst>
+                <a:ext uri="{FF2B5EF4-FFF2-40B4-BE49-F238E27FC236}">
+                  <a16:creationId xmlns:a16="http://schemas.microsoft.com/office/drawing/2014/main" id="{B47E8C48-5633-A58B-AE94-7F70B12A08D8}"/>
+                </a:ext>
+              </a:extLst>
+            </p:cNvPr>
+            <p:cNvPicPr>
+              <a:picLocks noChangeAspect="1"/>
+            </p:cNvPicPr>
+            <p:nvPr/>
+          </p:nvPicPr>
+          <p:blipFill>
+            <a:blip r:embed="rId5"/>
+            <a:stretch>
+              <a:fillRect/>
+            </a:stretch>
+          </p:blipFill>
+          <p:spPr>
+            <a:xfrm>
+              <a:off x="7359037" y="1674966"/>
+              <a:ext cx="5145590" cy="5145590"/>
+            </a:xfrm>
+            <a:prstGeom prst="rect">
+              <a:avLst/>
+            </a:prstGeom>
+          </p:spPr>
+        </p:pic>
+      </p:grpSp>
+    </p:spTree>
+    <p:extLst>
+      <p:ext uri="{BB962C8B-B14F-4D97-AF65-F5344CB8AC3E}">
+        <p14:creationId xmlns:p14="http://schemas.microsoft.com/office/powerpoint/2010/main" val="3810325304"/>
+      </p:ext>
+    </p:extLst>
+  </p:cSld>
+  <p:clrMapOvr>
+    <a:masterClrMapping/>
+  </p:clrMapOvr>
+  <p:timing>
+    <p:tnLst>
+      <p:par>
+        <p:cTn id="1" dur="indefinite" restart="never" nodeType="tmRoot">
+          <p:childTnLst>
+            <p:seq concurrent="1" nextAc="seek">
+              <p:cTn id="2" dur="indefinite" nodeType="mainSeq">
+                <p:childTnLst>
+                  <p:par>
+                    <p:cTn id="3" fill="hold">
+                      <p:stCondLst>
+                        <p:cond delay="indefinite"/>
+                      </p:stCondLst>
+                      <p:childTnLst>
+                        <p:par>
+                          <p:cTn id="4" fill="hold">
+                            <p:stCondLst>
+                              <p:cond delay="0"/>
+                            </p:stCondLst>
+                            <p:childTnLst>
+                              <p:par>
+                                <p:cTn id="5" presetID="1" presetClass="entr" presetSubtype="0" fill="hold" nodeType="clickEffect">
+                                  <p:stCondLst>
+                                    <p:cond delay="0"/>
+                                  </p:stCondLst>
+                                  <p:childTnLst>
+                                    <p:set>
+                                      <p:cBhvr>
+                                        <p:cTn id="6" dur="1" fill="hold">
+                                          <p:stCondLst>
+                                            <p:cond delay="0"/>
+                                          </p:stCondLst>
+                                        </p:cTn>
+                                        <p:tgtEl>
+                                          <p:spTgt spid="10"/>
+                                        </p:tgtEl>
+                                        <p:attrNameLst>
+                                          <p:attrName>style.visibility</p:attrName>
+                                        </p:attrNameLst>
+                                      </p:cBhvr>
+                                      <p:to>
+                                        <p:strVal val="visible"/>
+                                      </p:to>
+                                    </p:set>
+                                  </p:childTnLst>
+                                </p:cTn>
+                              </p:par>
+                            </p:childTnLst>
+                          </p:cTn>
+                        </p:par>
+                      </p:childTnLst>
+                    </p:cTn>
+                  </p:par>
+                </p:childTnLst>
+              </p:cTn>
+              <p:prevCondLst>
+                <p:cond evt="onPrev" delay="0">
+                  <p:tgtEl>
+                    <p:sldTgt/>
+                  </p:tgtEl>
+                </p:cond>
+              </p:prevCondLst>
+              <p:nextCondLst>
+                <p:cond evt="onNext" delay="0">
+                  <p:tgtEl>
+                    <p:sldTgt/>
+                  </p:tgtEl>
+                </p:cond>
+              </p:nextCondLst>
+            </p:seq>
+          </p:childTnLst>
+        </p:cTn>
+      </p:par>
+    </p:tnLst>
+  </p:timing>
+</p:sld>
+</file>
+
+<file path=ppt/slides/slide8.xml><?xml version="1.0" encoding="utf-8"?>
+<p:sld xmlns:a="http://schemas.openxmlformats.org/drawingml/2006/main" xmlns:r="http://schemas.openxmlformats.org/officeDocument/2006/relationships" xmlns:p="http://schemas.openxmlformats.org/presentationml/2006/main">
+  <p:cSld>
+    <p:spTree>
+      <p:nvGrpSpPr>
+        <p:cNvPr id="1" name="">
+          <a:extLst>
+            <a:ext uri="{FF2B5EF4-FFF2-40B4-BE49-F238E27FC236}">
+              <a16:creationId xmlns:a16="http://schemas.microsoft.com/office/drawing/2014/main" id="{77908F1D-FA32-43DD-0686-80A7ED1902F1}"/>
+            </a:ext>
+          </a:extLst>
+        </p:cNvPr>
+        <p:cNvGrpSpPr/>
+        <p:nvPr/>
+      </p:nvGrpSpPr>
+      <p:grpSpPr>
+        <a:xfrm>
+          <a:off x="0" y="0"/>
+          <a:ext cx="0" cy="0"/>
+          <a:chOff x="0" y="0"/>
+          <a:chExt cx="0" cy="0"/>
+        </a:xfrm>
+      </p:grpSpPr>
+      <p:sp>
+        <p:nvSpPr>
+          <p:cNvPr id="2" name="Title 1">
+            <a:extLst>
+              <a:ext uri="{FF2B5EF4-FFF2-40B4-BE49-F238E27FC236}">
+                <a16:creationId xmlns:a16="http://schemas.microsoft.com/office/drawing/2014/main" id="{3ECCD02C-F03A-5699-A7DE-FF696742DE3F}"/>
+              </a:ext>
+            </a:extLst>
+          </p:cNvPr>
+          <p:cNvSpPr>
+            <a:spLocks noGrp="1"/>
+          </p:cNvSpPr>
+          <p:nvPr>
+            <p:ph type="title"/>
+          </p:nvPr>
+        </p:nvSpPr>
+        <p:spPr>
+          <a:xfrm>
+            <a:off x="640080" y="329184"/>
+            <a:ext cx="6894576" cy="1783080"/>
+          </a:xfrm>
+        </p:spPr>
+        <p:txBody>
+          <a:bodyPr anchor="b">
+            <a:normAutofit/>
+          </a:bodyPr>
+          <a:lstStyle/>
+          <a:p>
+            <a:r>
+              <a:rPr lang="en-US" sz="6600" dirty="0"/>
+              <a:t>Interpretability</a:t>
+            </a:r>
+          </a:p>
+        </p:txBody>
+      </p:sp>
+      <p:sp>
+        <p:nvSpPr>
+          <p:cNvPr id="7" name="Content Placeholder 6">
+            <a:extLst>
+              <a:ext uri="{FF2B5EF4-FFF2-40B4-BE49-F238E27FC236}">
+                <a16:creationId xmlns:a16="http://schemas.microsoft.com/office/drawing/2014/main" id="{43F412E4-42CF-97BA-DE2C-D1A0CAFABE0D}"/>
+              </a:ext>
+            </a:extLst>
+          </p:cNvPr>
+          <p:cNvSpPr>
+            <a:spLocks noGrp="1"/>
+          </p:cNvSpPr>
+          <p:nvPr>
+            <p:ph idx="1"/>
+          </p:nvPr>
+        </p:nvSpPr>
+        <p:spPr>
+          <a:xfrm>
+            <a:off x="640080" y="2706624"/>
+            <a:ext cx="6427459" cy="3483864"/>
+          </a:xfrm>
+        </p:spPr>
+        <p:txBody>
+          <a:bodyPr anchor="ctr">
+            <a:normAutofit/>
+          </a:bodyPr>
+          <a:lstStyle/>
+          <a:p>
+            <a:pPr marL="0" indent="0">
+              <a:buNone/>
+            </a:pPr>
+            <a:r>
+              <a:rPr lang="en-US" sz="2400" b="1" dirty="0"/>
+              <a:t>Physical Cross Check</a:t>
+            </a:r>
+          </a:p>
+          <a:p>
+            <a:pPr marL="0" indent="0">
+              <a:buNone/>
+            </a:pPr>
+            <a:r>
+              <a:rPr lang="en-US" sz="2400" dirty="0"/>
+              <a:t>Compute physical interaction energy between diff’d AA &amp; old AA</a:t>
+            </a:r>
+            <a:endParaRPr lang="en-US" sz="2400" b="0" dirty="0"/>
+          </a:p>
+          <a:p>
+            <a:pPr marL="0" indent="0">
+              <a:buNone/>
+            </a:pPr>
+            <a:endParaRPr lang="en-US" sz="2400" dirty="0"/>
+          </a:p>
+        </p:txBody>
+      </p:sp>
+      <p:pic>
+        <p:nvPicPr>
+          <p:cNvPr id="12" name="Picture 11">
+            <a:extLst>
+              <a:ext uri="{FF2B5EF4-FFF2-40B4-BE49-F238E27FC236}">
+                <a16:creationId xmlns:a16="http://schemas.microsoft.com/office/drawing/2014/main" id="{13B76C1A-A314-4E30-DB03-D281944F2EC3}"/>
+              </a:ext>
+            </a:extLst>
+          </p:cNvPr>
+          <p:cNvPicPr>
+            <a:picLocks noChangeAspect="1"/>
+          </p:cNvPicPr>
+          <p:nvPr/>
+        </p:nvPicPr>
+        <p:blipFill>
+          <a:blip r:embed="rId3"/>
+          <a:stretch>
+            <a:fillRect/>
+          </a:stretch>
+        </p:blipFill>
+        <p:spPr>
+          <a:xfrm>
+            <a:off x="469243" y="2112264"/>
+            <a:ext cx="6769131" cy="4637743"/>
+          </a:xfrm>
+          <a:prstGeom prst="rect">
+            <a:avLst/>
+          </a:prstGeom>
+        </p:spPr>
+      </p:pic>
+    </p:spTree>
+    <p:extLst>
+      <p:ext uri="{BB962C8B-B14F-4D97-AF65-F5344CB8AC3E}">
+        <p14:creationId xmlns:p14="http://schemas.microsoft.com/office/powerpoint/2010/main" val="4018769777"/>
+      </p:ext>
+    </p:extLst>
+  </p:cSld>
+  <p:clrMapOvr>
+    <a:masterClrMapping/>
+  </p:clrMapOvr>
+  <p:timing>
+    <p:tnLst>
+      <p:par>
+        <p:cTn id="1" dur="indefinite" restart="never" nodeType="tmRoot">
+          <p:childTnLst>
+            <p:seq concurrent="1" nextAc="seek">
+              <p:cTn id="2" dur="indefinite" nodeType="mainSeq">
+                <p:childTnLst>
+                  <p:par>
+                    <p:cTn id="3" fill="hold">
+                      <p:stCondLst>
+                        <p:cond delay="indefinite"/>
+                      </p:stCondLst>
+                      <p:childTnLst>
+                        <p:par>
+                          <p:cTn id="4" fill="hold">
+                            <p:stCondLst>
+                              <p:cond delay="0"/>
+                            </p:stCondLst>
+                            <p:childTnLst>
+                              <p:par>
+                                <p:cTn id="5" presetID="1" presetClass="entr" presetSubtype="0" fill="hold" nodeType="clickEffect">
+                                  <p:stCondLst>
+                                    <p:cond delay="0"/>
+                                  </p:stCondLst>
+                                  <p:childTnLst>
+                                    <p:set>
+                                      <p:cBhvr>
+                                        <p:cTn id="6" dur="1" fill="hold">
+                                          <p:stCondLst>
+                                            <p:cond delay="0"/>
+                                          </p:stCondLst>
+                                        </p:cTn>
+                                        <p:tgtEl>
+                                          <p:spTgt spid="12"/>
+                                        </p:tgtEl>
+                                        <p:attrNameLst>
+                                          <p:attrName>style.visibility</p:attrName>
+                                        </p:attrNameLst>
+                                      </p:cBhvr>
+                                      <p:to>
+                                        <p:strVal val="visible"/>
+                                      </p:to>
+                                    </p:set>
+                                  </p:childTnLst>
+                                </p:cTn>
+                              </p:par>
+                            </p:childTnLst>
+                          </p:cTn>
+                        </p:par>
+                      </p:childTnLst>
+                    </p:cTn>
+                  </p:par>
+                </p:childTnLst>
+              </p:cTn>
+              <p:prevCondLst>
+                <p:cond evt="onPrev" delay="0">
+                  <p:tgtEl>
+                    <p:sldTgt/>
+                  </p:tgtEl>
+                </p:cond>
+              </p:prevCondLst>
+              <p:nextCondLst>
+                <p:cond evt="onNext" delay="0">
+                  <p:tgtEl>
+                    <p:sldTgt/>
+                  </p:tgtEl>
+                </p:cond>
+              </p:nextCondLst>
+            </p:seq>
+          </p:childTnLst>
+        </p:cTn>
+      </p:par>
+    </p:tnLst>
+  </p:timing>
 </p:sld>
 </file>
 
